--- a/presentation/Stack_Group04_Presentation.pptx
+++ b/presentation/Stack_Group04_Presentation.pptx
@@ -375,7 +375,7 @@
             <a:pPr indent="0" algn="r">
               <a:buNone/>
             </a:pPr>
-            <a:fld id="{63BB3B90-6275-4D66-8C93-66D376031727}" type="slidenum">
+            <a:fld id="{770CBD16-C690-4C81-BB07-96B5B5680CC9}" type="slidenum">
               <a:rPr lang="en-US" sz="1400" b="0" u="none" strike="noStrike">
                 <a:solidFill>
                   <a:srgbClr val="000000"/>
@@ -433,7 +433,7 @@
         <p:spPr>
           <a:xfrm>
             <a:off x="685800" y="1143000"/>
-            <a:ext cx="5486040" cy="3085920"/>
+            <a:ext cx="5485680" cy="3085560"/>
           </a:xfrm>
           <a:prstGeom prst="rect">
             <a:avLst/>
@@ -456,7 +456,7 @@
         <p:spPr>
           <a:xfrm>
             <a:off x="685800" y="4400640"/>
-            <a:ext cx="5486040" cy="3600000"/>
+            <a:ext cx="5485680" cy="3599640"/>
           </a:xfrm>
           <a:prstGeom prst="rect">
             <a:avLst/>
@@ -498,7 +498,7 @@
         <p:spPr>
           <a:xfrm>
             <a:off x="3884760" y="8685360"/>
-            <a:ext cx="2971440" cy="458280"/>
+            <a:ext cx="2971080" cy="457920"/>
           </a:xfrm>
           <a:prstGeom prst="rect">
             <a:avLst/>
@@ -518,6 +518,9 @@
                 <a:spcPct val="100000"/>
               </a:lnSpc>
               <a:buNone/>
+              <a:tabLst>
+                <a:tab pos="0" algn="l"/>
+              </a:tabLst>
               <a:defRPr lang="en-US" sz="1200" b="0" u="none" strike="noStrike">
                 <a:solidFill>
                   <a:schemeClr val="dk1"/>
@@ -535,8 +538,11 @@
                 <a:spcPct val="100000"/>
               </a:lnSpc>
               <a:buNone/>
+              <a:tabLst>
+                <a:tab pos="0" algn="l"/>
+              </a:tabLst>
             </a:pPr>
-            <a:fld id="{6FCE5CB5-88F3-4DE3-A289-3A1FBDDFFF43}" type="slidenum">
+            <a:fld id="{8923757D-3DCA-4F57-97D5-6AFDEB8ACC9D}" type="slidenum">
               <a:rPr lang="en-US" sz="1200" b="0" u="none" strike="noStrike">
                 <a:solidFill>
                   <a:schemeClr val="dk1"/>
@@ -594,7 +600,7 @@
         <p:spPr>
           <a:xfrm>
             <a:off x="685800" y="1143000"/>
-            <a:ext cx="5486040" cy="3085920"/>
+            <a:ext cx="5485680" cy="3085560"/>
           </a:xfrm>
           <a:prstGeom prst="rect">
             <a:avLst/>
@@ -617,7 +623,7 @@
         <p:spPr>
           <a:xfrm>
             <a:off x="685800" y="4400640"/>
-            <a:ext cx="5486040" cy="3600000"/>
+            <a:ext cx="5485680" cy="3599640"/>
           </a:xfrm>
           <a:prstGeom prst="rect">
             <a:avLst/>
@@ -659,7 +665,7 @@
         <p:spPr>
           <a:xfrm>
             <a:off x="3884760" y="8685360"/>
-            <a:ext cx="2971440" cy="458280"/>
+            <a:ext cx="2971080" cy="457920"/>
           </a:xfrm>
           <a:prstGeom prst="rect">
             <a:avLst/>
@@ -679,6 +685,9 @@
                 <a:spcPct val="100000"/>
               </a:lnSpc>
               <a:buNone/>
+              <a:tabLst>
+                <a:tab pos="0" algn="l"/>
+              </a:tabLst>
               <a:defRPr lang="en-US" sz="1200" b="0" u="none" strike="noStrike">
                 <a:solidFill>
                   <a:schemeClr val="dk1"/>
@@ -696,8 +705,11 @@
                 <a:spcPct val="100000"/>
               </a:lnSpc>
               <a:buNone/>
+              <a:tabLst>
+                <a:tab pos="0" algn="l"/>
+              </a:tabLst>
             </a:pPr>
-            <a:fld id="{CDE9ED30-0960-4DD5-8F1E-A43BE3EBCF1C}" type="slidenum">
+            <a:fld id="{77915554-14CC-4844-9DAB-C33E25D01733}" type="slidenum">
               <a:rPr lang="en-US" sz="1200" b="0" u="none" strike="noStrike">
                 <a:solidFill>
                   <a:schemeClr val="dk1"/>
@@ -707,7 +719,7 @@
                 <a:latin typeface="+mn-lt"/>
                 <a:ea typeface="+mn-ea"/>
               </a:rPr>
-              <a:t>11</a:t>
+              <a:t>&lt;number&gt;</a:t>
             </a:fld>
             <a:endParaRPr lang="en-US" sz="1200" b="0" u="none" strike="noStrike">
               <a:solidFill>
@@ -755,7 +767,7 @@
         <p:spPr>
           <a:xfrm>
             <a:off x="685800" y="1143000"/>
-            <a:ext cx="5486040" cy="3085920"/>
+            <a:ext cx="5485680" cy="3085560"/>
           </a:xfrm>
           <a:prstGeom prst="rect">
             <a:avLst/>
@@ -778,7 +790,7 @@
         <p:spPr>
           <a:xfrm>
             <a:off x="685800" y="4400640"/>
-            <a:ext cx="5486040" cy="3600000"/>
+            <a:ext cx="5485680" cy="3599640"/>
           </a:xfrm>
           <a:prstGeom prst="rect">
             <a:avLst/>
@@ -820,7 +832,7 @@
         <p:spPr>
           <a:xfrm>
             <a:off x="3884760" y="8685360"/>
-            <a:ext cx="2971440" cy="458280"/>
+            <a:ext cx="2971080" cy="457920"/>
           </a:xfrm>
           <a:prstGeom prst="rect">
             <a:avLst/>
@@ -840,6 +852,9 @@
                 <a:spcPct val="100000"/>
               </a:lnSpc>
               <a:buNone/>
+              <a:tabLst>
+                <a:tab pos="0" algn="l"/>
+              </a:tabLst>
               <a:defRPr lang="en-US" sz="1200" b="0" u="none" strike="noStrike">
                 <a:solidFill>
                   <a:schemeClr val="dk1"/>
@@ -857,8 +872,11 @@
                 <a:spcPct val="100000"/>
               </a:lnSpc>
               <a:buNone/>
+              <a:tabLst>
+                <a:tab pos="0" algn="l"/>
+              </a:tabLst>
             </a:pPr>
-            <a:fld id="{70C2F632-E62E-43D5-A8FE-6E3ABC6146CA}" type="slidenum">
+            <a:fld id="{8AD763FD-9E99-481D-ADE1-A8A38F14CE12}" type="slidenum">
               <a:rPr lang="en-US" sz="1200" b="0" u="none" strike="noStrike">
                 <a:solidFill>
                   <a:schemeClr val="dk1"/>
@@ -868,7 +886,7 @@
                 <a:latin typeface="+mn-lt"/>
                 <a:ea typeface="+mn-ea"/>
               </a:rPr>
-              <a:t>11</a:t>
+              <a:t>&lt;number&gt;</a:t>
             </a:fld>
             <a:endParaRPr lang="en-US" sz="1200" b="0" u="none" strike="noStrike">
               <a:solidFill>
@@ -916,7 +934,7 @@
         <p:spPr>
           <a:xfrm>
             <a:off x="685800" y="1143000"/>
-            <a:ext cx="5486040" cy="3085920"/>
+            <a:ext cx="5485680" cy="3085560"/>
           </a:xfrm>
           <a:prstGeom prst="rect">
             <a:avLst/>
@@ -939,7 +957,7 @@
         <p:spPr>
           <a:xfrm>
             <a:off x="685800" y="4400640"/>
-            <a:ext cx="5486040" cy="3600000"/>
+            <a:ext cx="5485680" cy="3599640"/>
           </a:xfrm>
           <a:prstGeom prst="rect">
             <a:avLst/>
@@ -981,7 +999,7 @@
         <p:spPr>
           <a:xfrm>
             <a:off x="3884760" y="8685360"/>
-            <a:ext cx="2971440" cy="458280"/>
+            <a:ext cx="2971080" cy="457920"/>
           </a:xfrm>
           <a:prstGeom prst="rect">
             <a:avLst/>
@@ -1001,6 +1019,9 @@
                 <a:spcPct val="100000"/>
               </a:lnSpc>
               <a:buNone/>
+              <a:tabLst>
+                <a:tab pos="0" algn="l"/>
+              </a:tabLst>
               <a:defRPr lang="en-US" sz="1200" b="0" u="none" strike="noStrike">
                 <a:solidFill>
                   <a:schemeClr val="dk1"/>
@@ -1018,8 +1039,11 @@
                 <a:spcPct val="100000"/>
               </a:lnSpc>
               <a:buNone/>
+              <a:tabLst>
+                <a:tab pos="0" algn="l"/>
+              </a:tabLst>
             </a:pPr>
-            <a:fld id="{79B09AA1-DDC8-446F-A17F-F9659660DC6D}" type="slidenum">
+            <a:fld id="{8C17DF68-D0C8-4AFD-81D3-EACDEA1AC50C}" type="slidenum">
               <a:rPr lang="en-US" sz="1200" b="0" u="none" strike="noStrike">
                 <a:solidFill>
                   <a:schemeClr val="dk1"/>
@@ -1077,7 +1101,7 @@
         <p:spPr>
           <a:xfrm>
             <a:off x="685800" y="1143000"/>
-            <a:ext cx="5486040" cy="3085920"/>
+            <a:ext cx="5485680" cy="3085560"/>
           </a:xfrm>
           <a:prstGeom prst="rect">
             <a:avLst/>
@@ -1100,7 +1124,7 @@
         <p:spPr>
           <a:xfrm>
             <a:off x="685800" y="4400640"/>
-            <a:ext cx="5486040" cy="3600000"/>
+            <a:ext cx="5485680" cy="3599640"/>
           </a:xfrm>
           <a:prstGeom prst="rect">
             <a:avLst/>
@@ -1142,7 +1166,7 @@
         <p:spPr>
           <a:xfrm>
             <a:off x="3884760" y="8685360"/>
-            <a:ext cx="2971440" cy="458280"/>
+            <a:ext cx="2971080" cy="457920"/>
           </a:xfrm>
           <a:prstGeom prst="rect">
             <a:avLst/>
@@ -1162,6 +1186,9 @@
                 <a:spcPct val="100000"/>
               </a:lnSpc>
               <a:buNone/>
+              <a:tabLst>
+                <a:tab pos="0" algn="l"/>
+              </a:tabLst>
               <a:defRPr lang="en-US" sz="1200" b="0" u="none" strike="noStrike">
                 <a:solidFill>
                   <a:schemeClr val="dk1"/>
@@ -1179,8 +1206,11 @@
                 <a:spcPct val="100000"/>
               </a:lnSpc>
               <a:buNone/>
+              <a:tabLst>
+                <a:tab pos="0" algn="l"/>
+              </a:tabLst>
             </a:pPr>
-            <a:fld id="{2C10EE7C-EFB8-4A10-8D7F-F8B23B524126}" type="slidenum">
+            <a:fld id="{E6B77DAF-6552-45B2-8666-3DADE8CBCFD7}" type="slidenum">
               <a:rPr lang="en-US" sz="1200" b="0" u="none" strike="noStrike">
                 <a:solidFill>
                   <a:schemeClr val="dk1"/>
@@ -1238,7 +1268,7 @@
         <p:spPr>
           <a:xfrm>
             <a:off x="685800" y="1143000"/>
-            <a:ext cx="5486040" cy="3085920"/>
+            <a:ext cx="5485680" cy="3085560"/>
           </a:xfrm>
           <a:prstGeom prst="rect">
             <a:avLst/>
@@ -1261,7 +1291,7 @@
         <p:spPr>
           <a:xfrm>
             <a:off x="685800" y="4400640"/>
-            <a:ext cx="5486040" cy="3600000"/>
+            <a:ext cx="5485680" cy="3599640"/>
           </a:xfrm>
           <a:prstGeom prst="rect">
             <a:avLst/>
@@ -1303,7 +1333,7 @@
         <p:spPr>
           <a:xfrm>
             <a:off x="3884760" y="8685360"/>
-            <a:ext cx="2971440" cy="458280"/>
+            <a:ext cx="2971080" cy="457920"/>
           </a:xfrm>
           <a:prstGeom prst="rect">
             <a:avLst/>
@@ -1323,6 +1353,9 @@
                 <a:spcPct val="100000"/>
               </a:lnSpc>
               <a:buNone/>
+              <a:tabLst>
+                <a:tab pos="0" algn="l"/>
+              </a:tabLst>
               <a:defRPr lang="en-US" sz="1200" b="0" u="none" strike="noStrike">
                 <a:solidFill>
                   <a:schemeClr val="dk1"/>
@@ -1340,8 +1373,11 @@
                 <a:spcPct val="100000"/>
               </a:lnSpc>
               <a:buNone/>
+              <a:tabLst>
+                <a:tab pos="0" algn="l"/>
+              </a:tabLst>
             </a:pPr>
-            <a:fld id="{8B5FC2D8-E767-4329-BBE5-30B0B3491D53}" type="slidenum">
+            <a:fld id="{211B4E3A-6A20-4988-B72A-55FB26C857B4}" type="slidenum">
               <a:rPr lang="en-US" sz="1200" b="0" u="none" strike="noStrike">
                 <a:solidFill>
                   <a:schemeClr val="dk1"/>
@@ -1351,7 +1387,7 @@
                 <a:latin typeface="+mn-lt"/>
                 <a:ea typeface="+mn-ea"/>
               </a:rPr>
-              <a:t>11</a:t>
+              <a:t>&lt;number&gt;</a:t>
             </a:fld>
             <a:endParaRPr lang="en-US" sz="1200" b="0" u="none" strike="noStrike">
               <a:solidFill>
@@ -1399,7 +1435,7 @@
         <p:spPr>
           <a:xfrm>
             <a:off x="685800" y="1143000"/>
-            <a:ext cx="5486040" cy="3085920"/>
+            <a:ext cx="5485680" cy="3085560"/>
           </a:xfrm>
           <a:prstGeom prst="rect">
             <a:avLst/>
@@ -1422,7 +1458,7 @@
         <p:spPr>
           <a:xfrm>
             <a:off x="685800" y="4400640"/>
-            <a:ext cx="5486040" cy="3600000"/>
+            <a:ext cx="5485680" cy="3599640"/>
           </a:xfrm>
           <a:prstGeom prst="rect">
             <a:avLst/>
@@ -1464,7 +1500,7 @@
         <p:spPr>
           <a:xfrm>
             <a:off x="3884760" y="8685360"/>
-            <a:ext cx="2971440" cy="458280"/>
+            <a:ext cx="2971080" cy="457920"/>
           </a:xfrm>
           <a:prstGeom prst="rect">
             <a:avLst/>
@@ -1484,6 +1520,9 @@
                 <a:spcPct val="100000"/>
               </a:lnSpc>
               <a:buNone/>
+              <a:tabLst>
+                <a:tab pos="0" algn="l"/>
+              </a:tabLst>
               <a:defRPr lang="en-US" sz="1200" b="0" u="none" strike="noStrike">
                 <a:solidFill>
                   <a:schemeClr val="dk1"/>
@@ -1501,8 +1540,11 @@
                 <a:spcPct val="100000"/>
               </a:lnSpc>
               <a:buNone/>
+              <a:tabLst>
+                <a:tab pos="0" algn="l"/>
+              </a:tabLst>
             </a:pPr>
-            <a:fld id="{8F9A0DBE-25C1-44FF-93CA-27D8FC4C4D8D}" type="slidenum">
+            <a:fld id="{5136449C-B93F-487E-B797-0E7EC5AEB28F}" type="slidenum">
               <a:rPr lang="en-US" sz="1200" b="0" u="none" strike="noStrike">
                 <a:solidFill>
                   <a:schemeClr val="dk1"/>
@@ -1512,7 +1554,7 @@
                 <a:latin typeface="+mn-lt"/>
                 <a:ea typeface="+mn-ea"/>
               </a:rPr>
-              <a:t>11</a:t>
+              <a:t>&lt;number&gt;</a:t>
             </a:fld>
             <a:endParaRPr lang="en-US" sz="1200" b="0" u="none" strike="noStrike">
               <a:solidFill>
@@ -1560,7 +1602,7 @@
         <p:spPr>
           <a:xfrm>
             <a:off x="685800" y="1143000"/>
-            <a:ext cx="5486040" cy="3085920"/>
+            <a:ext cx="5485680" cy="3085560"/>
           </a:xfrm>
           <a:prstGeom prst="rect">
             <a:avLst/>
@@ -1583,7 +1625,7 @@
         <p:spPr>
           <a:xfrm>
             <a:off x="685800" y="4400640"/>
-            <a:ext cx="5486040" cy="3600000"/>
+            <a:ext cx="5485680" cy="3599640"/>
           </a:xfrm>
           <a:prstGeom prst="rect">
             <a:avLst/>
@@ -1625,7 +1667,7 @@
         <p:spPr>
           <a:xfrm>
             <a:off x="3884760" y="8685360"/>
-            <a:ext cx="2971440" cy="458280"/>
+            <a:ext cx="2971080" cy="457920"/>
           </a:xfrm>
           <a:prstGeom prst="rect">
             <a:avLst/>
@@ -1645,6 +1687,9 @@
                 <a:spcPct val="100000"/>
               </a:lnSpc>
               <a:buNone/>
+              <a:tabLst>
+                <a:tab pos="0" algn="l"/>
+              </a:tabLst>
               <a:defRPr lang="en-US" sz="1200" b="0" u="none" strike="noStrike">
                 <a:solidFill>
                   <a:schemeClr val="dk1"/>
@@ -1662,8 +1707,11 @@
                 <a:spcPct val="100000"/>
               </a:lnSpc>
               <a:buNone/>
+              <a:tabLst>
+                <a:tab pos="0" algn="l"/>
+              </a:tabLst>
             </a:pPr>
-            <a:fld id="{F9834AC9-6457-42B3-8EB2-4D8A5B79130B}" type="slidenum">
+            <a:fld id="{C7F64250-E216-4F1C-BCB1-E402C845A5F0}" type="slidenum">
               <a:rPr lang="en-US" sz="1200" b="0" u="none" strike="noStrike">
                 <a:solidFill>
                   <a:schemeClr val="dk1"/>
@@ -1673,7 +1721,7 @@
                 <a:latin typeface="+mn-lt"/>
                 <a:ea typeface="+mn-ea"/>
               </a:rPr>
-              <a:t>11</a:t>
+              <a:t>&lt;number&gt;</a:t>
             </a:fld>
             <a:endParaRPr lang="en-US" sz="1200" b="0" u="none" strike="noStrike">
               <a:solidFill>
@@ -1721,7 +1769,7 @@
         <p:spPr>
           <a:xfrm>
             <a:off x="685800" y="1143000"/>
-            <a:ext cx="5486040" cy="3085920"/>
+            <a:ext cx="5485680" cy="3085560"/>
           </a:xfrm>
           <a:prstGeom prst="rect">
             <a:avLst/>
@@ -1744,7 +1792,7 @@
         <p:spPr>
           <a:xfrm>
             <a:off x="685800" y="4400640"/>
-            <a:ext cx="5486040" cy="3600000"/>
+            <a:ext cx="5485680" cy="3599640"/>
           </a:xfrm>
           <a:prstGeom prst="rect">
             <a:avLst/>
@@ -1786,7 +1834,7 @@
         <p:spPr>
           <a:xfrm>
             <a:off x="3884760" y="8685360"/>
-            <a:ext cx="2971440" cy="458280"/>
+            <a:ext cx="2971080" cy="457920"/>
           </a:xfrm>
           <a:prstGeom prst="rect">
             <a:avLst/>
@@ -1806,6 +1854,9 @@
                 <a:spcPct val="100000"/>
               </a:lnSpc>
               <a:buNone/>
+              <a:tabLst>
+                <a:tab pos="0" algn="l"/>
+              </a:tabLst>
               <a:defRPr lang="en-US" sz="1200" b="0" u="none" strike="noStrike">
                 <a:solidFill>
                   <a:schemeClr val="dk1"/>
@@ -1823,8 +1874,11 @@
                 <a:spcPct val="100000"/>
               </a:lnSpc>
               <a:buNone/>
+              <a:tabLst>
+                <a:tab pos="0" algn="l"/>
+              </a:tabLst>
             </a:pPr>
-            <a:fld id="{88AC46BD-7CE4-4252-9DCC-1E40BEAA4C89}" type="slidenum">
+            <a:fld id="{FCC3B595-63D4-4394-A3E7-40374AB29DC2}" type="slidenum">
               <a:rPr lang="en-US" sz="1200" b="0" u="none" strike="noStrike">
                 <a:solidFill>
                   <a:schemeClr val="dk1"/>
@@ -1834,7 +1888,7 @@
                 <a:latin typeface="+mn-lt"/>
                 <a:ea typeface="+mn-ea"/>
               </a:rPr>
-              <a:t>11</a:t>
+              <a:t>&lt;number&gt;</a:t>
             </a:fld>
             <a:endParaRPr lang="en-US" sz="1200" b="0" u="none" strike="noStrike">
               <a:solidFill>
@@ -1882,7 +1936,7 @@
         <p:spPr>
           <a:xfrm>
             <a:off x="685800" y="1143000"/>
-            <a:ext cx="5486040" cy="3085920"/>
+            <a:ext cx="5485680" cy="3085560"/>
           </a:xfrm>
           <a:prstGeom prst="rect">
             <a:avLst/>
@@ -1905,7 +1959,7 @@
         <p:spPr>
           <a:xfrm>
             <a:off x="685800" y="4400640"/>
-            <a:ext cx="5486040" cy="3600000"/>
+            <a:ext cx="5485680" cy="3599640"/>
           </a:xfrm>
           <a:prstGeom prst="rect">
             <a:avLst/>
@@ -1947,7 +2001,7 @@
         <p:spPr>
           <a:xfrm>
             <a:off x="3884760" y="8685360"/>
-            <a:ext cx="2971440" cy="458280"/>
+            <a:ext cx="2971080" cy="457920"/>
           </a:xfrm>
           <a:prstGeom prst="rect">
             <a:avLst/>
@@ -1967,6 +2021,9 @@
                 <a:spcPct val="100000"/>
               </a:lnSpc>
               <a:buNone/>
+              <a:tabLst>
+                <a:tab pos="0" algn="l"/>
+              </a:tabLst>
               <a:defRPr lang="en-US" sz="1200" b="0" u="none" strike="noStrike">
                 <a:solidFill>
                   <a:schemeClr val="dk1"/>
@@ -1984,8 +2041,11 @@
                 <a:spcPct val="100000"/>
               </a:lnSpc>
               <a:buNone/>
+              <a:tabLst>
+                <a:tab pos="0" algn="l"/>
+              </a:tabLst>
             </a:pPr>
-            <a:fld id="{5AFDF782-6A43-4AC0-8BFB-877D982F6783}" type="slidenum">
+            <a:fld id="{3CA86F77-97C4-48E0-8F53-188752C7EDDF}" type="slidenum">
               <a:rPr lang="en-US" sz="1200" b="0" u="none" strike="noStrike">
                 <a:solidFill>
                   <a:schemeClr val="dk1"/>
@@ -1995,7 +2055,7 @@
                 <a:latin typeface="+mn-lt"/>
                 <a:ea typeface="+mn-ea"/>
               </a:rPr>
-              <a:t>11</a:t>
+              <a:t>&lt;number&gt;</a:t>
             </a:fld>
             <a:endParaRPr lang="en-US" sz="1200" b="0" u="none" strike="noStrike">
               <a:solidFill>
@@ -2043,7 +2103,7 @@
         <p:spPr>
           <a:xfrm>
             <a:off x="685800" y="1143000"/>
-            <a:ext cx="5486040" cy="3085920"/>
+            <a:ext cx="5485680" cy="3085560"/>
           </a:xfrm>
           <a:prstGeom prst="rect">
             <a:avLst/>
@@ -2066,7 +2126,7 @@
         <p:spPr>
           <a:xfrm>
             <a:off x="685800" y="4400640"/>
-            <a:ext cx="5486040" cy="3600000"/>
+            <a:ext cx="5485680" cy="3599640"/>
           </a:xfrm>
           <a:prstGeom prst="rect">
             <a:avLst/>
@@ -2108,7 +2168,7 @@
         <p:spPr>
           <a:xfrm>
             <a:off x="3884760" y="8685360"/>
-            <a:ext cx="2971440" cy="458280"/>
+            <a:ext cx="2971080" cy="457920"/>
           </a:xfrm>
           <a:prstGeom prst="rect">
             <a:avLst/>
@@ -2128,6 +2188,9 @@
                 <a:spcPct val="100000"/>
               </a:lnSpc>
               <a:buNone/>
+              <a:tabLst>
+                <a:tab pos="0" algn="l"/>
+              </a:tabLst>
               <a:defRPr lang="en-US" sz="1200" b="0" u="none" strike="noStrike">
                 <a:solidFill>
                   <a:schemeClr val="dk1"/>
@@ -2145,8 +2208,11 @@
                 <a:spcPct val="100000"/>
               </a:lnSpc>
               <a:buNone/>
+              <a:tabLst>
+                <a:tab pos="0" algn="l"/>
+              </a:tabLst>
             </a:pPr>
-            <a:fld id="{70B8CFAF-43E8-483E-B8AF-406BFD0C9923}" type="slidenum">
+            <a:fld id="{6426FA71-D941-49FE-B6DE-CDF2A10140CF}" type="slidenum">
               <a:rPr lang="en-US" sz="1200" b="0" u="none" strike="noStrike">
                 <a:solidFill>
                   <a:schemeClr val="dk1"/>
@@ -2156,7 +2222,7 @@
                 <a:latin typeface="+mn-lt"/>
                 <a:ea typeface="+mn-ea"/>
               </a:rPr>
-              <a:t>11</a:t>
+              <a:t>&lt;number&gt;</a:t>
             </a:fld>
             <a:endParaRPr lang="en-US" sz="1200" b="0" u="none" strike="noStrike">
               <a:solidFill>
@@ -2204,7 +2270,7 @@
         <p:spPr>
           <a:xfrm>
             <a:off x="685800" y="1143000"/>
-            <a:ext cx="5486040" cy="3085920"/>
+            <a:ext cx="5485680" cy="3085560"/>
           </a:xfrm>
           <a:prstGeom prst="rect">
             <a:avLst/>
@@ -2227,7 +2293,7 @@
         <p:spPr>
           <a:xfrm>
             <a:off x="685800" y="4400640"/>
-            <a:ext cx="5486040" cy="3600000"/>
+            <a:ext cx="5485680" cy="3599640"/>
           </a:xfrm>
           <a:prstGeom prst="rect">
             <a:avLst/>
@@ -2269,7 +2335,7 @@
         <p:spPr>
           <a:xfrm>
             <a:off x="3884760" y="8685360"/>
-            <a:ext cx="2971440" cy="458280"/>
+            <a:ext cx="2971080" cy="457920"/>
           </a:xfrm>
           <a:prstGeom prst="rect">
             <a:avLst/>
@@ -2289,6 +2355,9 @@
                 <a:spcPct val="100000"/>
               </a:lnSpc>
               <a:buNone/>
+              <a:tabLst>
+                <a:tab pos="0" algn="l"/>
+              </a:tabLst>
               <a:defRPr lang="en-US" sz="1200" b="0" u="none" strike="noStrike">
                 <a:solidFill>
                   <a:schemeClr val="dk1"/>
@@ -2306,8 +2375,11 @@
                 <a:spcPct val="100000"/>
               </a:lnSpc>
               <a:buNone/>
+              <a:tabLst>
+                <a:tab pos="0" algn="l"/>
+              </a:tabLst>
             </a:pPr>
-            <a:fld id="{A9B4804E-EC98-4CD9-99F8-4AC00015A15A}" type="slidenum">
+            <a:fld id="{7DA60531-8859-4A93-963B-5E6CBDA41491}" type="slidenum">
               <a:rPr lang="en-US" sz="1200" b="0" u="none" strike="noStrike">
                 <a:solidFill>
                   <a:schemeClr val="dk1"/>
@@ -2317,7 +2389,7 @@
                 <a:latin typeface="+mn-lt"/>
                 <a:ea typeface="+mn-ea"/>
               </a:rPr>
-              <a:t>11</a:t>
+              <a:t>&lt;number&gt;</a:t>
             </a:fld>
             <a:endParaRPr lang="en-US" sz="1200" b="0" u="none" strike="noStrike">
               <a:solidFill>
@@ -2397,7 +2469,7 @@
         <p:spPr>
           <a:xfrm>
             <a:off x="0" y="0"/>
-            <a:ext cx="12191400" cy="164160"/>
+            <a:ext cx="12191040" cy="163800"/>
           </a:xfrm>
           <a:prstGeom prst="rect">
             <a:avLst/>
@@ -2486,7 +2558,7 @@
         <p:spPr>
           <a:xfrm>
             <a:off x="502920" y="6537960"/>
-            <a:ext cx="5120280" cy="200880"/>
+            <a:ext cx="5119920" cy="200520"/>
           </a:xfrm>
           <a:prstGeom prst="rect">
             <a:avLst/>
@@ -2559,7 +2631,7 @@
         <p:spPr>
           <a:xfrm>
             <a:off x="8549640" y="6537960"/>
-            <a:ext cx="2651400" cy="200880"/>
+            <a:ext cx="2651040" cy="200520"/>
           </a:xfrm>
           <a:prstGeom prst="rect">
             <a:avLst/>
@@ -2624,7 +2696,7 @@
         <p:spPr>
           <a:xfrm>
             <a:off x="11475720" y="6510600"/>
-            <a:ext cx="799560" cy="299520"/>
+            <a:ext cx="799200" cy="299160"/>
           </a:xfrm>
           <a:prstGeom prst="rect">
             <a:avLst/>
@@ -2644,6 +2716,9 @@
                 <a:spcPct val="100000"/>
               </a:lnSpc>
               <a:buNone/>
+              <a:tabLst>
+                <a:tab pos="0" algn="l"/>
+              </a:tabLst>
               <a:defRPr lang="en-US" sz="1200" b="0" u="none" strike="noStrike">
                 <a:solidFill>
                   <a:srgbClr val="667085"/>
@@ -2661,8 +2736,11 @@
                 <a:spcPct val="100000"/>
               </a:lnSpc>
               <a:buNone/>
+              <a:tabLst>
+                <a:tab pos="0" algn="l"/>
+              </a:tabLst>
             </a:pPr>
-            <a:fld id="{B963A718-AFCB-4CE9-A178-2EAD33B945E9}" type="slidenum">
+            <a:fld id="{0C8EF5CA-93FC-42AD-971D-CDB741035FCE}" type="slidenum">
               <a:rPr lang="en-US" sz="1200" b="0" u="none" strike="noStrike">
                 <a:solidFill>
                   <a:srgbClr val="667085"/>
@@ -2698,7 +2776,7 @@
         <p:spPr>
           <a:xfrm>
             <a:off x="609480" y="273600"/>
-            <a:ext cx="10972440" cy="1144800"/>
+            <a:ext cx="10972080" cy="1144440"/>
           </a:xfrm>
           <a:prstGeom prst="rect">
             <a:avLst/>
@@ -2714,7 +2792,13 @@
           </a:bodyPr>
           <a:lstStyle>
             <a:lvl1pPr indent="0" algn="l">
+              <a:lnSpc>
+                <a:spcPct val="100000"/>
+              </a:lnSpc>
               <a:buNone/>
+              <a:tabLst>
+                <a:tab pos="0" algn="l"/>
+              </a:tabLst>
               <a:defRPr lang="en-US" sz="1800" b="0" u="none" strike="noStrike">
                 <a:solidFill>
                   <a:schemeClr val="dk1"/>
@@ -2727,7 +2811,13 @@
           </a:lstStyle>
           <a:p>
             <a:pPr indent="0" algn="l">
+              <a:lnSpc>
+                <a:spcPct val="100000"/>
+              </a:lnSpc>
               <a:buNone/>
+              <a:tabLst>
+                <a:tab pos="0" algn="l"/>
+              </a:tabLst>
             </a:pPr>
             <a:r>
               <a:rPr lang="en-US" sz="1800" b="0" u="none" strike="noStrike">
@@ -2764,7 +2854,7 @@
         <p:spPr>
           <a:xfrm>
             <a:off x="609480" y="1604520"/>
-            <a:ext cx="10972440" cy="3977280"/>
+            <a:ext cx="10972080" cy="3976920"/>
           </a:xfrm>
           <a:prstGeom prst="rect">
             <a:avLst/>
@@ -2780,6 +2870,9 @@
           </a:bodyPr>
           <a:lstStyle>
             <a:lvl1pPr algn="l">
+              <a:lnSpc>
+                <a:spcPct val="100000"/>
+              </a:lnSpc>
               <a:spcBef>
                 <a:spcPts val="1417"/>
               </a:spcBef>
@@ -2799,6 +2892,9 @@
               </a:defRPr>
             </a:lvl1pPr>
             <a:lvl2pPr lvl="1" algn="l">
+              <a:lnSpc>
+                <a:spcPct val="100000"/>
+              </a:lnSpc>
               <a:spcBef>
                 <a:spcPts val="1134"/>
               </a:spcBef>
@@ -2818,6 +2914,9 @@
               </a:defRPr>
             </a:lvl2pPr>
             <a:lvl3pPr lvl="2" algn="l">
+              <a:lnSpc>
+                <a:spcPct val="100000"/>
+              </a:lnSpc>
               <a:spcBef>
                 <a:spcPts val="850"/>
               </a:spcBef>
@@ -2837,6 +2936,9 @@
               </a:defRPr>
             </a:lvl3pPr>
             <a:lvl4pPr lvl="3" algn="l">
+              <a:lnSpc>
+                <a:spcPct val="100000"/>
+              </a:lnSpc>
               <a:spcBef>
                 <a:spcPts val="567"/>
               </a:spcBef>
@@ -2856,6 +2958,9 @@
               </a:defRPr>
             </a:lvl4pPr>
             <a:lvl5pPr lvl="4" algn="l">
+              <a:lnSpc>
+                <a:spcPct val="100000"/>
+              </a:lnSpc>
               <a:spcBef>
                 <a:spcPts val="283"/>
               </a:spcBef>
@@ -2875,6 +2980,9 @@
               </a:defRPr>
             </a:lvl5pPr>
             <a:lvl6pPr lvl="5" algn="l">
+              <a:lnSpc>
+                <a:spcPct val="100000"/>
+              </a:lnSpc>
               <a:spcBef>
                 <a:spcPts val="283"/>
               </a:spcBef>
@@ -2894,6 +3002,9 @@
               </a:defRPr>
             </a:lvl6pPr>
             <a:lvl7pPr lvl="6" algn="l">
+              <a:lnSpc>
+                <a:spcPct val="100000"/>
+              </a:lnSpc>
               <a:spcBef>
                 <a:spcPts val="283"/>
               </a:spcBef>
@@ -2915,6 +3026,9 @@
           </a:lstStyle>
           <a:p>
             <a:pPr marL="432000" indent="-324000" algn="l">
+              <a:lnSpc>
+                <a:spcPct val="100000"/>
+              </a:lnSpc>
               <a:spcBef>
                 <a:spcPts val="1417"/>
               </a:spcBef>
@@ -2947,6 +3061,9 @@
           </a:p>
           <a:p>
             <a:pPr marL="864000" lvl="1" indent="-324000" algn="l">
+              <a:lnSpc>
+                <a:spcPct val="100000"/>
+              </a:lnSpc>
               <a:spcBef>
                 <a:spcPts val="1134"/>
               </a:spcBef>
@@ -2979,6 +3096,9 @@
           </a:p>
           <a:p>
             <a:pPr marL="1296000" lvl="2" indent="-288000" algn="l">
+              <a:lnSpc>
+                <a:spcPct val="100000"/>
+              </a:lnSpc>
               <a:spcBef>
                 <a:spcPts val="850"/>
               </a:spcBef>
@@ -3011,6 +3131,9 @@
           </a:p>
           <a:p>
             <a:pPr marL="1728000" lvl="3" indent="-216000" algn="l">
+              <a:lnSpc>
+                <a:spcPct val="100000"/>
+              </a:lnSpc>
               <a:spcBef>
                 <a:spcPts val="567"/>
               </a:spcBef>
@@ -3043,6 +3166,9 @@
           </a:p>
           <a:p>
             <a:pPr marL="2160000" lvl="4" indent="-216000" algn="l">
+              <a:lnSpc>
+                <a:spcPct val="100000"/>
+              </a:lnSpc>
               <a:spcBef>
                 <a:spcPts val="283"/>
               </a:spcBef>
@@ -3075,6 +3201,9 @@
           </a:p>
           <a:p>
             <a:pPr marL="2592000" lvl="5" indent="-216000" algn="l">
+              <a:lnSpc>
+                <a:spcPct val="100000"/>
+              </a:lnSpc>
               <a:spcBef>
                 <a:spcPts val="283"/>
               </a:spcBef>
@@ -3107,6 +3236,9 @@
           </a:p>
           <a:p>
             <a:pPr marL="3024000" lvl="6" indent="-216000" algn="l">
+              <a:lnSpc>
+                <a:spcPct val="100000"/>
+              </a:lnSpc>
               <a:spcBef>
                 <a:spcPts val="283"/>
               </a:spcBef>
@@ -3197,7 +3329,7 @@
         <p:spPr>
           <a:xfrm>
             <a:off x="685800" y="914400"/>
-            <a:ext cx="1828440" cy="347040"/>
+            <a:ext cx="1828080" cy="346680"/>
           </a:xfrm>
           <a:prstGeom prst="rect">
             <a:avLst/>
@@ -3258,7 +3390,7 @@
         <p:spPr>
           <a:xfrm>
             <a:off x="685800" y="914400"/>
-            <a:ext cx="1828440" cy="383760"/>
+            <a:ext cx="1828080" cy="383400"/>
           </a:xfrm>
           <a:prstGeom prst="roundRect">
             <a:avLst>
@@ -3306,7 +3438,7 @@
         <p:spPr>
           <a:xfrm>
             <a:off x="685800" y="1737360"/>
-            <a:ext cx="10698120" cy="685440"/>
+            <a:ext cx="10697760" cy="685080"/>
           </a:xfrm>
           <a:prstGeom prst="rect">
             <a:avLst/>
@@ -3367,7 +3499,7 @@
         <p:spPr>
           <a:xfrm>
             <a:off x="713160" y="2423160"/>
-            <a:ext cx="10332360" cy="383760"/>
+            <a:ext cx="10332000" cy="383400"/>
           </a:xfrm>
           <a:prstGeom prst="rect">
             <a:avLst/>
@@ -3428,7 +3560,7 @@
         <p:spPr>
           <a:xfrm>
             <a:off x="713160" y="3063240"/>
-            <a:ext cx="3520080" cy="1508400"/>
+            <a:ext cx="3519720" cy="1508040"/>
           </a:xfrm>
           <a:prstGeom prst="roundRect">
             <a:avLst>
@@ -3476,7 +3608,7 @@
         <p:spPr>
           <a:xfrm>
             <a:off x="877680" y="3154680"/>
-            <a:ext cx="3191040" cy="273960"/>
+            <a:ext cx="3190680" cy="273600"/>
           </a:xfrm>
           <a:prstGeom prst="rect">
             <a:avLst/>
@@ -3494,7 +3626,7 @@
         </p:style>
         <p:txBody>
           <a:bodyPr lIns="0" tIns="0" rIns="0" bIns="0" anchor="ctr">
-            <a:normAutofit/>
+            <a:normAutofit lnSpcReduction="9999"/>
           </a:bodyPr>
           <a:p>
             <a:pPr defTabSz="914400">
@@ -3537,7 +3669,7 @@
         <p:spPr>
           <a:xfrm>
             <a:off x="877680" y="3483720"/>
-            <a:ext cx="3191040" cy="996480"/>
+            <a:ext cx="3190680" cy="996120"/>
           </a:xfrm>
           <a:prstGeom prst="rect">
             <a:avLst/>
@@ -3682,7 +3814,7 @@
         <p:spPr>
           <a:xfrm>
             <a:off x="4370760" y="3063240"/>
-            <a:ext cx="3520080" cy="1508400"/>
+            <a:ext cx="3519720" cy="1508040"/>
           </a:xfrm>
           <a:prstGeom prst="roundRect">
             <a:avLst>
@@ -3730,7 +3862,7 @@
         <p:spPr>
           <a:xfrm>
             <a:off x="4535280" y="3154680"/>
-            <a:ext cx="3191040" cy="273960"/>
+            <a:ext cx="3190680" cy="273600"/>
           </a:xfrm>
           <a:prstGeom prst="rect">
             <a:avLst/>
@@ -3748,7 +3880,7 @@
         </p:style>
         <p:txBody>
           <a:bodyPr lIns="0" tIns="0" rIns="0" bIns="0" anchor="ctr">
-            <a:normAutofit/>
+            <a:normAutofit lnSpcReduction="9999"/>
           </a:bodyPr>
           <a:p>
             <a:pPr defTabSz="914400">
@@ -3791,7 +3923,7 @@
         <p:spPr>
           <a:xfrm>
             <a:off x="4535280" y="3483720"/>
-            <a:ext cx="3191040" cy="996480"/>
+            <a:ext cx="3190680" cy="996120"/>
           </a:xfrm>
           <a:prstGeom prst="rect">
             <a:avLst/>
@@ -3936,7 +4068,7 @@
         <p:spPr>
           <a:xfrm>
             <a:off x="8028360" y="3063240"/>
-            <a:ext cx="3428640" cy="1508400"/>
+            <a:ext cx="3428280" cy="1508040"/>
           </a:xfrm>
           <a:prstGeom prst="roundRect">
             <a:avLst>
@@ -3984,7 +4116,7 @@
         <p:spPr>
           <a:xfrm>
             <a:off x="8192880" y="3154680"/>
-            <a:ext cx="3099600" cy="273960"/>
+            <a:ext cx="3099240" cy="273600"/>
           </a:xfrm>
           <a:prstGeom prst="rect">
             <a:avLst/>
@@ -4002,7 +4134,7 @@
         </p:style>
         <p:txBody>
           <a:bodyPr lIns="0" tIns="0" rIns="0" bIns="0" anchor="ctr">
-            <a:normAutofit/>
+            <a:normAutofit lnSpcReduction="9999"/>
           </a:bodyPr>
           <a:p>
             <a:pPr defTabSz="914400">
@@ -4045,7 +4177,7 @@
         <p:spPr>
           <a:xfrm>
             <a:off x="8192880" y="3483720"/>
-            <a:ext cx="3099600" cy="996480"/>
+            <a:ext cx="3099240" cy="996120"/>
           </a:xfrm>
           <a:prstGeom prst="rect">
             <a:avLst/>
@@ -4214,7 +4346,7 @@
         <p:spPr>
           <a:xfrm>
             <a:off x="731520" y="5486400"/>
-            <a:ext cx="10698120" cy="319680"/>
+            <a:ext cx="10697760" cy="319320"/>
           </a:xfrm>
           <a:prstGeom prst="rect">
             <a:avLst/>
@@ -4232,7 +4364,7 @@
         </p:style>
         <p:txBody>
           <a:bodyPr lIns="0" tIns="0" rIns="0" bIns="0" anchor="ctr">
-            <a:normAutofit fontScale="85000" lnSpcReduction="9999"/>
+            <a:normAutofit fontScale="77500" lnSpcReduction="19999"/>
           </a:bodyPr>
           <a:p>
             <a:pPr defTabSz="914400">
@@ -4331,7 +4463,7 @@
                 <a:latin typeface="TH Sarabun New"/>
                 <a:cs typeface="TH Sarabun New"/>
               </a:rPr>
-              <a:t>นันทสิทธิ์ ป้องภัย </a:t>
+              <a:t>นาย นันทสิทธิ์ ป้องภัย </a:t>
             </a:r>
             <a:r>
               <a:rPr lang="en-US" sz="1600" b="0" u="none" strike="noStrike">
@@ -4379,7 +4511,7 @@
                 <a:latin typeface="TH Sarabun New"/>
                 <a:cs typeface="TH Sarabun New"/>
               </a:rPr>
-              <a:t>มหิทธิกรณ์ สุดมี </a:t>
+              <a:t>นาย มหิทธิกรณ์ สุดมี </a:t>
             </a:r>
             <a:r>
               <a:rPr lang="en-US" sz="1600" b="0" u="none" strike="noStrike">
@@ -4403,7 +4535,7 @@
                 <a:latin typeface="TH Sarabun New"/>
                 <a:cs typeface="TH Sarabun New"/>
               </a:rPr>
-              <a:t>ทัศนัย</a:t>
+              <a:t>นาย ทัศนัย</a:t>
             </a:r>
             <a:endParaRPr lang="en-US" sz="1600" b="0" u="none" strike="noStrike">
               <a:solidFill>
@@ -4429,7 +4561,7 @@
         <p:spPr>
           <a:xfrm>
             <a:off x="11475720" y="6510600"/>
-            <a:ext cx="799560" cy="299520"/>
+            <a:ext cx="799200" cy="299160"/>
           </a:xfrm>
           <a:prstGeom prst="rect">
             <a:avLst/>
@@ -4449,6 +4581,9 @@
                 <a:spcPct val="100000"/>
               </a:lnSpc>
               <a:buNone/>
+              <a:tabLst>
+                <a:tab pos="0" algn="l"/>
+              </a:tabLst>
               <a:defRPr lang="en-US" sz="1200" b="0" u="none" strike="noStrike">
                 <a:solidFill>
                   <a:srgbClr val="667085"/>
@@ -4466,8 +4601,11 @@
                 <a:spcPct val="100000"/>
               </a:lnSpc>
               <a:buNone/>
+              <a:tabLst>
+                <a:tab pos="0" algn="l"/>
+              </a:tabLst>
             </a:pPr>
-            <a:fld id="{58EF700E-5562-48F1-8713-A120F37C7F64}" type="slidenum">
+            <a:fld id="{05BABF5D-7980-4EAD-933B-86BCBF495184}" type="slidenum">
               <a:rPr lang="en-US" sz="1200" b="0" u="none" strike="noStrike">
                 <a:solidFill>
                   <a:srgbClr val="667085"/>
@@ -4529,7 +4667,7 @@
         <p:spPr>
           <a:xfrm>
             <a:off x="530280" y="329040"/>
-            <a:ext cx="10972440" cy="438480"/>
+            <a:ext cx="10972080" cy="438120"/>
           </a:xfrm>
           <a:prstGeom prst="rect">
             <a:avLst/>
@@ -4586,7 +4724,7 @@
         <p:spPr>
           <a:xfrm>
             <a:off x="548640" y="841320"/>
-            <a:ext cx="10972440" cy="310680"/>
+            <a:ext cx="10972080" cy="310320"/>
           </a:xfrm>
           <a:prstGeom prst="rect">
             <a:avLst/>
@@ -4659,7 +4797,7 @@
         <p:spPr>
           <a:xfrm>
             <a:off x="438840" y="1188720"/>
-            <a:ext cx="502560" cy="420120"/>
+            <a:ext cx="502200" cy="419760"/>
           </a:xfrm>
           <a:prstGeom prst="rect">
             <a:avLst/>
@@ -4705,7 +4843,7 @@
         <p:spPr>
           <a:xfrm>
             <a:off x="511920" y="1207080"/>
-            <a:ext cx="356400" cy="383760"/>
+            <a:ext cx="356040" cy="383400"/>
           </a:xfrm>
           <a:prstGeom prst="rect">
             <a:avLst/>
@@ -4766,7 +4904,7 @@
         <p:spPr>
           <a:xfrm>
             <a:off x="941760" y="1188720"/>
-            <a:ext cx="2925720" cy="420120"/>
+            <a:ext cx="2925360" cy="419760"/>
           </a:xfrm>
           <a:prstGeom prst="rect">
             <a:avLst/>
@@ -4812,7 +4950,7 @@
         <p:spPr>
           <a:xfrm>
             <a:off x="1014840" y="1207080"/>
-            <a:ext cx="2779560" cy="383760"/>
+            <a:ext cx="2779200" cy="383400"/>
           </a:xfrm>
           <a:prstGeom prst="rect">
             <a:avLst/>
@@ -4873,7 +5011,7 @@
         <p:spPr>
           <a:xfrm>
             <a:off x="3867840" y="1188720"/>
-            <a:ext cx="1919880" cy="420120"/>
+            <a:ext cx="1919520" cy="419760"/>
           </a:xfrm>
           <a:prstGeom prst="rect">
             <a:avLst/>
@@ -4919,7 +5057,7 @@
         <p:spPr>
           <a:xfrm>
             <a:off x="3940920" y="1207080"/>
-            <a:ext cx="1773720" cy="383760"/>
+            <a:ext cx="1773360" cy="383400"/>
           </a:xfrm>
           <a:prstGeom prst="rect">
             <a:avLst/>
@@ -4980,7 +5118,7 @@
         <p:spPr>
           <a:xfrm>
             <a:off x="5788080" y="1188720"/>
-            <a:ext cx="4525920" cy="420120"/>
+            <a:ext cx="4525560" cy="419760"/>
           </a:xfrm>
           <a:prstGeom prst="rect">
             <a:avLst/>
@@ -5026,7 +5164,7 @@
         <p:spPr>
           <a:xfrm>
             <a:off x="5861160" y="1207080"/>
-            <a:ext cx="4379760" cy="383760"/>
+            <a:ext cx="4379400" cy="383400"/>
           </a:xfrm>
           <a:prstGeom prst="rect">
             <a:avLst/>
@@ -5087,7 +5225,7 @@
         <p:spPr>
           <a:xfrm>
             <a:off x="10314360" y="1188720"/>
-            <a:ext cx="1828440" cy="420120"/>
+            <a:ext cx="1828080" cy="419760"/>
           </a:xfrm>
           <a:prstGeom prst="rect">
             <a:avLst/>
@@ -5133,7 +5271,7 @@
         <p:spPr>
           <a:xfrm>
             <a:off x="10387440" y="1207080"/>
-            <a:ext cx="1682280" cy="383760"/>
+            <a:ext cx="1681920" cy="383400"/>
           </a:xfrm>
           <a:prstGeom prst="rect">
             <a:avLst/>
@@ -5194,7 +5332,7 @@
         <p:spPr>
           <a:xfrm>
             <a:off x="438840" y="1609200"/>
-            <a:ext cx="502560" cy="411120"/>
+            <a:ext cx="502200" cy="410760"/>
           </a:xfrm>
           <a:prstGeom prst="rect">
             <a:avLst/>
@@ -5240,7 +5378,7 @@
         <p:spPr>
           <a:xfrm>
             <a:off x="502920" y="1627560"/>
-            <a:ext cx="374400" cy="374400"/>
+            <a:ext cx="374040" cy="374040"/>
           </a:xfrm>
           <a:prstGeom prst="rect">
             <a:avLst/>
@@ -5301,7 +5439,7 @@
         <p:spPr>
           <a:xfrm>
             <a:off x="941760" y="1609200"/>
-            <a:ext cx="2925720" cy="411120"/>
+            <a:ext cx="2925360" cy="410760"/>
           </a:xfrm>
           <a:prstGeom prst="rect">
             <a:avLst/>
@@ -5347,7 +5485,7 @@
         <p:spPr>
           <a:xfrm>
             <a:off x="1005840" y="1627560"/>
-            <a:ext cx="2797560" cy="374400"/>
+            <a:ext cx="2797200" cy="374040"/>
           </a:xfrm>
           <a:prstGeom prst="rect">
             <a:avLst/>
@@ -5408,7 +5546,7 @@
         <p:spPr>
           <a:xfrm>
             <a:off x="3867840" y="1609200"/>
-            <a:ext cx="1919880" cy="411120"/>
+            <a:ext cx="1919520" cy="410760"/>
           </a:xfrm>
           <a:prstGeom prst="rect">
             <a:avLst/>
@@ -5454,7 +5592,7 @@
         <p:spPr>
           <a:xfrm>
             <a:off x="3931920" y="1627560"/>
-            <a:ext cx="1791720" cy="374400"/>
+            <a:ext cx="1791360" cy="374040"/>
           </a:xfrm>
           <a:prstGeom prst="rect">
             <a:avLst/>
@@ -5515,7 +5653,7 @@
         <p:spPr>
           <a:xfrm>
             <a:off x="5788080" y="1609200"/>
-            <a:ext cx="4525920" cy="411120"/>
+            <a:ext cx="4525560" cy="410760"/>
           </a:xfrm>
           <a:prstGeom prst="rect">
             <a:avLst/>
@@ -5561,7 +5699,7 @@
         <p:spPr>
           <a:xfrm>
             <a:off x="5852160" y="1627560"/>
-            <a:ext cx="4397760" cy="374400"/>
+            <a:ext cx="4397400" cy="374040"/>
           </a:xfrm>
           <a:prstGeom prst="rect">
             <a:avLst/>
@@ -5646,7 +5784,7 @@
         <p:spPr>
           <a:xfrm>
             <a:off x="10314360" y="1609200"/>
-            <a:ext cx="1828440" cy="411120"/>
+            <a:ext cx="1828080" cy="410760"/>
           </a:xfrm>
           <a:prstGeom prst="rect">
             <a:avLst/>
@@ -5692,7 +5830,7 @@
         <p:spPr>
           <a:xfrm>
             <a:off x="10378440" y="1627560"/>
-            <a:ext cx="1700280" cy="374400"/>
+            <a:ext cx="1699920" cy="374040"/>
           </a:xfrm>
           <a:prstGeom prst="rect">
             <a:avLst/>
@@ -5753,7 +5891,7 @@
         <p:spPr>
           <a:xfrm>
             <a:off x="438840" y="2020680"/>
-            <a:ext cx="502560" cy="411120"/>
+            <a:ext cx="502200" cy="410760"/>
           </a:xfrm>
           <a:prstGeom prst="rect">
             <a:avLst/>
@@ -5799,7 +5937,7 @@
         <p:spPr>
           <a:xfrm>
             <a:off x="502920" y="2039040"/>
-            <a:ext cx="374400" cy="374400"/>
+            <a:ext cx="374040" cy="374040"/>
           </a:xfrm>
           <a:prstGeom prst="rect">
             <a:avLst/>
@@ -5860,7 +5998,7 @@
         <p:spPr>
           <a:xfrm>
             <a:off x="941760" y="2020680"/>
-            <a:ext cx="2925720" cy="411120"/>
+            <a:ext cx="2925360" cy="410760"/>
           </a:xfrm>
           <a:prstGeom prst="rect">
             <a:avLst/>
@@ -5906,7 +6044,7 @@
         <p:spPr>
           <a:xfrm>
             <a:off x="1005840" y="2039040"/>
-            <a:ext cx="2797560" cy="374400"/>
+            <a:ext cx="2797200" cy="374040"/>
           </a:xfrm>
           <a:prstGeom prst="rect">
             <a:avLst/>
@@ -5967,7 +6105,7 @@
         <p:spPr>
           <a:xfrm>
             <a:off x="3867840" y="2020680"/>
-            <a:ext cx="1919880" cy="411120"/>
+            <a:ext cx="1919520" cy="410760"/>
           </a:xfrm>
           <a:prstGeom prst="rect">
             <a:avLst/>
@@ -6013,7 +6151,7 @@
         <p:spPr>
           <a:xfrm>
             <a:off x="3931920" y="2039040"/>
-            <a:ext cx="1791720" cy="374400"/>
+            <a:ext cx="1791360" cy="374040"/>
           </a:xfrm>
           <a:prstGeom prst="rect">
             <a:avLst/>
@@ -6074,7 +6212,7 @@
         <p:spPr>
           <a:xfrm>
             <a:off x="5788080" y="2020680"/>
-            <a:ext cx="4525920" cy="411120"/>
+            <a:ext cx="4525560" cy="410760"/>
           </a:xfrm>
           <a:prstGeom prst="rect">
             <a:avLst/>
@@ -6120,7 +6258,7 @@
         <p:spPr>
           <a:xfrm>
             <a:off x="5852160" y="2039040"/>
-            <a:ext cx="4397760" cy="374400"/>
+            <a:ext cx="4397400" cy="374040"/>
           </a:xfrm>
           <a:prstGeom prst="rect">
             <a:avLst/>
@@ -6181,7 +6319,7 @@
         <p:spPr>
           <a:xfrm>
             <a:off x="10314360" y="2020680"/>
-            <a:ext cx="1828440" cy="411120"/>
+            <a:ext cx="1828080" cy="410760"/>
           </a:xfrm>
           <a:prstGeom prst="rect">
             <a:avLst/>
@@ -6227,7 +6365,7 @@
         <p:spPr>
           <a:xfrm>
             <a:off x="10378440" y="2039040"/>
-            <a:ext cx="1700280" cy="374400"/>
+            <a:ext cx="1699920" cy="374040"/>
           </a:xfrm>
           <a:prstGeom prst="rect">
             <a:avLst/>
@@ -6288,7 +6426,7 @@
         <p:spPr>
           <a:xfrm>
             <a:off x="438840" y="2432160"/>
-            <a:ext cx="502560" cy="411120"/>
+            <a:ext cx="502200" cy="410760"/>
           </a:xfrm>
           <a:prstGeom prst="rect">
             <a:avLst/>
@@ -6334,7 +6472,7 @@
         <p:spPr>
           <a:xfrm>
             <a:off x="502920" y="2450520"/>
-            <a:ext cx="374400" cy="374400"/>
+            <a:ext cx="374040" cy="374040"/>
           </a:xfrm>
           <a:prstGeom prst="rect">
             <a:avLst/>
@@ -6395,7 +6533,7 @@
         <p:spPr>
           <a:xfrm>
             <a:off x="941760" y="2432160"/>
-            <a:ext cx="2925720" cy="411120"/>
+            <a:ext cx="2925360" cy="410760"/>
           </a:xfrm>
           <a:prstGeom prst="rect">
             <a:avLst/>
@@ -6441,7 +6579,7 @@
         <p:spPr>
           <a:xfrm>
             <a:off x="1005840" y="2450520"/>
-            <a:ext cx="2797560" cy="374400"/>
+            <a:ext cx="2797200" cy="374040"/>
           </a:xfrm>
           <a:prstGeom prst="rect">
             <a:avLst/>
@@ -6502,7 +6640,7 @@
         <p:spPr>
           <a:xfrm>
             <a:off x="3867840" y="2432160"/>
-            <a:ext cx="1919880" cy="411120"/>
+            <a:ext cx="1919520" cy="410760"/>
           </a:xfrm>
           <a:prstGeom prst="rect">
             <a:avLst/>
@@ -6548,7 +6686,7 @@
         <p:spPr>
           <a:xfrm>
             <a:off x="3931920" y="2450520"/>
-            <a:ext cx="1791720" cy="374400"/>
+            <a:ext cx="1791360" cy="374040"/>
           </a:xfrm>
           <a:prstGeom prst="rect">
             <a:avLst/>
@@ -6609,7 +6747,7 @@
         <p:spPr>
           <a:xfrm>
             <a:off x="5788080" y="2432160"/>
-            <a:ext cx="4525920" cy="411120"/>
+            <a:ext cx="4525560" cy="410760"/>
           </a:xfrm>
           <a:prstGeom prst="rect">
             <a:avLst/>
@@ -6655,7 +6793,7 @@
         <p:spPr>
           <a:xfrm>
             <a:off x="5852160" y="2450520"/>
-            <a:ext cx="4397760" cy="374400"/>
+            <a:ext cx="4397400" cy="374040"/>
           </a:xfrm>
           <a:prstGeom prst="rect">
             <a:avLst/>
@@ -6716,7 +6854,7 @@
         <p:spPr>
           <a:xfrm>
             <a:off x="10314360" y="2432160"/>
-            <a:ext cx="1828440" cy="411120"/>
+            <a:ext cx="1828080" cy="410760"/>
           </a:xfrm>
           <a:prstGeom prst="rect">
             <a:avLst/>
@@ -6762,7 +6900,7 @@
         <p:spPr>
           <a:xfrm>
             <a:off x="10378440" y="2450520"/>
-            <a:ext cx="1700280" cy="374400"/>
+            <a:ext cx="1699920" cy="374040"/>
           </a:xfrm>
           <a:prstGeom prst="rect">
             <a:avLst/>
@@ -6823,7 +6961,7 @@
         <p:spPr>
           <a:xfrm>
             <a:off x="438840" y="2843640"/>
-            <a:ext cx="502560" cy="411120"/>
+            <a:ext cx="502200" cy="410760"/>
           </a:xfrm>
           <a:prstGeom prst="rect">
             <a:avLst/>
@@ -6869,7 +7007,7 @@
         <p:spPr>
           <a:xfrm>
             <a:off x="502920" y="2862000"/>
-            <a:ext cx="374400" cy="374400"/>
+            <a:ext cx="374040" cy="374040"/>
           </a:xfrm>
           <a:prstGeom prst="rect">
             <a:avLst/>
@@ -6930,7 +7068,7 @@
         <p:spPr>
           <a:xfrm>
             <a:off x="941760" y="2843640"/>
-            <a:ext cx="2925720" cy="411120"/>
+            <a:ext cx="2925360" cy="410760"/>
           </a:xfrm>
           <a:prstGeom prst="rect">
             <a:avLst/>
@@ -6976,7 +7114,7 @@
         <p:spPr>
           <a:xfrm>
             <a:off x="1005840" y="2862000"/>
-            <a:ext cx="2797560" cy="374400"/>
+            <a:ext cx="2797200" cy="374040"/>
           </a:xfrm>
           <a:prstGeom prst="rect">
             <a:avLst/>
@@ -7037,7 +7175,7 @@
         <p:spPr>
           <a:xfrm>
             <a:off x="3867840" y="2843640"/>
-            <a:ext cx="1919880" cy="411120"/>
+            <a:ext cx="1919520" cy="410760"/>
           </a:xfrm>
           <a:prstGeom prst="rect">
             <a:avLst/>
@@ -7083,7 +7221,7 @@
         <p:spPr>
           <a:xfrm>
             <a:off x="3931920" y="2862000"/>
-            <a:ext cx="1791720" cy="374400"/>
+            <a:ext cx="1791360" cy="374040"/>
           </a:xfrm>
           <a:prstGeom prst="rect">
             <a:avLst/>
@@ -7144,7 +7282,7 @@
         <p:spPr>
           <a:xfrm>
             <a:off x="5788080" y="2843640"/>
-            <a:ext cx="4525920" cy="411120"/>
+            <a:ext cx="4525560" cy="410760"/>
           </a:xfrm>
           <a:prstGeom prst="rect">
             <a:avLst/>
@@ -7190,7 +7328,7 @@
         <p:spPr>
           <a:xfrm>
             <a:off x="5852160" y="2862000"/>
-            <a:ext cx="4397760" cy="374400"/>
+            <a:ext cx="4397400" cy="374040"/>
           </a:xfrm>
           <a:prstGeom prst="rect">
             <a:avLst/>
@@ -7251,7 +7389,7 @@
         <p:spPr>
           <a:xfrm>
             <a:off x="10314360" y="2843640"/>
-            <a:ext cx="1828440" cy="411120"/>
+            <a:ext cx="1828080" cy="410760"/>
           </a:xfrm>
           <a:prstGeom prst="rect">
             <a:avLst/>
@@ -7297,7 +7435,7 @@
         <p:spPr>
           <a:xfrm>
             <a:off x="10378440" y="2862000"/>
-            <a:ext cx="1700280" cy="374400"/>
+            <a:ext cx="1699920" cy="374040"/>
           </a:xfrm>
           <a:prstGeom prst="rect">
             <a:avLst/>
@@ -7358,7 +7496,7 @@
         <p:spPr>
           <a:xfrm>
             <a:off x="438840" y="3255120"/>
-            <a:ext cx="502560" cy="411120"/>
+            <a:ext cx="502200" cy="410760"/>
           </a:xfrm>
           <a:prstGeom prst="rect">
             <a:avLst/>
@@ -7404,7 +7542,7 @@
         <p:spPr>
           <a:xfrm>
             <a:off x="502920" y="3273480"/>
-            <a:ext cx="374400" cy="374400"/>
+            <a:ext cx="374040" cy="374040"/>
           </a:xfrm>
           <a:prstGeom prst="rect">
             <a:avLst/>
@@ -7465,7 +7603,7 @@
         <p:spPr>
           <a:xfrm>
             <a:off x="941760" y="3255120"/>
-            <a:ext cx="2925720" cy="411120"/>
+            <a:ext cx="2925360" cy="410760"/>
           </a:xfrm>
           <a:prstGeom prst="rect">
             <a:avLst/>
@@ -7511,7 +7649,7 @@
         <p:spPr>
           <a:xfrm>
             <a:off x="1005840" y="3273480"/>
-            <a:ext cx="2797560" cy="374400"/>
+            <a:ext cx="2797200" cy="374040"/>
           </a:xfrm>
           <a:prstGeom prst="rect">
             <a:avLst/>
@@ -7572,7 +7710,7 @@
         <p:spPr>
           <a:xfrm>
             <a:off x="3867840" y="3255120"/>
-            <a:ext cx="1919880" cy="411120"/>
+            <a:ext cx="1919520" cy="410760"/>
           </a:xfrm>
           <a:prstGeom prst="rect">
             <a:avLst/>
@@ -7618,7 +7756,7 @@
         <p:spPr>
           <a:xfrm>
             <a:off x="3931920" y="3273480"/>
-            <a:ext cx="1791720" cy="374400"/>
+            <a:ext cx="1791360" cy="374040"/>
           </a:xfrm>
           <a:prstGeom prst="rect">
             <a:avLst/>
@@ -7679,7 +7817,7 @@
         <p:spPr>
           <a:xfrm>
             <a:off x="5788080" y="3255120"/>
-            <a:ext cx="4525920" cy="411120"/>
+            <a:ext cx="4525560" cy="410760"/>
           </a:xfrm>
           <a:prstGeom prst="rect">
             <a:avLst/>
@@ -7725,7 +7863,7 @@
         <p:spPr>
           <a:xfrm>
             <a:off x="5852160" y="3273480"/>
-            <a:ext cx="4397760" cy="374400"/>
+            <a:ext cx="4397400" cy="374040"/>
           </a:xfrm>
           <a:prstGeom prst="rect">
             <a:avLst/>
@@ -7810,7 +7948,7 @@
         <p:spPr>
           <a:xfrm>
             <a:off x="10314360" y="3255120"/>
-            <a:ext cx="1828440" cy="411120"/>
+            <a:ext cx="1828080" cy="410760"/>
           </a:xfrm>
           <a:prstGeom prst="rect">
             <a:avLst/>
@@ -7856,7 +7994,7 @@
         <p:spPr>
           <a:xfrm>
             <a:off x="10378440" y="3273480"/>
-            <a:ext cx="1700280" cy="374400"/>
+            <a:ext cx="1699920" cy="374040"/>
           </a:xfrm>
           <a:prstGeom prst="rect">
             <a:avLst/>
@@ -7917,7 +8055,7 @@
         <p:spPr>
           <a:xfrm>
             <a:off x="438840" y="3666600"/>
-            <a:ext cx="502560" cy="411120"/>
+            <a:ext cx="502200" cy="410760"/>
           </a:xfrm>
           <a:prstGeom prst="rect">
             <a:avLst/>
@@ -7963,7 +8101,7 @@
         <p:spPr>
           <a:xfrm>
             <a:off x="502920" y="3684960"/>
-            <a:ext cx="374400" cy="374400"/>
+            <a:ext cx="374040" cy="374040"/>
           </a:xfrm>
           <a:prstGeom prst="rect">
             <a:avLst/>
@@ -8024,7 +8162,7 @@
         <p:spPr>
           <a:xfrm>
             <a:off x="941760" y="3666600"/>
-            <a:ext cx="2925720" cy="411120"/>
+            <a:ext cx="2925360" cy="410760"/>
           </a:xfrm>
           <a:prstGeom prst="rect">
             <a:avLst/>
@@ -8070,7 +8208,7 @@
         <p:spPr>
           <a:xfrm>
             <a:off x="1005840" y="3684960"/>
-            <a:ext cx="2797560" cy="374400"/>
+            <a:ext cx="2797200" cy="374040"/>
           </a:xfrm>
           <a:prstGeom prst="rect">
             <a:avLst/>
@@ -8131,7 +8269,7 @@
         <p:spPr>
           <a:xfrm>
             <a:off x="3867840" y="3666600"/>
-            <a:ext cx="1919880" cy="411120"/>
+            <a:ext cx="1919520" cy="410760"/>
           </a:xfrm>
           <a:prstGeom prst="rect">
             <a:avLst/>
@@ -8177,7 +8315,7 @@
         <p:spPr>
           <a:xfrm>
             <a:off x="3931920" y="3684960"/>
-            <a:ext cx="1791720" cy="374400"/>
+            <a:ext cx="1791360" cy="374040"/>
           </a:xfrm>
           <a:prstGeom prst="rect">
             <a:avLst/>
@@ -8238,7 +8376,7 @@
         <p:spPr>
           <a:xfrm>
             <a:off x="5788080" y="3666600"/>
-            <a:ext cx="4525920" cy="411120"/>
+            <a:ext cx="4525560" cy="410760"/>
           </a:xfrm>
           <a:prstGeom prst="rect">
             <a:avLst/>
@@ -8284,7 +8422,7 @@
         <p:spPr>
           <a:xfrm>
             <a:off x="5852160" y="3684960"/>
-            <a:ext cx="4397760" cy="374400"/>
+            <a:ext cx="4397400" cy="374040"/>
           </a:xfrm>
           <a:prstGeom prst="rect">
             <a:avLst/>
@@ -8357,7 +8495,7 @@
         <p:spPr>
           <a:xfrm>
             <a:off x="10314360" y="3666600"/>
-            <a:ext cx="1828440" cy="411120"/>
+            <a:ext cx="1828080" cy="410760"/>
           </a:xfrm>
           <a:prstGeom prst="rect">
             <a:avLst/>
@@ -8403,7 +8541,7 @@
         <p:spPr>
           <a:xfrm>
             <a:off x="10378440" y="3684960"/>
-            <a:ext cx="1700280" cy="374400"/>
+            <a:ext cx="1699920" cy="374040"/>
           </a:xfrm>
           <a:prstGeom prst="rect">
             <a:avLst/>
@@ -8464,7 +8602,7 @@
         <p:spPr>
           <a:xfrm>
             <a:off x="438840" y="4078080"/>
-            <a:ext cx="502560" cy="411120"/>
+            <a:ext cx="502200" cy="410760"/>
           </a:xfrm>
           <a:prstGeom prst="rect">
             <a:avLst/>
@@ -8510,7 +8648,7 @@
         <p:spPr>
           <a:xfrm>
             <a:off x="502920" y="4096440"/>
-            <a:ext cx="374400" cy="374400"/>
+            <a:ext cx="374040" cy="374040"/>
           </a:xfrm>
           <a:prstGeom prst="rect">
             <a:avLst/>
@@ -8571,7 +8709,7 @@
         <p:spPr>
           <a:xfrm>
             <a:off x="941760" y="4078080"/>
-            <a:ext cx="2925720" cy="411120"/>
+            <a:ext cx="2925360" cy="410760"/>
           </a:xfrm>
           <a:prstGeom prst="rect">
             <a:avLst/>
@@ -8617,7 +8755,7 @@
         <p:spPr>
           <a:xfrm>
             <a:off x="1005840" y="4096440"/>
-            <a:ext cx="2797560" cy="374400"/>
+            <a:ext cx="2797200" cy="374040"/>
           </a:xfrm>
           <a:prstGeom prst="rect">
             <a:avLst/>
@@ -8678,7 +8816,7 @@
         <p:spPr>
           <a:xfrm>
             <a:off x="3867840" y="4078080"/>
-            <a:ext cx="1919880" cy="411120"/>
+            <a:ext cx="1919520" cy="410760"/>
           </a:xfrm>
           <a:prstGeom prst="rect">
             <a:avLst/>
@@ -8724,7 +8862,7 @@
         <p:spPr>
           <a:xfrm>
             <a:off x="3931920" y="4096440"/>
-            <a:ext cx="1791720" cy="374400"/>
+            <a:ext cx="1791360" cy="374040"/>
           </a:xfrm>
           <a:prstGeom prst="rect">
             <a:avLst/>
@@ -8785,7 +8923,7 @@
         <p:spPr>
           <a:xfrm>
             <a:off x="5788080" y="4078080"/>
-            <a:ext cx="4525920" cy="411120"/>
+            <a:ext cx="4525560" cy="410760"/>
           </a:xfrm>
           <a:prstGeom prst="rect">
             <a:avLst/>
@@ -8831,7 +8969,7 @@
         <p:spPr>
           <a:xfrm>
             <a:off x="5852160" y="4096440"/>
-            <a:ext cx="4397760" cy="374400"/>
+            <a:ext cx="4397400" cy="374040"/>
           </a:xfrm>
           <a:prstGeom prst="rect">
             <a:avLst/>
@@ -8904,7 +9042,7 @@
         <p:spPr>
           <a:xfrm>
             <a:off x="10314360" y="4078080"/>
-            <a:ext cx="1828440" cy="411120"/>
+            <a:ext cx="1828080" cy="410760"/>
           </a:xfrm>
           <a:prstGeom prst="rect">
             <a:avLst/>
@@ -8950,7 +9088,7 @@
         <p:spPr>
           <a:xfrm>
             <a:off x="10378440" y="4096440"/>
-            <a:ext cx="1700280" cy="374400"/>
+            <a:ext cx="1699920" cy="374040"/>
           </a:xfrm>
           <a:prstGeom prst="rect">
             <a:avLst/>
@@ -9011,7 +9149,7 @@
         <p:spPr>
           <a:xfrm>
             <a:off x="438840" y="4489560"/>
-            <a:ext cx="502560" cy="411120"/>
+            <a:ext cx="502200" cy="410760"/>
           </a:xfrm>
           <a:prstGeom prst="rect">
             <a:avLst/>
@@ -9057,7 +9195,7 @@
         <p:spPr>
           <a:xfrm>
             <a:off x="502920" y="4507920"/>
-            <a:ext cx="374400" cy="374400"/>
+            <a:ext cx="374040" cy="374040"/>
           </a:xfrm>
           <a:prstGeom prst="rect">
             <a:avLst/>
@@ -9118,7 +9256,7 @@
         <p:spPr>
           <a:xfrm>
             <a:off x="941760" y="4489560"/>
-            <a:ext cx="2925720" cy="411120"/>
+            <a:ext cx="2925360" cy="410760"/>
           </a:xfrm>
           <a:prstGeom prst="rect">
             <a:avLst/>
@@ -9164,7 +9302,7 @@
         <p:spPr>
           <a:xfrm>
             <a:off x="1005840" y="4507920"/>
-            <a:ext cx="2797560" cy="374400"/>
+            <a:ext cx="2797200" cy="374040"/>
           </a:xfrm>
           <a:prstGeom prst="rect">
             <a:avLst/>
@@ -9225,7 +9363,7 @@
         <p:spPr>
           <a:xfrm>
             <a:off x="3867840" y="4489560"/>
-            <a:ext cx="1919880" cy="411120"/>
+            <a:ext cx="1919520" cy="410760"/>
           </a:xfrm>
           <a:prstGeom prst="rect">
             <a:avLst/>
@@ -9271,7 +9409,7 @@
         <p:spPr>
           <a:xfrm>
             <a:off x="3931920" y="4507920"/>
-            <a:ext cx="1791720" cy="374400"/>
+            <a:ext cx="1791360" cy="374040"/>
           </a:xfrm>
           <a:prstGeom prst="rect">
             <a:avLst/>
@@ -9332,7 +9470,7 @@
         <p:spPr>
           <a:xfrm>
             <a:off x="5788080" y="4489560"/>
-            <a:ext cx="4525920" cy="411120"/>
+            <a:ext cx="4525560" cy="410760"/>
           </a:xfrm>
           <a:prstGeom prst="rect">
             <a:avLst/>
@@ -9378,7 +9516,7 @@
         <p:spPr>
           <a:xfrm>
             <a:off x="5852160" y="4507920"/>
-            <a:ext cx="4397760" cy="374400"/>
+            <a:ext cx="4397400" cy="374040"/>
           </a:xfrm>
           <a:prstGeom prst="rect">
             <a:avLst/>
@@ -9451,7 +9589,7 @@
         <p:spPr>
           <a:xfrm>
             <a:off x="10314360" y="4489560"/>
-            <a:ext cx="1828440" cy="411120"/>
+            <a:ext cx="1828080" cy="410760"/>
           </a:xfrm>
           <a:prstGeom prst="rect">
             <a:avLst/>
@@ -9497,7 +9635,7 @@
         <p:spPr>
           <a:xfrm>
             <a:off x="10378440" y="4507920"/>
-            <a:ext cx="1700280" cy="374400"/>
+            <a:ext cx="1699920" cy="374040"/>
           </a:xfrm>
           <a:prstGeom prst="rect">
             <a:avLst/>
@@ -9558,7 +9696,7 @@
         <p:spPr>
           <a:xfrm>
             <a:off x="475560" y="4892040"/>
-            <a:ext cx="5394600" cy="959760"/>
+            <a:ext cx="5394240" cy="959400"/>
           </a:xfrm>
           <a:prstGeom prst="roundRect">
             <a:avLst>
@@ -9606,7 +9744,7 @@
         <p:spPr>
           <a:xfrm>
             <a:off x="640080" y="4983480"/>
-            <a:ext cx="5065560" cy="273960"/>
+            <a:ext cx="5065200" cy="273600"/>
           </a:xfrm>
           <a:prstGeom prst="rect">
             <a:avLst/>
@@ -9624,7 +9762,7 @@
         </p:style>
         <p:txBody>
           <a:bodyPr lIns="0" tIns="0" rIns="0" bIns="0" anchor="ctr">
-            <a:normAutofit/>
+            <a:normAutofit lnSpcReduction="9999"/>
           </a:bodyPr>
           <a:p>
             <a:pPr defTabSz="914400">
@@ -9667,7 +9805,7 @@
         <p:spPr>
           <a:xfrm>
             <a:off x="640080" y="5312520"/>
-            <a:ext cx="5065560" cy="447840"/>
+            <a:ext cx="5065200" cy="447480"/>
           </a:xfrm>
           <a:prstGeom prst="rect">
             <a:avLst/>
@@ -9758,7 +9896,7 @@
         <p:spPr>
           <a:xfrm>
             <a:off x="6108120" y="4892040"/>
-            <a:ext cx="5486040" cy="959760"/>
+            <a:ext cx="5485680" cy="959400"/>
           </a:xfrm>
           <a:prstGeom prst="roundRect">
             <a:avLst>
@@ -9806,7 +9944,7 @@
         <p:spPr>
           <a:xfrm>
             <a:off x="6272640" y="4983480"/>
-            <a:ext cx="5157000" cy="273960"/>
+            <a:ext cx="5156640" cy="273600"/>
           </a:xfrm>
           <a:prstGeom prst="rect">
             <a:avLst/>
@@ -9824,7 +9962,7 @@
         </p:style>
         <p:txBody>
           <a:bodyPr lIns="0" tIns="0" rIns="0" bIns="0" anchor="ctr">
-            <a:normAutofit/>
+            <a:normAutofit lnSpcReduction="9999"/>
           </a:bodyPr>
           <a:p>
             <a:pPr defTabSz="914400">
@@ -9907,7 +10045,7 @@
         <p:spPr>
           <a:xfrm>
             <a:off x="6272640" y="5312520"/>
-            <a:ext cx="5157000" cy="447840"/>
+            <a:ext cx="5156640" cy="447480"/>
           </a:xfrm>
           <a:prstGeom prst="rect">
             <a:avLst/>
@@ -10086,7 +10224,7 @@
         <p:spPr>
           <a:xfrm>
             <a:off x="11475720" y="6510600"/>
-            <a:ext cx="799560" cy="299520"/>
+            <a:ext cx="799200" cy="299160"/>
           </a:xfrm>
           <a:prstGeom prst="rect">
             <a:avLst/>
@@ -10106,6 +10244,9 @@
                 <a:spcPct val="100000"/>
               </a:lnSpc>
               <a:buNone/>
+              <a:tabLst>
+                <a:tab pos="0" algn="l"/>
+              </a:tabLst>
               <a:defRPr lang="en-US" sz="1200" b="0" u="none" strike="noStrike">
                 <a:solidFill>
                   <a:srgbClr val="667085"/>
@@ -10123,8 +10264,11 @@
                 <a:spcPct val="100000"/>
               </a:lnSpc>
               <a:buNone/>
+              <a:tabLst>
+                <a:tab pos="0" algn="l"/>
+              </a:tabLst>
             </a:pPr>
-            <a:fld id="{51EEFE47-B92C-4201-AB5D-B7B36396593B}" type="slidenum">
+            <a:fld id="{282C77EC-D13D-41C9-8568-8303B7E1A758}" type="slidenum">
               <a:rPr lang="en-US" sz="1200" b="0" u="none" strike="noStrike">
                 <a:solidFill>
                   <a:srgbClr val="667085"/>
@@ -10186,7 +10330,7 @@
         <p:spPr>
           <a:xfrm>
             <a:off x="530280" y="329040"/>
-            <a:ext cx="10972440" cy="438480"/>
+            <a:ext cx="10972080" cy="438120"/>
           </a:xfrm>
           <a:prstGeom prst="rect">
             <a:avLst/>
@@ -10247,7 +10391,7 @@
         <p:spPr>
           <a:xfrm>
             <a:off x="11475720" y="6510600"/>
-            <a:ext cx="799560" cy="299520"/>
+            <a:ext cx="799200" cy="299160"/>
           </a:xfrm>
           <a:prstGeom prst="rect">
             <a:avLst/>
@@ -10267,6 +10411,9 @@
                 <a:spcPct val="100000"/>
               </a:lnSpc>
               <a:buNone/>
+              <a:tabLst>
+                <a:tab pos="0" algn="l"/>
+              </a:tabLst>
               <a:defRPr lang="en-US" sz="1200" b="0" u="none" strike="noStrike">
                 <a:solidFill>
                   <a:srgbClr val="667085"/>
@@ -10284,8 +10431,11 @@
                 <a:spcPct val="100000"/>
               </a:lnSpc>
               <a:buNone/>
+              <a:tabLst>
+                <a:tab pos="0" algn="l"/>
+              </a:tabLst>
             </a:pPr>
-            <a:fld id="{D216884B-9A00-4962-AB7E-1B4348F3C78B}" type="slidenum">
+            <a:fld id="{BFC1DA9D-9281-4BD5-8DD8-182796864E2B}" type="slidenum">
               <a:rPr lang="en-US" sz="1200" b="0" u="none" strike="noStrike">
                 <a:solidFill>
                   <a:srgbClr val="667085"/>
@@ -10316,7 +10466,7 @@
         </p:nvGraphicFramePr>
         <p:xfrm>
           <a:off x="502920" y="1051560"/>
-          <a:ext cx="11109600" cy="2468880"/>
+          <a:ext cx="11107800" cy="2468880"/>
         </p:xfrm>
         <a:graphic>
           <a:graphicData uri="http://schemas.openxmlformats.org/drawingml/2006/table">
@@ -10344,7 +10494,7 @@
                         </a:lnSpc>
                       </a:pPr>
                       <a:r>
-                        <a:rPr lang="en-US" sz="1000" b="1" u="none" strike="noStrike">
+                        <a:rPr lang="en-US" sz="1050" b="1" u="none" strike="noStrike">
                           <a:solidFill>
                             <a:srgbClr val="FFFFFF"/>
                           </a:solidFill>
@@ -10354,7 +10504,7 @@
                         </a:rPr>
                         <a:t>n</a:t>
                       </a:r>
-                      <a:endParaRPr lang="en-US" sz="1000" b="0" u="none" strike="noStrike">
+                      <a:endParaRPr lang="en-US" sz="1050" b="0" u="none" strike="noStrike">
                         <a:solidFill>
                           <a:srgbClr val="FFFFFF"/>
                         </a:solidFill>
@@ -10406,7 +10556,7 @@
                         </a:lnSpc>
                       </a:pPr>
                       <a:r>
-                        <a:rPr lang="en-US" sz="1000" b="1" u="none" strike="noStrike">
+                        <a:rPr lang="en-US" sz="1050" b="1" u="none" strike="noStrike">
                           <a:solidFill>
                             <a:srgbClr val="FFFFFF"/>
                           </a:solidFill>
@@ -10416,7 +10566,7 @@
                         </a:rPr>
                         <a:t>Alg</a:t>
                       </a:r>
-                      <a:endParaRPr lang="en-US" sz="1000" b="0" u="none" strike="noStrike">
+                      <a:endParaRPr lang="en-US" sz="1050" b="0" u="none" strike="noStrike">
                         <a:solidFill>
                           <a:srgbClr val="FFFFFF"/>
                         </a:solidFill>
@@ -10468,7 +10618,7 @@
                         </a:lnSpc>
                       </a:pPr>
                       <a:r>
-                        <a:rPr lang="en-US" sz="1000" b="1" u="none" strike="noStrike">
+                        <a:rPr lang="en-US" sz="1050" b="1" u="none" strike="noStrike">
                           <a:solidFill>
                             <a:srgbClr val="FFFFFF"/>
                           </a:solidFill>
@@ -10478,7 +10628,7 @@
                         </a:rPr>
                         <a:t>Actual tokens</a:t>
                       </a:r>
-                      <a:endParaRPr lang="en-US" sz="1000" b="0" u="none" strike="noStrike">
+                      <a:endParaRPr lang="en-US" sz="1050" b="0" u="none" strike="noStrike">
                         <a:solidFill>
                           <a:srgbClr val="FFFFFF"/>
                         </a:solidFill>
@@ -10530,7 +10680,7 @@
                         </a:lnSpc>
                       </a:pPr>
                       <a:r>
-                        <a:rPr lang="en-US" sz="1000" b="1" u="none" strike="noStrike">
+                        <a:rPr lang="en-US" sz="1050" b="1" u="none" strike="noStrike">
                           <a:solidFill>
                             <a:srgbClr val="FFFFFF"/>
                           </a:solidFill>
@@ -10540,7 +10690,7 @@
                         </a:rPr>
                         <a:t>Avg Time (µs)</a:t>
                       </a:r>
-                      <a:endParaRPr lang="en-US" sz="1000" b="0" u="none" strike="noStrike">
+                      <a:endParaRPr lang="en-US" sz="1050" b="0" u="none" strike="noStrike">
                         <a:solidFill>
                           <a:srgbClr val="FFFFFF"/>
                         </a:solidFill>
@@ -10592,7 +10742,7 @@
                         </a:lnSpc>
                       </a:pPr>
                       <a:r>
-                        <a:rPr lang="en-US" sz="1000" b="1" u="none" strike="noStrike">
+                        <a:rPr lang="en-US" sz="1050" b="1" u="none" strike="noStrike">
                           <a:solidFill>
                             <a:srgbClr val="FFFFFF"/>
                           </a:solidFill>
@@ -10602,7 +10752,7 @@
                         </a:rPr>
                         <a:t>Push</a:t>
                       </a:r>
-                      <a:endParaRPr lang="en-US" sz="1000" b="0" u="none" strike="noStrike">
+                      <a:endParaRPr lang="en-US" sz="1050" b="0" u="none" strike="noStrike">
                         <a:solidFill>
                           <a:srgbClr val="FFFFFF"/>
                         </a:solidFill>
@@ -10654,7 +10804,7 @@
                         </a:lnSpc>
                       </a:pPr>
                       <a:r>
-                        <a:rPr lang="en-US" sz="1000" b="1" u="none" strike="noStrike">
+                        <a:rPr lang="en-US" sz="1050" b="1" u="none" strike="noStrike">
                           <a:solidFill>
                             <a:srgbClr val="FFFFFF"/>
                           </a:solidFill>
@@ -10664,7 +10814,7 @@
                         </a:rPr>
                         <a:t>Pop</a:t>
                       </a:r>
-                      <a:endParaRPr lang="en-US" sz="1000" b="0" u="none" strike="noStrike">
+                      <a:endParaRPr lang="en-US" sz="1050" b="0" u="none" strike="noStrike">
                         <a:solidFill>
                           <a:srgbClr val="FFFFFF"/>
                         </a:solidFill>
@@ -10716,7 +10866,7 @@
                         </a:lnSpc>
                       </a:pPr>
                       <a:r>
-                        <a:rPr lang="en-US" sz="1000" b="1" u="none" strike="noStrike">
+                        <a:rPr lang="en-US" sz="1050" b="1" u="none" strike="noStrike">
                           <a:solidFill>
                             <a:srgbClr val="FFFFFF"/>
                           </a:solidFill>
@@ -10726,7 +10876,7 @@
                         </a:rPr>
                         <a:t>Comparisons / Loops</a:t>
                       </a:r>
-                      <a:endParaRPr lang="en-US" sz="1000" b="0" u="none" strike="noStrike">
+                      <a:endParaRPr lang="en-US" sz="1050" b="0" u="none" strike="noStrike">
                         <a:solidFill>
                           <a:srgbClr val="FFFFFF"/>
                         </a:solidFill>
@@ -10774,23 +10924,23 @@
                       <a:noAutofit/>
                     </a:bodyPr>
                     <a:p>
-                      <a:pPr defTabSz="914400">
+                      <a:pPr>
                         <a:lnSpc>
                           <a:spcPct val="100000"/>
                         </a:lnSpc>
                       </a:pPr>
                       <a:r>
-                        <a:rPr lang="en-US" sz="900" b="0" u="none" strike="noStrike">
+                        <a:rPr lang="en-US" sz="950" b="0" u="none" strike="noStrike">
                           <a:solidFill>
                             <a:srgbClr val="000000"/>
                           </a:solidFill>
                           <a:effectLst/>
                           <a:uFillTx/>
-                          <a:latin typeface="TH Sarabun New"/>
+                          <a:latin typeface="Arial"/>
                         </a:rPr>
                         <a:t>100</a:t>
                       </a:r>
-                      <a:endParaRPr lang="en-US" sz="900" b="0" u="none" strike="noStrike">
+                      <a:endParaRPr lang="en-US" sz="950" b="0" u="none" strike="noStrike">
                         <a:solidFill>
                           <a:srgbClr val="000000"/>
                         </a:solidFill>
@@ -10836,23 +10986,23 @@
                       <a:noAutofit/>
                     </a:bodyPr>
                     <a:p>
-                      <a:pPr defTabSz="914400">
+                      <a:pPr>
                         <a:lnSpc>
                           <a:spcPct val="100000"/>
                         </a:lnSpc>
                       </a:pPr>
                       <a:r>
-                        <a:rPr lang="en-US" sz="900" b="0" u="none" strike="noStrike">
+                        <a:rPr lang="en-US" sz="950" b="0" u="none" strike="noStrike">
                           <a:solidFill>
                             <a:srgbClr val="000000"/>
                           </a:solidFill>
                           <a:effectLst/>
                           <a:uFillTx/>
-                          <a:latin typeface="TH Sarabun New"/>
+                          <a:latin typeface="Arial"/>
                         </a:rPr>
                         <a:t>A</a:t>
                       </a:r>
-                      <a:endParaRPr lang="en-US" sz="900" b="0" u="none" strike="noStrike">
+                      <a:endParaRPr lang="en-US" sz="950" b="0" u="none" strike="noStrike">
                         <a:solidFill>
                           <a:srgbClr val="000000"/>
                         </a:solidFill>
@@ -10898,23 +11048,23 @@
                       <a:noAutofit/>
                     </a:bodyPr>
                     <a:p>
-                      <a:pPr defTabSz="914400">
+                      <a:pPr>
                         <a:lnSpc>
                           <a:spcPct val="100000"/>
                         </a:lnSpc>
                       </a:pPr>
                       <a:r>
-                        <a:rPr lang="en-US" sz="900" b="0" u="none" strike="noStrike">
+                        <a:rPr lang="en-US" sz="950" b="0" u="none" strike="noStrike">
                           <a:solidFill>
                             <a:srgbClr val="000000"/>
                           </a:solidFill>
                           <a:effectLst/>
                           <a:uFillTx/>
-                          <a:latin typeface="TH Sarabun New"/>
+                          <a:latin typeface="Arial"/>
                         </a:rPr>
                         <a:t>101</a:t>
                       </a:r>
-                      <a:endParaRPr lang="en-US" sz="900" b="0" u="none" strike="noStrike">
+                      <a:endParaRPr lang="en-US" sz="950" b="0" u="none" strike="noStrike">
                         <a:solidFill>
                           <a:srgbClr val="000000"/>
                         </a:solidFill>
@@ -10960,23 +11110,23 @@
                       <a:noAutofit/>
                     </a:bodyPr>
                     <a:p>
-                      <a:pPr defTabSz="914400">
+                      <a:pPr>
                         <a:lnSpc>
                           <a:spcPct val="100000"/>
                         </a:lnSpc>
                       </a:pPr>
                       <a:r>
-                        <a:rPr lang="en-US" sz="900" b="0" u="none" strike="noStrike">
+                        <a:rPr lang="en-US" sz="950" b="0" u="none" strike="noStrike">
                           <a:solidFill>
                             <a:srgbClr val="000000"/>
                           </a:solidFill>
                           <a:effectLst/>
                           <a:uFillTx/>
-                          <a:latin typeface="TH Sarabun New"/>
+                          <a:latin typeface="Arial"/>
                         </a:rPr>
-                        <a:t>993.810</a:t>
+                        <a:t>834.300</a:t>
                       </a:r>
-                      <a:endParaRPr lang="en-US" sz="900" b="0" u="none" strike="noStrike">
+                      <a:endParaRPr lang="en-US" sz="950" b="0" u="none" strike="noStrike">
                         <a:solidFill>
                           <a:srgbClr val="000000"/>
                         </a:solidFill>
@@ -11022,23 +11172,23 @@
                       <a:noAutofit/>
                     </a:bodyPr>
                     <a:p>
-                      <a:pPr defTabSz="914400">
+                      <a:pPr>
                         <a:lnSpc>
                           <a:spcPct val="100000"/>
                         </a:lnSpc>
                       </a:pPr>
                       <a:r>
-                        <a:rPr lang="en-US" sz="900" b="0" u="none" strike="noStrike">
+                        <a:rPr lang="en-US" sz="950" b="0" u="none" strike="noStrike">
                           <a:solidFill>
                             <a:srgbClr val="000000"/>
                           </a:solidFill>
                           <a:effectLst/>
                           <a:uFillTx/>
-                          <a:latin typeface="TH Sarabun New"/>
+                          <a:latin typeface="Arial"/>
                         </a:rPr>
                         <a:t>151</a:t>
                       </a:r>
-                      <a:endParaRPr lang="en-US" sz="900" b="0" u="none" strike="noStrike">
+                      <a:endParaRPr lang="en-US" sz="950" b="0" u="none" strike="noStrike">
                         <a:solidFill>
                           <a:srgbClr val="000000"/>
                         </a:solidFill>
@@ -11084,23 +11234,23 @@
                       <a:noAutofit/>
                     </a:bodyPr>
                     <a:p>
-                      <a:pPr defTabSz="914400">
+                      <a:pPr>
                         <a:lnSpc>
                           <a:spcPct val="100000"/>
                         </a:lnSpc>
                       </a:pPr>
                       <a:r>
-                        <a:rPr lang="en-US" sz="900" b="0" u="none" strike="noStrike">
+                        <a:rPr lang="en-US" sz="950" b="0" u="none" strike="noStrike">
                           <a:solidFill>
                             <a:srgbClr val="000000"/>
                           </a:solidFill>
                           <a:effectLst/>
                           <a:uFillTx/>
-                          <a:latin typeface="TH Sarabun New"/>
+                          <a:latin typeface="Arial"/>
                         </a:rPr>
                         <a:t>151</a:t>
                       </a:r>
-                      <a:endParaRPr lang="en-US" sz="900" b="0" u="none" strike="noStrike">
+                      <a:endParaRPr lang="en-US" sz="950" b="0" u="none" strike="noStrike">
                         <a:solidFill>
                           <a:srgbClr val="000000"/>
                         </a:solidFill>
@@ -11146,23 +11296,23 @@
                       <a:noAutofit/>
                     </a:bodyPr>
                     <a:p>
-                      <a:pPr defTabSz="914400">
+                      <a:pPr>
                         <a:lnSpc>
                           <a:spcPct val="100000"/>
                         </a:lnSpc>
                       </a:pPr>
                       <a:r>
-                        <a:rPr lang="en-US" sz="900" b="0" u="none" strike="noStrike">
+                        <a:rPr lang="en-US" sz="950" b="0" u="none" strike="noStrike">
                           <a:solidFill>
                             <a:srgbClr val="000000"/>
                           </a:solidFill>
                           <a:effectLst/>
                           <a:uFillTx/>
-                          <a:latin typeface="TH Sarabun New"/>
+                          <a:latin typeface="Arial"/>
                         </a:rPr>
                         <a:t>70 / 202</a:t>
                       </a:r>
-                      <a:endParaRPr lang="en-US" sz="900" b="0" u="none" strike="noStrike">
+                      <a:endParaRPr lang="en-US" sz="950" b="0" u="none" strike="noStrike">
                         <a:solidFill>
                           <a:srgbClr val="000000"/>
                         </a:solidFill>
@@ -11210,23 +11360,23 @@
                       <a:noAutofit/>
                     </a:bodyPr>
                     <a:p>
-                      <a:pPr defTabSz="914400">
+                      <a:pPr>
                         <a:lnSpc>
                           <a:spcPct val="100000"/>
                         </a:lnSpc>
                       </a:pPr>
                       <a:r>
-                        <a:rPr lang="en-US" sz="900" b="0" u="none" strike="noStrike">
+                        <a:rPr lang="en-US" sz="950" b="0" u="none" strike="noStrike">
                           <a:solidFill>
                             <a:srgbClr val="000000"/>
                           </a:solidFill>
                           <a:effectLst/>
                           <a:uFillTx/>
-                          <a:latin typeface="TH Sarabun New"/>
+                          <a:latin typeface="Arial"/>
                         </a:rPr>
                         <a:t>100</a:t>
                       </a:r>
-                      <a:endParaRPr lang="en-US" sz="900" b="0" u="none" strike="noStrike">
+                      <a:endParaRPr lang="en-US" sz="950" b="0" u="none" strike="noStrike">
                         <a:solidFill>
                           <a:srgbClr val="000000"/>
                         </a:solidFill>
@@ -11272,23 +11422,23 @@
                       <a:noAutofit/>
                     </a:bodyPr>
                     <a:p>
-                      <a:pPr defTabSz="914400">
+                      <a:pPr>
                         <a:lnSpc>
                           <a:spcPct val="100000"/>
                         </a:lnSpc>
                       </a:pPr>
                       <a:r>
-                        <a:rPr lang="en-US" sz="900" b="0" u="none" strike="noStrike">
+                        <a:rPr lang="en-US" sz="950" b="0" u="none" strike="noStrike">
                           <a:solidFill>
                             <a:srgbClr val="000000"/>
                           </a:solidFill>
                           <a:effectLst/>
                           <a:uFillTx/>
-                          <a:latin typeface="TH Sarabun New"/>
+                          <a:latin typeface="Arial"/>
                         </a:rPr>
                         <a:t>B</a:t>
                       </a:r>
-                      <a:endParaRPr lang="en-US" sz="900" b="0" u="none" strike="noStrike">
+                      <a:endParaRPr lang="en-US" sz="950" b="0" u="none" strike="noStrike">
                         <a:solidFill>
                           <a:srgbClr val="000000"/>
                         </a:solidFill>
@@ -11334,23 +11484,23 @@
                       <a:noAutofit/>
                     </a:bodyPr>
                     <a:p>
-                      <a:pPr defTabSz="914400">
+                      <a:pPr>
                         <a:lnSpc>
                           <a:spcPct val="100000"/>
                         </a:lnSpc>
                       </a:pPr>
                       <a:r>
-                        <a:rPr lang="en-US" sz="900" b="0" u="none" strike="noStrike">
+                        <a:rPr lang="en-US" sz="950" b="0" u="none" strike="noStrike">
                           <a:solidFill>
                             <a:srgbClr val="000000"/>
                           </a:solidFill>
                           <a:effectLst/>
                           <a:uFillTx/>
-                          <a:latin typeface="TH Sarabun New"/>
+                          <a:latin typeface="Arial"/>
                         </a:rPr>
                         <a:t>101</a:t>
                       </a:r>
-                      <a:endParaRPr lang="en-US" sz="900" b="0" u="none" strike="noStrike">
+                      <a:endParaRPr lang="en-US" sz="950" b="0" u="none" strike="noStrike">
                         <a:solidFill>
                           <a:srgbClr val="000000"/>
                         </a:solidFill>
@@ -11396,23 +11546,23 @@
                       <a:noAutofit/>
                     </a:bodyPr>
                     <a:p>
-                      <a:pPr defTabSz="914400">
+                      <a:pPr>
                         <a:lnSpc>
                           <a:spcPct val="100000"/>
                         </a:lnSpc>
                       </a:pPr>
                       <a:r>
-                        <a:rPr lang="en-US" sz="900" b="0" u="none" strike="noStrike">
+                        <a:rPr lang="en-US" sz="950" b="0" u="none" strike="noStrike">
                           <a:solidFill>
                             <a:srgbClr val="000000"/>
                           </a:solidFill>
                           <a:effectLst/>
                           <a:uFillTx/>
-                          <a:latin typeface="TH Sarabun New"/>
+                          <a:latin typeface="Arial"/>
                         </a:rPr>
-                        <a:t>267.671</a:t>
+                        <a:t>203.780</a:t>
                       </a:r>
-                      <a:endParaRPr lang="en-US" sz="900" b="0" u="none" strike="noStrike">
+                      <a:endParaRPr lang="en-US" sz="950" b="0" u="none" strike="noStrike">
                         <a:solidFill>
                           <a:srgbClr val="000000"/>
                         </a:solidFill>
@@ -11458,23 +11608,23 @@
                       <a:noAutofit/>
                     </a:bodyPr>
                     <a:p>
-                      <a:pPr defTabSz="914400">
+                      <a:pPr>
                         <a:lnSpc>
                           <a:spcPct val="100000"/>
                         </a:lnSpc>
                       </a:pPr>
                       <a:r>
-                        <a:rPr lang="en-US" sz="900" b="0" u="none" strike="noStrike">
+                        <a:rPr lang="en-US" sz="950" b="0" u="none" strike="noStrike">
                           <a:solidFill>
                             <a:srgbClr val="000000"/>
                           </a:solidFill>
                           <a:effectLst/>
                           <a:uFillTx/>
-                          <a:latin typeface="TH Sarabun New"/>
+                          <a:latin typeface="Arial"/>
                         </a:rPr>
                         <a:t>151</a:t>
                       </a:r>
-                      <a:endParaRPr lang="en-US" sz="900" b="0" u="none" strike="noStrike">
+                      <a:endParaRPr lang="en-US" sz="950" b="0" u="none" strike="noStrike">
                         <a:solidFill>
                           <a:srgbClr val="000000"/>
                         </a:solidFill>
@@ -11520,23 +11670,23 @@
                       <a:noAutofit/>
                     </a:bodyPr>
                     <a:p>
-                      <a:pPr defTabSz="914400">
+                      <a:pPr>
                         <a:lnSpc>
                           <a:spcPct val="100000"/>
                         </a:lnSpc>
                       </a:pPr>
                       <a:r>
-                        <a:rPr lang="en-US" sz="900" b="0" u="none" strike="noStrike">
+                        <a:rPr lang="en-US" sz="950" b="0" u="none" strike="noStrike">
                           <a:solidFill>
                             <a:srgbClr val="000000"/>
                           </a:solidFill>
                           <a:effectLst/>
                           <a:uFillTx/>
-                          <a:latin typeface="TH Sarabun New"/>
+                          <a:latin typeface="Arial"/>
                         </a:rPr>
                         <a:t>151</a:t>
                       </a:r>
-                      <a:endParaRPr lang="en-US" sz="900" b="0" u="none" strike="noStrike">
+                      <a:endParaRPr lang="en-US" sz="950" b="0" u="none" strike="noStrike">
                         <a:solidFill>
                           <a:srgbClr val="000000"/>
                         </a:solidFill>
@@ -11582,23 +11732,23 @@
                       <a:noAutofit/>
                     </a:bodyPr>
                     <a:p>
-                      <a:pPr defTabSz="914400">
+                      <a:pPr>
                         <a:lnSpc>
                           <a:spcPct val="100000"/>
                         </a:lnSpc>
                       </a:pPr>
                       <a:r>
-                        <a:rPr lang="en-US" sz="900" b="0" u="none" strike="noStrike">
+                        <a:rPr lang="en-US" sz="950" b="0" u="none" strike="noStrike">
                           <a:solidFill>
                             <a:srgbClr val="000000"/>
                           </a:solidFill>
                           <a:effectLst/>
                           <a:uFillTx/>
-                          <a:latin typeface="TH Sarabun New"/>
+                          <a:latin typeface="Arial"/>
                         </a:rPr>
                         <a:t>71 / 101</a:t>
                       </a:r>
-                      <a:endParaRPr lang="en-US" sz="900" b="0" u="none" strike="noStrike">
+                      <a:endParaRPr lang="en-US" sz="950" b="0" u="none" strike="noStrike">
                         <a:solidFill>
                           <a:srgbClr val="000000"/>
                         </a:solidFill>
@@ -11646,23 +11796,23 @@
                       <a:noAutofit/>
                     </a:bodyPr>
                     <a:p>
-                      <a:pPr defTabSz="914400">
+                      <a:pPr>
                         <a:lnSpc>
                           <a:spcPct val="100000"/>
                         </a:lnSpc>
                       </a:pPr>
                       <a:r>
-                        <a:rPr lang="en-US" sz="900" b="0" u="none" strike="noStrike">
+                        <a:rPr lang="en-US" sz="950" b="0" u="none" strike="noStrike">
                           <a:solidFill>
                             <a:srgbClr val="000000"/>
                           </a:solidFill>
                           <a:effectLst/>
                           <a:uFillTx/>
-                          <a:latin typeface="TH Sarabun New"/>
+                          <a:latin typeface="Arial"/>
                         </a:rPr>
-                        <a:t>1,000</a:t>
+                        <a:t>1000</a:t>
                       </a:r>
-                      <a:endParaRPr lang="en-US" sz="900" b="0" u="none" strike="noStrike">
+                      <a:endParaRPr lang="en-US" sz="950" b="0" u="none" strike="noStrike">
                         <a:solidFill>
                           <a:srgbClr val="000000"/>
                         </a:solidFill>
@@ -11708,23 +11858,23 @@
                       <a:noAutofit/>
                     </a:bodyPr>
                     <a:p>
-                      <a:pPr defTabSz="914400">
+                      <a:pPr>
                         <a:lnSpc>
                           <a:spcPct val="100000"/>
                         </a:lnSpc>
                       </a:pPr>
                       <a:r>
-                        <a:rPr lang="en-US" sz="900" b="0" u="none" strike="noStrike">
+                        <a:rPr lang="en-US" sz="950" b="0" u="none" strike="noStrike">
                           <a:solidFill>
                             <a:srgbClr val="000000"/>
                           </a:solidFill>
                           <a:effectLst/>
                           <a:uFillTx/>
-                          <a:latin typeface="TH Sarabun New"/>
+                          <a:latin typeface="Arial"/>
                         </a:rPr>
                         <a:t>A</a:t>
                       </a:r>
-                      <a:endParaRPr lang="en-US" sz="900" b="0" u="none" strike="noStrike">
+                      <a:endParaRPr lang="en-US" sz="950" b="0" u="none" strike="noStrike">
                         <a:solidFill>
                           <a:srgbClr val="000000"/>
                         </a:solidFill>
@@ -11770,23 +11920,23 @@
                       <a:noAutofit/>
                     </a:bodyPr>
                     <a:p>
-                      <a:pPr defTabSz="914400">
+                      <a:pPr>
                         <a:lnSpc>
                           <a:spcPct val="100000"/>
                         </a:lnSpc>
                       </a:pPr>
                       <a:r>
-                        <a:rPr lang="en-US" sz="900" b="0" u="none" strike="noStrike">
+                        <a:rPr lang="en-US" sz="950" b="0" u="none" strike="noStrike">
                           <a:solidFill>
                             <a:srgbClr val="000000"/>
                           </a:solidFill>
                           <a:effectLst/>
                           <a:uFillTx/>
-                          <a:latin typeface="TH Sarabun New"/>
+                          <a:latin typeface="Arial"/>
                         </a:rPr>
                         <a:t>1001</a:t>
                       </a:r>
-                      <a:endParaRPr lang="en-US" sz="900" b="0" u="none" strike="noStrike">
+                      <a:endParaRPr lang="en-US" sz="950" b="0" u="none" strike="noStrike">
                         <a:solidFill>
                           <a:srgbClr val="000000"/>
                         </a:solidFill>
@@ -11832,23 +11982,23 @@
                       <a:noAutofit/>
                     </a:bodyPr>
                     <a:p>
-                      <a:pPr defTabSz="914400">
+                      <a:pPr>
                         <a:lnSpc>
                           <a:spcPct val="100000"/>
                         </a:lnSpc>
                       </a:pPr>
                       <a:r>
-                        <a:rPr lang="en-US" sz="900" b="0" u="none" strike="noStrike">
+                        <a:rPr lang="en-US" sz="950" b="0" u="none" strike="noStrike">
                           <a:solidFill>
                             <a:srgbClr val="000000"/>
                           </a:solidFill>
                           <a:effectLst/>
                           <a:uFillTx/>
-                          <a:latin typeface="TH Sarabun New"/>
+                          <a:latin typeface="Arial"/>
                         </a:rPr>
-                        <a:t>1,778.052</a:t>
+                        <a:t>1,647.620</a:t>
                       </a:r>
-                      <a:endParaRPr lang="en-US" sz="900" b="0" u="none" strike="noStrike">
+                      <a:endParaRPr lang="en-US" sz="950" b="0" u="none" strike="noStrike">
                         <a:solidFill>
                           <a:srgbClr val="000000"/>
                         </a:solidFill>
@@ -11894,23 +12044,23 @@
                       <a:noAutofit/>
                     </a:bodyPr>
                     <a:p>
-                      <a:pPr defTabSz="914400">
+                      <a:pPr>
                         <a:lnSpc>
                           <a:spcPct val="100000"/>
                         </a:lnSpc>
                       </a:pPr>
                       <a:r>
-                        <a:rPr lang="en-US" sz="900" b="0" u="none" strike="noStrike">
+                        <a:rPr lang="en-US" sz="950" b="0" u="none" strike="noStrike">
                           <a:solidFill>
                             <a:srgbClr val="000000"/>
                           </a:solidFill>
                           <a:effectLst/>
                           <a:uFillTx/>
-                          <a:latin typeface="TH Sarabun New"/>
+                          <a:latin typeface="Arial"/>
                         </a:rPr>
-                        <a:t>1501</a:t>
+                        <a:t>1,501</a:t>
                       </a:r>
-                      <a:endParaRPr lang="en-US" sz="900" b="0" u="none" strike="noStrike">
+                      <a:endParaRPr lang="en-US" sz="950" b="0" u="none" strike="noStrike">
                         <a:solidFill>
                           <a:srgbClr val="000000"/>
                         </a:solidFill>
@@ -11956,23 +12106,23 @@
                       <a:noAutofit/>
                     </a:bodyPr>
                     <a:p>
-                      <a:pPr defTabSz="914400">
+                      <a:pPr>
                         <a:lnSpc>
                           <a:spcPct val="100000"/>
                         </a:lnSpc>
                       </a:pPr>
                       <a:r>
-                        <a:rPr lang="en-US" sz="900" b="0" u="none" strike="noStrike">
+                        <a:rPr lang="en-US" sz="950" b="0" u="none" strike="noStrike">
                           <a:solidFill>
                             <a:srgbClr val="000000"/>
                           </a:solidFill>
                           <a:effectLst/>
                           <a:uFillTx/>
-                          <a:latin typeface="TH Sarabun New"/>
+                          <a:latin typeface="Arial"/>
                         </a:rPr>
-                        <a:t>1501</a:t>
+                        <a:t>1,501</a:t>
                       </a:r>
-                      <a:endParaRPr lang="en-US" sz="900" b="0" u="none" strike="noStrike">
+                      <a:endParaRPr lang="en-US" sz="950" b="0" u="none" strike="noStrike">
                         <a:solidFill>
                           <a:srgbClr val="000000"/>
                         </a:solidFill>
@@ -12018,23 +12168,23 @@
                       <a:noAutofit/>
                     </a:bodyPr>
                     <a:p>
-                      <a:pPr defTabSz="914400">
+                      <a:pPr>
                         <a:lnSpc>
                           <a:spcPct val="100000"/>
                         </a:lnSpc>
                       </a:pPr>
                       <a:r>
-                        <a:rPr lang="en-US" sz="900" b="0" u="none" strike="noStrike">
+                        <a:rPr lang="en-US" sz="950" b="0" u="none" strike="noStrike">
                           <a:solidFill>
                             <a:srgbClr val="000000"/>
                           </a:solidFill>
                           <a:effectLst/>
                           <a:uFillTx/>
-                          <a:latin typeface="TH Sarabun New"/>
+                          <a:latin typeface="Arial"/>
                         </a:rPr>
-                        <a:t>767 / 2002</a:t>
+                        <a:t>767 / 2,002</a:t>
                       </a:r>
-                      <a:endParaRPr lang="en-US" sz="900" b="0" u="none" strike="noStrike">
+                      <a:endParaRPr lang="en-US" sz="950" b="0" u="none" strike="noStrike">
                         <a:solidFill>
                           <a:srgbClr val="000000"/>
                         </a:solidFill>
@@ -12082,23 +12232,23 @@
                       <a:noAutofit/>
                     </a:bodyPr>
                     <a:p>
-                      <a:pPr defTabSz="914400">
+                      <a:pPr>
                         <a:lnSpc>
                           <a:spcPct val="100000"/>
                         </a:lnSpc>
                       </a:pPr>
                       <a:r>
-                        <a:rPr lang="en-US" sz="900" b="0" u="none" strike="noStrike">
+                        <a:rPr lang="en-US" sz="950" b="0" u="none" strike="noStrike">
                           <a:solidFill>
                             <a:srgbClr val="000000"/>
                           </a:solidFill>
                           <a:effectLst/>
                           <a:uFillTx/>
-                          <a:latin typeface="TH Sarabun New"/>
+                          <a:latin typeface="Arial"/>
                         </a:rPr>
-                        <a:t>1,000</a:t>
+                        <a:t>1000</a:t>
                       </a:r>
-                      <a:endParaRPr lang="en-US" sz="900" b="0" u="none" strike="noStrike">
+                      <a:endParaRPr lang="en-US" sz="950" b="0" u="none" strike="noStrike">
                         <a:solidFill>
                           <a:srgbClr val="000000"/>
                         </a:solidFill>
@@ -12144,23 +12294,23 @@
                       <a:noAutofit/>
                     </a:bodyPr>
                     <a:p>
-                      <a:pPr defTabSz="914400">
+                      <a:pPr>
                         <a:lnSpc>
                           <a:spcPct val="100000"/>
                         </a:lnSpc>
                       </a:pPr>
                       <a:r>
-                        <a:rPr lang="en-US" sz="900" b="0" u="none" strike="noStrike">
+                        <a:rPr lang="en-US" sz="950" b="0" u="none" strike="noStrike">
                           <a:solidFill>
                             <a:srgbClr val="000000"/>
                           </a:solidFill>
                           <a:effectLst/>
                           <a:uFillTx/>
-                          <a:latin typeface="TH Sarabun New"/>
+                          <a:latin typeface="Arial"/>
                         </a:rPr>
                         <a:t>B</a:t>
                       </a:r>
-                      <a:endParaRPr lang="en-US" sz="900" b="0" u="none" strike="noStrike">
+                      <a:endParaRPr lang="en-US" sz="950" b="0" u="none" strike="noStrike">
                         <a:solidFill>
                           <a:srgbClr val="000000"/>
                         </a:solidFill>
@@ -12206,23 +12356,23 @@
                       <a:noAutofit/>
                     </a:bodyPr>
                     <a:p>
-                      <a:pPr defTabSz="914400">
+                      <a:pPr>
                         <a:lnSpc>
                           <a:spcPct val="100000"/>
                         </a:lnSpc>
                       </a:pPr>
                       <a:r>
-                        <a:rPr lang="en-US" sz="900" b="0" u="none" strike="noStrike">
+                        <a:rPr lang="en-US" sz="950" b="0" u="none" strike="noStrike">
                           <a:solidFill>
                             <a:srgbClr val="000000"/>
                           </a:solidFill>
                           <a:effectLst/>
                           <a:uFillTx/>
-                          <a:latin typeface="TH Sarabun New"/>
+                          <a:latin typeface="Arial"/>
                         </a:rPr>
                         <a:t>1001</a:t>
                       </a:r>
-                      <a:endParaRPr lang="en-US" sz="900" b="0" u="none" strike="noStrike">
+                      <a:endParaRPr lang="en-US" sz="950" b="0" u="none" strike="noStrike">
                         <a:solidFill>
                           <a:srgbClr val="000000"/>
                         </a:solidFill>
@@ -12268,23 +12418,23 @@
                       <a:noAutofit/>
                     </a:bodyPr>
                     <a:p>
-                      <a:pPr defTabSz="914400">
+                      <a:pPr>
                         <a:lnSpc>
                           <a:spcPct val="100000"/>
                         </a:lnSpc>
                       </a:pPr>
                       <a:r>
-                        <a:rPr lang="en-US" sz="900" b="0" u="none" strike="noStrike">
+                        <a:rPr lang="en-US" sz="950" b="0" u="none" strike="noStrike">
                           <a:solidFill>
                             <a:srgbClr val="000000"/>
                           </a:solidFill>
                           <a:effectLst/>
                           <a:uFillTx/>
-                          <a:latin typeface="TH Sarabun New"/>
+                          <a:latin typeface="Arial"/>
                         </a:rPr>
-                        <a:t>770.611</a:t>
+                        <a:t>670.600</a:t>
                       </a:r>
-                      <a:endParaRPr lang="en-US" sz="900" b="0" u="none" strike="noStrike">
+                      <a:endParaRPr lang="en-US" sz="950" b="0" u="none" strike="noStrike">
                         <a:solidFill>
                           <a:srgbClr val="000000"/>
                         </a:solidFill>
@@ -12330,23 +12480,23 @@
                       <a:noAutofit/>
                     </a:bodyPr>
                     <a:p>
-                      <a:pPr defTabSz="914400">
+                      <a:pPr>
                         <a:lnSpc>
                           <a:spcPct val="100000"/>
                         </a:lnSpc>
                       </a:pPr>
                       <a:r>
-                        <a:rPr lang="en-US" sz="900" b="0" u="none" strike="noStrike">
+                        <a:rPr lang="en-US" sz="950" b="0" u="none" strike="noStrike">
                           <a:solidFill>
                             <a:srgbClr val="000000"/>
                           </a:solidFill>
                           <a:effectLst/>
                           <a:uFillTx/>
-                          <a:latin typeface="TH Sarabun New"/>
+                          <a:latin typeface="Arial"/>
                         </a:rPr>
-                        <a:t>1501</a:t>
+                        <a:t>1,501</a:t>
                       </a:r>
-                      <a:endParaRPr lang="en-US" sz="900" b="0" u="none" strike="noStrike">
+                      <a:endParaRPr lang="en-US" sz="950" b="0" u="none" strike="noStrike">
                         <a:solidFill>
                           <a:srgbClr val="000000"/>
                         </a:solidFill>
@@ -12392,23 +12542,23 @@
                       <a:noAutofit/>
                     </a:bodyPr>
                     <a:p>
-                      <a:pPr defTabSz="914400">
+                      <a:pPr>
                         <a:lnSpc>
                           <a:spcPct val="100000"/>
                         </a:lnSpc>
                       </a:pPr>
                       <a:r>
-                        <a:rPr lang="en-US" sz="900" b="0" u="none" strike="noStrike">
+                        <a:rPr lang="en-US" sz="950" b="0" u="none" strike="noStrike">
                           <a:solidFill>
                             <a:srgbClr val="000000"/>
                           </a:solidFill>
                           <a:effectLst/>
                           <a:uFillTx/>
-                          <a:latin typeface="TH Sarabun New"/>
+                          <a:latin typeface="Arial"/>
                         </a:rPr>
-                        <a:t>1501</a:t>
+                        <a:t>1,501</a:t>
                       </a:r>
-                      <a:endParaRPr lang="en-US" sz="900" b="0" u="none" strike="noStrike">
+                      <a:endParaRPr lang="en-US" sz="950" b="0" u="none" strike="noStrike">
                         <a:solidFill>
                           <a:srgbClr val="000000"/>
                         </a:solidFill>
@@ -12454,23 +12604,23 @@
                       <a:noAutofit/>
                     </a:bodyPr>
                     <a:p>
-                      <a:pPr defTabSz="914400">
+                      <a:pPr>
                         <a:lnSpc>
                           <a:spcPct val="100000"/>
                         </a:lnSpc>
                       </a:pPr>
                       <a:r>
-                        <a:rPr lang="en-US" sz="900" b="0" u="none" strike="noStrike">
+                        <a:rPr lang="en-US" sz="950" b="0" u="none" strike="noStrike">
                           <a:solidFill>
                             <a:srgbClr val="000000"/>
                           </a:solidFill>
                           <a:effectLst/>
                           <a:uFillTx/>
-                          <a:latin typeface="TH Sarabun New"/>
+                          <a:latin typeface="Arial"/>
                         </a:rPr>
-                        <a:t>769 / 1001</a:t>
+                        <a:t>769 / 1,001</a:t>
                       </a:r>
-                      <a:endParaRPr lang="en-US" sz="900" b="0" u="none" strike="noStrike">
+                      <a:endParaRPr lang="en-US" sz="950" b="0" u="none" strike="noStrike">
                         <a:solidFill>
                           <a:srgbClr val="000000"/>
                         </a:solidFill>
@@ -12518,23 +12668,23 @@
                       <a:noAutofit/>
                     </a:bodyPr>
                     <a:p>
-                      <a:pPr defTabSz="914400">
+                      <a:pPr>
                         <a:lnSpc>
                           <a:spcPct val="100000"/>
                         </a:lnSpc>
                       </a:pPr>
                       <a:r>
-                        <a:rPr lang="en-US" sz="900" b="0" u="none" strike="noStrike">
+                        <a:rPr lang="en-US" sz="950" b="0" u="none" strike="noStrike">
                           <a:solidFill>
                             <a:srgbClr val="000000"/>
                           </a:solidFill>
                           <a:effectLst/>
                           <a:uFillTx/>
-                          <a:latin typeface="TH Sarabun New"/>
+                          <a:latin typeface="Arial"/>
                         </a:rPr>
-                        <a:t>10,000</a:t>
+                        <a:t>10000</a:t>
                       </a:r>
-                      <a:endParaRPr lang="en-US" sz="900" b="0" u="none" strike="noStrike">
+                      <a:endParaRPr lang="en-US" sz="950" b="0" u="none" strike="noStrike">
                         <a:solidFill>
                           <a:srgbClr val="000000"/>
                         </a:solidFill>
@@ -12580,23 +12730,23 @@
                       <a:noAutofit/>
                     </a:bodyPr>
                     <a:p>
-                      <a:pPr defTabSz="914400">
+                      <a:pPr>
                         <a:lnSpc>
                           <a:spcPct val="100000"/>
                         </a:lnSpc>
                       </a:pPr>
                       <a:r>
-                        <a:rPr lang="en-US" sz="900" b="0" u="none" strike="noStrike">
+                        <a:rPr lang="en-US" sz="950" b="0" u="none" strike="noStrike">
                           <a:solidFill>
                             <a:srgbClr val="000000"/>
                           </a:solidFill>
                           <a:effectLst/>
                           <a:uFillTx/>
-                          <a:latin typeface="TH Sarabun New"/>
+                          <a:latin typeface="Arial"/>
                         </a:rPr>
                         <a:t>A</a:t>
                       </a:r>
-                      <a:endParaRPr lang="en-US" sz="900" b="0" u="none" strike="noStrike">
+                      <a:endParaRPr lang="en-US" sz="950" b="0" u="none" strike="noStrike">
                         <a:solidFill>
                           <a:srgbClr val="000000"/>
                         </a:solidFill>
@@ -12642,23 +12792,23 @@
                       <a:noAutofit/>
                     </a:bodyPr>
                     <a:p>
-                      <a:pPr defTabSz="914400">
+                      <a:pPr>
                         <a:lnSpc>
                           <a:spcPct val="100000"/>
                         </a:lnSpc>
                       </a:pPr>
                       <a:r>
-                        <a:rPr lang="en-US" sz="900" b="0" u="none" strike="noStrike">
+                        <a:rPr lang="en-US" sz="950" b="0" u="none" strike="noStrike">
                           <a:solidFill>
                             <a:srgbClr val="000000"/>
                           </a:solidFill>
                           <a:effectLst/>
                           <a:uFillTx/>
-                          <a:latin typeface="TH Sarabun New"/>
+                          <a:latin typeface="Arial"/>
                         </a:rPr>
                         <a:t>10001</a:t>
                       </a:r>
-                      <a:endParaRPr lang="en-US" sz="900" b="0" u="none" strike="noStrike">
+                      <a:endParaRPr lang="en-US" sz="950" b="0" u="none" strike="noStrike">
                         <a:solidFill>
                           <a:srgbClr val="000000"/>
                         </a:solidFill>
@@ -12704,23 +12854,23 @@
                       <a:noAutofit/>
                     </a:bodyPr>
                     <a:p>
-                      <a:pPr defTabSz="914400">
+                      <a:pPr>
                         <a:lnSpc>
                           <a:spcPct val="100000"/>
                         </a:lnSpc>
                       </a:pPr>
                       <a:r>
-                        <a:rPr lang="en-US" sz="900" b="0" u="none" strike="noStrike">
+                        <a:rPr lang="en-US" sz="950" b="0" u="none" strike="noStrike">
                           <a:solidFill>
                             <a:srgbClr val="000000"/>
                           </a:solidFill>
                           <a:effectLst/>
                           <a:uFillTx/>
-                          <a:latin typeface="TH Sarabun New"/>
+                          <a:latin typeface="Arial"/>
                         </a:rPr>
-                        <a:t>10,384.459</a:t>
+                        <a:t>8,474.200</a:t>
                       </a:r>
-                      <a:endParaRPr lang="en-US" sz="900" b="0" u="none" strike="noStrike">
+                      <a:endParaRPr lang="en-US" sz="950" b="0" u="none" strike="noStrike">
                         <a:solidFill>
                           <a:srgbClr val="000000"/>
                         </a:solidFill>
@@ -12766,23 +12916,23 @@
                       <a:noAutofit/>
                     </a:bodyPr>
                     <a:p>
-                      <a:pPr defTabSz="914400">
+                      <a:pPr>
                         <a:lnSpc>
                           <a:spcPct val="100000"/>
                         </a:lnSpc>
                       </a:pPr>
                       <a:r>
-                        <a:rPr lang="en-US" sz="900" b="0" u="none" strike="noStrike">
+                        <a:rPr lang="en-US" sz="950" b="0" u="none" strike="noStrike">
                           <a:solidFill>
                             <a:srgbClr val="000000"/>
                           </a:solidFill>
                           <a:effectLst/>
                           <a:uFillTx/>
-                          <a:latin typeface="TH Sarabun New"/>
+                          <a:latin typeface="Arial"/>
                         </a:rPr>
-                        <a:t>15001</a:t>
+                        <a:t>15,001</a:t>
                       </a:r>
-                      <a:endParaRPr lang="en-US" sz="900" b="0" u="none" strike="noStrike">
+                      <a:endParaRPr lang="en-US" sz="950" b="0" u="none" strike="noStrike">
                         <a:solidFill>
                           <a:srgbClr val="000000"/>
                         </a:solidFill>
@@ -12828,23 +12978,23 @@
                       <a:noAutofit/>
                     </a:bodyPr>
                     <a:p>
-                      <a:pPr defTabSz="914400">
+                      <a:pPr>
                         <a:lnSpc>
                           <a:spcPct val="100000"/>
                         </a:lnSpc>
                       </a:pPr>
                       <a:r>
-                        <a:rPr lang="en-US" sz="900" b="0" u="none" strike="noStrike">
+                        <a:rPr lang="en-US" sz="950" b="0" u="none" strike="noStrike">
                           <a:solidFill>
                             <a:srgbClr val="000000"/>
                           </a:solidFill>
                           <a:effectLst/>
                           <a:uFillTx/>
-                          <a:latin typeface="TH Sarabun New"/>
+                          <a:latin typeface="Arial"/>
                         </a:rPr>
-                        <a:t>15001</a:t>
+                        <a:t>15,001</a:t>
                       </a:r>
-                      <a:endParaRPr lang="en-US" sz="900" b="0" u="none" strike="noStrike">
+                      <a:endParaRPr lang="en-US" sz="950" b="0" u="none" strike="noStrike">
                         <a:solidFill>
                           <a:srgbClr val="000000"/>
                         </a:solidFill>
@@ -12890,23 +13040,23 @@
                       <a:noAutofit/>
                     </a:bodyPr>
                     <a:p>
-                      <a:pPr defTabSz="914400">
+                      <a:pPr>
                         <a:lnSpc>
                           <a:spcPct val="100000"/>
                         </a:lnSpc>
                       </a:pPr>
                       <a:r>
-                        <a:rPr lang="en-US" sz="900" b="0" u="none" strike="noStrike">
+                        <a:rPr lang="en-US" sz="950" b="0" u="none" strike="noStrike">
                           <a:solidFill>
                             <a:srgbClr val="000000"/>
                           </a:solidFill>
                           <a:effectLst/>
                           <a:uFillTx/>
-                          <a:latin typeface="TH Sarabun New"/>
+                          <a:latin typeface="Arial"/>
                         </a:rPr>
-                        <a:t>7539 / 20002</a:t>
+                        <a:t>7,539 / 20,002</a:t>
                       </a:r>
-                      <a:endParaRPr lang="en-US" sz="900" b="0" u="none" strike="noStrike">
+                      <a:endParaRPr lang="en-US" sz="950" b="0" u="none" strike="noStrike">
                         <a:solidFill>
                           <a:srgbClr val="000000"/>
                         </a:solidFill>
@@ -12954,23 +13104,23 @@
                       <a:noAutofit/>
                     </a:bodyPr>
                     <a:p>
-                      <a:pPr defTabSz="914400">
+                      <a:pPr>
                         <a:lnSpc>
                           <a:spcPct val="100000"/>
                         </a:lnSpc>
                       </a:pPr>
                       <a:r>
-                        <a:rPr lang="en-US" sz="900" b="0" u="none" strike="noStrike">
+                        <a:rPr lang="en-US" sz="950" b="0" u="none" strike="noStrike">
                           <a:solidFill>
                             <a:srgbClr val="000000"/>
                           </a:solidFill>
                           <a:effectLst/>
                           <a:uFillTx/>
-                          <a:latin typeface="TH Sarabun New"/>
+                          <a:latin typeface="Arial"/>
                         </a:rPr>
-                        <a:t>10,000</a:t>
+                        <a:t>10000</a:t>
                       </a:r>
-                      <a:endParaRPr lang="en-US" sz="900" b="0" u="none" strike="noStrike">
+                      <a:endParaRPr lang="en-US" sz="950" b="0" u="none" strike="noStrike">
                         <a:solidFill>
                           <a:srgbClr val="000000"/>
                         </a:solidFill>
@@ -13016,23 +13166,23 @@
                       <a:noAutofit/>
                     </a:bodyPr>
                     <a:p>
-                      <a:pPr defTabSz="914400">
+                      <a:pPr>
                         <a:lnSpc>
                           <a:spcPct val="100000"/>
                         </a:lnSpc>
                       </a:pPr>
                       <a:r>
-                        <a:rPr lang="en-US" sz="900" b="0" u="none" strike="noStrike">
+                        <a:rPr lang="en-US" sz="950" b="0" u="none" strike="noStrike">
                           <a:solidFill>
                             <a:srgbClr val="000000"/>
                           </a:solidFill>
                           <a:effectLst/>
                           <a:uFillTx/>
-                          <a:latin typeface="TH Sarabun New"/>
+                          <a:latin typeface="Arial"/>
                         </a:rPr>
                         <a:t>B</a:t>
                       </a:r>
-                      <a:endParaRPr lang="en-US" sz="900" b="0" u="none" strike="noStrike">
+                      <a:endParaRPr lang="en-US" sz="950" b="0" u="none" strike="noStrike">
                         <a:solidFill>
                           <a:srgbClr val="000000"/>
                         </a:solidFill>
@@ -13078,23 +13228,23 @@
                       <a:noAutofit/>
                     </a:bodyPr>
                     <a:p>
-                      <a:pPr defTabSz="914400">
+                      <a:pPr>
                         <a:lnSpc>
                           <a:spcPct val="100000"/>
                         </a:lnSpc>
                       </a:pPr>
                       <a:r>
-                        <a:rPr lang="en-US" sz="900" b="0" u="none" strike="noStrike">
+                        <a:rPr lang="en-US" sz="950" b="0" u="none" strike="noStrike">
                           <a:solidFill>
                             <a:srgbClr val="000000"/>
                           </a:solidFill>
                           <a:effectLst/>
                           <a:uFillTx/>
-                          <a:latin typeface="TH Sarabun New"/>
+                          <a:latin typeface="Arial"/>
                         </a:rPr>
                         <a:t>10001</a:t>
                       </a:r>
-                      <a:endParaRPr lang="en-US" sz="900" b="0" u="none" strike="noStrike">
+                      <a:endParaRPr lang="en-US" sz="950" b="0" u="none" strike="noStrike">
                         <a:solidFill>
                           <a:srgbClr val="000000"/>
                         </a:solidFill>
@@ -13140,23 +13290,23 @@
                       <a:noAutofit/>
                     </a:bodyPr>
                     <a:p>
-                      <a:pPr defTabSz="914400">
+                      <a:pPr>
                         <a:lnSpc>
                           <a:spcPct val="100000"/>
                         </a:lnSpc>
                       </a:pPr>
                       <a:r>
-                        <a:rPr lang="en-US" sz="900" b="0" u="none" strike="noStrike">
+                        <a:rPr lang="en-US" sz="950" b="0" u="none" strike="noStrike">
                           <a:solidFill>
                             <a:srgbClr val="000000"/>
                           </a:solidFill>
                           <a:effectLst/>
                           <a:uFillTx/>
-                          <a:latin typeface="TH Sarabun New"/>
+                          <a:latin typeface="Arial"/>
                         </a:rPr>
-                        <a:t>3,818.614</a:t>
+                        <a:t>3,614.760</a:t>
                       </a:r>
-                      <a:endParaRPr lang="en-US" sz="900" b="0" u="none" strike="noStrike">
+                      <a:endParaRPr lang="en-US" sz="950" b="0" u="none" strike="noStrike">
                         <a:solidFill>
                           <a:srgbClr val="000000"/>
                         </a:solidFill>
@@ -13202,23 +13352,23 @@
                       <a:noAutofit/>
                     </a:bodyPr>
                     <a:p>
-                      <a:pPr defTabSz="914400">
+                      <a:pPr>
                         <a:lnSpc>
                           <a:spcPct val="100000"/>
                         </a:lnSpc>
                       </a:pPr>
                       <a:r>
-                        <a:rPr lang="en-US" sz="900" b="0" u="none" strike="noStrike">
+                        <a:rPr lang="en-US" sz="950" b="0" u="none" strike="noStrike">
                           <a:solidFill>
                             <a:srgbClr val="000000"/>
                           </a:solidFill>
                           <a:effectLst/>
                           <a:uFillTx/>
-                          <a:latin typeface="TH Sarabun New"/>
+                          <a:latin typeface="Arial"/>
                         </a:rPr>
-                        <a:t>15001</a:t>
+                        <a:t>15,001</a:t>
                       </a:r>
-                      <a:endParaRPr lang="en-US" sz="900" b="0" u="none" strike="noStrike">
+                      <a:endParaRPr lang="en-US" sz="950" b="0" u="none" strike="noStrike">
                         <a:solidFill>
                           <a:srgbClr val="000000"/>
                         </a:solidFill>
@@ -13264,23 +13414,23 @@
                       <a:noAutofit/>
                     </a:bodyPr>
                     <a:p>
-                      <a:pPr defTabSz="914400">
+                      <a:pPr>
                         <a:lnSpc>
                           <a:spcPct val="100000"/>
                         </a:lnSpc>
                       </a:pPr>
                       <a:r>
-                        <a:rPr lang="en-US" sz="900" b="0" u="none" strike="noStrike">
+                        <a:rPr lang="en-US" sz="950" b="0" u="none" strike="noStrike">
                           <a:solidFill>
                             <a:srgbClr val="000000"/>
                           </a:solidFill>
                           <a:effectLst/>
                           <a:uFillTx/>
-                          <a:latin typeface="TH Sarabun New"/>
+                          <a:latin typeface="Arial"/>
                         </a:rPr>
-                        <a:t>15001</a:t>
+                        <a:t>15,001</a:t>
                       </a:r>
-                      <a:endParaRPr lang="en-US" sz="900" b="0" u="none" strike="noStrike">
+                      <a:endParaRPr lang="en-US" sz="950" b="0" u="none" strike="noStrike">
                         <a:solidFill>
                           <a:srgbClr val="000000"/>
                         </a:solidFill>
@@ -13326,23 +13476,23 @@
                       <a:noAutofit/>
                     </a:bodyPr>
                     <a:p>
-                      <a:pPr defTabSz="914400">
+                      <a:pPr>
                         <a:lnSpc>
                           <a:spcPct val="100000"/>
                         </a:lnSpc>
                       </a:pPr>
                       <a:r>
-                        <a:rPr lang="en-US" sz="900" b="0" u="none" strike="noStrike">
+                        <a:rPr lang="en-US" sz="950" b="0" u="none" strike="noStrike">
                           <a:solidFill>
                             <a:srgbClr val="000000"/>
                           </a:solidFill>
                           <a:effectLst/>
                           <a:uFillTx/>
-                          <a:latin typeface="TH Sarabun New"/>
+                          <a:latin typeface="Arial"/>
                         </a:rPr>
-                        <a:t>7540 / 10001</a:t>
+                        <a:t>7,540 / 10,001</a:t>
                       </a:r>
-                      <a:endParaRPr lang="en-US" sz="900" b="0" u="none" strike="noStrike">
+                      <a:endParaRPr lang="en-US" sz="950" b="0" u="none" strike="noStrike">
                         <a:solidFill>
                           <a:srgbClr val="000000"/>
                         </a:solidFill>
@@ -13390,23 +13540,23 @@
                       <a:noAutofit/>
                     </a:bodyPr>
                     <a:p>
-                      <a:pPr defTabSz="914400">
+                      <a:pPr>
                         <a:lnSpc>
                           <a:spcPct val="100000"/>
                         </a:lnSpc>
                       </a:pPr>
                       <a:r>
-                        <a:rPr lang="en-US" sz="900" b="0" u="none" strike="noStrike">
+                        <a:rPr lang="en-US" sz="950" b="0" u="none" strike="noStrike">
                           <a:solidFill>
                             <a:srgbClr val="000000"/>
                           </a:solidFill>
                           <a:effectLst/>
                           <a:uFillTx/>
-                          <a:latin typeface="TH Sarabun New"/>
+                          <a:latin typeface="Arial"/>
                         </a:rPr>
-                        <a:t>50,000</a:t>
+                        <a:t>50000</a:t>
                       </a:r>
-                      <a:endParaRPr lang="en-US" sz="900" b="0" u="none" strike="noStrike">
+                      <a:endParaRPr lang="en-US" sz="950" b="0" u="none" strike="noStrike">
                         <a:solidFill>
                           <a:srgbClr val="000000"/>
                         </a:solidFill>
@@ -13452,23 +13602,23 @@
                       <a:noAutofit/>
                     </a:bodyPr>
                     <a:p>
-                      <a:pPr defTabSz="914400">
+                      <a:pPr>
                         <a:lnSpc>
                           <a:spcPct val="100000"/>
                         </a:lnSpc>
                       </a:pPr>
                       <a:r>
-                        <a:rPr lang="en-US" sz="900" b="0" u="none" strike="noStrike">
+                        <a:rPr lang="en-US" sz="950" b="0" u="none" strike="noStrike">
                           <a:solidFill>
                             <a:srgbClr val="000000"/>
                           </a:solidFill>
                           <a:effectLst/>
                           <a:uFillTx/>
-                          <a:latin typeface="TH Sarabun New"/>
+                          <a:latin typeface="Arial"/>
                         </a:rPr>
                         <a:t>A</a:t>
                       </a:r>
-                      <a:endParaRPr lang="en-US" sz="900" b="0" u="none" strike="noStrike">
+                      <a:endParaRPr lang="en-US" sz="950" b="0" u="none" strike="noStrike">
                         <a:solidFill>
                           <a:srgbClr val="000000"/>
                         </a:solidFill>
@@ -13514,23 +13664,23 @@
                       <a:noAutofit/>
                     </a:bodyPr>
                     <a:p>
-                      <a:pPr defTabSz="914400">
+                      <a:pPr>
                         <a:lnSpc>
                           <a:spcPct val="100000"/>
                         </a:lnSpc>
                       </a:pPr>
                       <a:r>
-                        <a:rPr lang="en-US" sz="900" b="0" u="none" strike="noStrike">
+                        <a:rPr lang="en-US" sz="950" b="0" u="none" strike="noStrike">
                           <a:solidFill>
                             <a:srgbClr val="000000"/>
                           </a:solidFill>
                           <a:effectLst/>
                           <a:uFillTx/>
-                          <a:latin typeface="TH Sarabun New"/>
+                          <a:latin typeface="Arial"/>
                         </a:rPr>
                         <a:t>50001</a:t>
                       </a:r>
-                      <a:endParaRPr lang="en-US" sz="900" b="0" u="none" strike="noStrike">
+                      <a:endParaRPr lang="en-US" sz="950" b="0" u="none" strike="noStrike">
                         <a:solidFill>
                           <a:srgbClr val="000000"/>
                         </a:solidFill>
@@ -13576,23 +13726,23 @@
                       <a:noAutofit/>
                     </a:bodyPr>
                     <a:p>
-                      <a:pPr defTabSz="914400">
+                      <a:pPr>
                         <a:lnSpc>
                           <a:spcPct val="100000"/>
                         </a:lnSpc>
                       </a:pPr>
                       <a:r>
-                        <a:rPr lang="en-US" sz="900" b="0" u="none" strike="noStrike">
+                        <a:rPr lang="en-US" sz="950" b="0" u="none" strike="noStrike">
                           <a:solidFill>
                             <a:srgbClr val="000000"/>
                           </a:solidFill>
                           <a:effectLst/>
                           <a:uFillTx/>
-                          <a:latin typeface="TH Sarabun New"/>
+                          <a:latin typeface="Arial"/>
                         </a:rPr>
-                        <a:t>12,889.745</a:t>
+                        <a:t>12,280.660</a:t>
                       </a:r>
-                      <a:endParaRPr lang="en-US" sz="900" b="0" u="none" strike="noStrike">
+                      <a:endParaRPr lang="en-US" sz="950" b="0" u="none" strike="noStrike">
                         <a:solidFill>
                           <a:srgbClr val="000000"/>
                         </a:solidFill>
@@ -13638,23 +13788,23 @@
                       <a:noAutofit/>
                     </a:bodyPr>
                     <a:p>
-                      <a:pPr defTabSz="914400">
+                      <a:pPr>
                         <a:lnSpc>
                           <a:spcPct val="100000"/>
                         </a:lnSpc>
                       </a:pPr>
                       <a:r>
-                        <a:rPr lang="en-US" sz="900" b="0" u="none" strike="noStrike">
+                        <a:rPr lang="en-US" sz="950" b="0" u="none" strike="noStrike">
                           <a:solidFill>
                             <a:srgbClr val="000000"/>
                           </a:solidFill>
                           <a:effectLst/>
                           <a:uFillTx/>
-                          <a:latin typeface="TH Sarabun New"/>
+                          <a:latin typeface="Arial"/>
                         </a:rPr>
-                        <a:t>75001</a:t>
+                        <a:t>75,001</a:t>
                       </a:r>
-                      <a:endParaRPr lang="en-US" sz="900" b="0" u="none" strike="noStrike">
+                      <a:endParaRPr lang="en-US" sz="950" b="0" u="none" strike="noStrike">
                         <a:solidFill>
                           <a:srgbClr val="000000"/>
                         </a:solidFill>
@@ -13700,23 +13850,23 @@
                       <a:noAutofit/>
                     </a:bodyPr>
                     <a:p>
-                      <a:pPr defTabSz="914400">
+                      <a:pPr>
                         <a:lnSpc>
                           <a:spcPct val="100000"/>
                         </a:lnSpc>
                       </a:pPr>
                       <a:r>
-                        <a:rPr lang="en-US" sz="900" b="0" u="none" strike="noStrike">
+                        <a:rPr lang="en-US" sz="950" b="0" u="none" strike="noStrike">
                           <a:solidFill>
                             <a:srgbClr val="000000"/>
                           </a:solidFill>
                           <a:effectLst/>
                           <a:uFillTx/>
-                          <a:latin typeface="TH Sarabun New"/>
+                          <a:latin typeface="Arial"/>
                         </a:rPr>
-                        <a:t>75001</a:t>
+                        <a:t>75,001</a:t>
                       </a:r>
-                      <a:endParaRPr lang="en-US" sz="900" b="0" u="none" strike="noStrike">
+                      <a:endParaRPr lang="en-US" sz="950" b="0" u="none" strike="noStrike">
                         <a:solidFill>
                           <a:srgbClr val="000000"/>
                         </a:solidFill>
@@ -13762,23 +13912,23 @@
                       <a:noAutofit/>
                     </a:bodyPr>
                     <a:p>
-                      <a:pPr defTabSz="914400">
+                      <a:pPr>
                         <a:lnSpc>
                           <a:spcPct val="100000"/>
                         </a:lnSpc>
                       </a:pPr>
                       <a:r>
-                        <a:rPr lang="en-US" sz="900" b="0" u="none" strike="noStrike">
+                        <a:rPr lang="en-US" sz="950" b="0" u="none" strike="noStrike">
                           <a:solidFill>
                             <a:srgbClr val="000000"/>
                           </a:solidFill>
                           <a:effectLst/>
                           <a:uFillTx/>
-                          <a:latin typeface="TH Sarabun New"/>
+                          <a:latin typeface="Arial"/>
                         </a:rPr>
-                        <a:t>37527 / 100002</a:t>
+                        <a:t>37,527 / 100,002</a:t>
                       </a:r>
-                      <a:endParaRPr lang="en-US" sz="900" b="0" u="none" strike="noStrike">
+                      <a:endParaRPr lang="en-US" sz="950" b="0" u="none" strike="noStrike">
                         <a:solidFill>
                           <a:srgbClr val="000000"/>
                         </a:solidFill>
@@ -13826,23 +13976,23 @@
                       <a:noAutofit/>
                     </a:bodyPr>
                     <a:p>
-                      <a:pPr defTabSz="914400">
+                      <a:pPr>
                         <a:lnSpc>
                           <a:spcPct val="100000"/>
                         </a:lnSpc>
                       </a:pPr>
                       <a:r>
-                        <a:rPr lang="en-US" sz="900" b="0" u="none" strike="noStrike">
+                        <a:rPr lang="en-US" sz="950" b="0" u="none" strike="noStrike">
                           <a:solidFill>
                             <a:srgbClr val="000000"/>
                           </a:solidFill>
                           <a:effectLst/>
                           <a:uFillTx/>
-                          <a:latin typeface="TH Sarabun New"/>
+                          <a:latin typeface="Arial"/>
                         </a:rPr>
-                        <a:t>50,000</a:t>
+                        <a:t>50000</a:t>
                       </a:r>
-                      <a:endParaRPr lang="en-US" sz="900" b="0" u="none" strike="noStrike">
+                      <a:endParaRPr lang="en-US" sz="950" b="0" u="none" strike="noStrike">
                         <a:solidFill>
                           <a:srgbClr val="000000"/>
                         </a:solidFill>
@@ -13888,23 +14038,23 @@
                       <a:noAutofit/>
                     </a:bodyPr>
                     <a:p>
-                      <a:pPr defTabSz="914400">
+                      <a:pPr>
                         <a:lnSpc>
                           <a:spcPct val="100000"/>
                         </a:lnSpc>
                       </a:pPr>
                       <a:r>
-                        <a:rPr lang="en-US" sz="900" b="0" u="none" strike="noStrike">
+                        <a:rPr lang="en-US" sz="950" b="0" u="none" strike="noStrike">
                           <a:solidFill>
                             <a:srgbClr val="000000"/>
                           </a:solidFill>
                           <a:effectLst/>
                           <a:uFillTx/>
-                          <a:latin typeface="TH Sarabun New"/>
+                          <a:latin typeface="Arial"/>
                         </a:rPr>
                         <a:t>B</a:t>
                       </a:r>
-                      <a:endParaRPr lang="en-US" sz="900" b="0" u="none" strike="noStrike">
+                      <a:endParaRPr lang="en-US" sz="950" b="0" u="none" strike="noStrike">
                         <a:solidFill>
                           <a:srgbClr val="000000"/>
                         </a:solidFill>
@@ -13950,23 +14100,23 @@
                       <a:noAutofit/>
                     </a:bodyPr>
                     <a:p>
-                      <a:pPr defTabSz="914400">
+                      <a:pPr>
                         <a:lnSpc>
                           <a:spcPct val="100000"/>
                         </a:lnSpc>
                       </a:pPr>
                       <a:r>
-                        <a:rPr lang="en-US" sz="900" b="0" u="none" strike="noStrike">
+                        <a:rPr lang="en-US" sz="950" b="0" u="none" strike="noStrike">
                           <a:solidFill>
                             <a:srgbClr val="000000"/>
                           </a:solidFill>
                           <a:effectLst/>
                           <a:uFillTx/>
-                          <a:latin typeface="TH Sarabun New"/>
+                          <a:latin typeface="Arial"/>
                         </a:rPr>
                         <a:t>50001</a:t>
                       </a:r>
-                      <a:endParaRPr lang="en-US" sz="900" b="0" u="none" strike="noStrike">
+                      <a:endParaRPr lang="en-US" sz="950" b="0" u="none" strike="noStrike">
                         <a:solidFill>
                           <a:srgbClr val="000000"/>
                         </a:solidFill>
@@ -14012,23 +14162,23 @@
                       <a:noAutofit/>
                     </a:bodyPr>
                     <a:p>
-                      <a:pPr defTabSz="914400">
+                      <a:pPr>
                         <a:lnSpc>
                           <a:spcPct val="100000"/>
                         </a:lnSpc>
                       </a:pPr>
                       <a:r>
-                        <a:rPr lang="en-US" sz="900" b="0" u="none" strike="noStrike">
+                        <a:rPr lang="en-US" sz="950" b="0" u="none" strike="noStrike">
                           <a:solidFill>
                             <a:srgbClr val="000000"/>
                           </a:solidFill>
                           <a:effectLst/>
                           <a:uFillTx/>
-                          <a:latin typeface="TH Sarabun New"/>
+                          <a:latin typeface="Arial"/>
                         </a:rPr>
-                        <a:t>5,744.386</a:t>
+                        <a:t>6,934.660</a:t>
                       </a:r>
-                      <a:endParaRPr lang="en-US" sz="900" b="0" u="none" strike="noStrike">
+                      <a:endParaRPr lang="en-US" sz="950" b="0" u="none" strike="noStrike">
                         <a:solidFill>
                           <a:srgbClr val="000000"/>
                         </a:solidFill>
@@ -14074,23 +14224,23 @@
                       <a:noAutofit/>
                     </a:bodyPr>
                     <a:p>
-                      <a:pPr defTabSz="914400">
+                      <a:pPr>
                         <a:lnSpc>
                           <a:spcPct val="100000"/>
                         </a:lnSpc>
                       </a:pPr>
                       <a:r>
-                        <a:rPr lang="en-US" sz="900" b="0" u="none" strike="noStrike">
+                        <a:rPr lang="en-US" sz="950" b="0" u="none" strike="noStrike">
                           <a:solidFill>
                             <a:srgbClr val="000000"/>
                           </a:solidFill>
                           <a:effectLst/>
                           <a:uFillTx/>
-                          <a:latin typeface="TH Sarabun New"/>
+                          <a:latin typeface="Arial"/>
                         </a:rPr>
-                        <a:t>75001</a:t>
+                        <a:t>75,001</a:t>
                       </a:r>
-                      <a:endParaRPr lang="en-US" sz="900" b="0" u="none" strike="noStrike">
+                      <a:endParaRPr lang="en-US" sz="950" b="0" u="none" strike="noStrike">
                         <a:solidFill>
                           <a:srgbClr val="000000"/>
                         </a:solidFill>
@@ -14136,23 +14286,23 @@
                       <a:noAutofit/>
                     </a:bodyPr>
                     <a:p>
-                      <a:pPr defTabSz="914400">
+                      <a:pPr>
                         <a:lnSpc>
                           <a:spcPct val="100000"/>
                         </a:lnSpc>
                       </a:pPr>
                       <a:r>
-                        <a:rPr lang="en-US" sz="900" b="0" u="none" strike="noStrike">
+                        <a:rPr lang="en-US" sz="950" b="0" u="none" strike="noStrike">
                           <a:solidFill>
                             <a:srgbClr val="000000"/>
                           </a:solidFill>
                           <a:effectLst/>
                           <a:uFillTx/>
-                          <a:latin typeface="TH Sarabun New"/>
+                          <a:latin typeface="Arial"/>
                         </a:rPr>
-                        <a:t>75001</a:t>
+                        <a:t>75,001</a:t>
                       </a:r>
-                      <a:endParaRPr lang="en-US" sz="900" b="0" u="none" strike="noStrike">
+                      <a:endParaRPr lang="en-US" sz="950" b="0" u="none" strike="noStrike">
                         <a:solidFill>
                           <a:srgbClr val="000000"/>
                         </a:solidFill>
@@ -14198,23 +14348,23 @@
                       <a:noAutofit/>
                     </a:bodyPr>
                     <a:p>
-                      <a:pPr defTabSz="914400">
+                      <a:pPr>
                         <a:lnSpc>
                           <a:spcPct val="100000"/>
                         </a:lnSpc>
                       </a:pPr>
                       <a:r>
-                        <a:rPr lang="en-US" sz="900" b="0" u="none" strike="noStrike">
+                        <a:rPr lang="en-US" sz="950" b="0" u="none" strike="noStrike">
                           <a:solidFill>
                             <a:srgbClr val="000000"/>
                           </a:solidFill>
                           <a:effectLst/>
                           <a:uFillTx/>
-                          <a:latin typeface="TH Sarabun New"/>
+                          <a:latin typeface="Arial"/>
                         </a:rPr>
-                        <a:t>37528 / 50001</a:t>
+                        <a:t>37,528 / 50,001</a:t>
                       </a:r>
-                      <a:endParaRPr lang="en-US" sz="900" b="0" u="none" strike="noStrike">
+                      <a:endParaRPr lang="en-US" sz="950" b="0" u="none" strike="noStrike">
                         <a:solidFill>
                           <a:srgbClr val="000000"/>
                         </a:solidFill>
@@ -14268,7 +14418,7 @@
         <p:spPr>
           <a:xfrm>
             <a:off x="594360" y="3703320"/>
-            <a:ext cx="3840120" cy="2331360"/>
+            <a:ext cx="3839760" cy="2331000"/>
           </a:xfrm>
           <a:prstGeom prst="rect">
             <a:avLst/>
@@ -14530,9 +14680,99 @@
           </a:p>
         </p:txBody>
       </p:sp>
+      <p:sp>
+        <p:nvSpPr>
+          <p:cNvPr id="411" name="TextBox 28"/>
+          <p:cNvSpPr/>
+          <p:nvPr/>
+        </p:nvSpPr>
+        <p:spPr>
+          <a:xfrm>
+            <a:off x="594360" y="6144840"/>
+            <a:ext cx="10880640" cy="346680"/>
+          </a:xfrm>
+          <a:prstGeom prst="rect">
+            <a:avLst/>
+          </a:prstGeom>
+          <a:noFill/>
+          <a:ln w="0">
+            <a:noFill/>
+          </a:ln>
+        </p:spPr>
+        <p:style>
+          <a:lnRef idx="0"/>
+          <a:fillRef idx="0"/>
+          <a:effectRef idx="0"/>
+          <a:fontRef idx="minor"/>
+        </p:style>
+        <p:txBody>
+          <a:bodyPr wrap="none" lIns="90000" tIns="45000" rIns="90000" bIns="45000" anchor="t">
+            <a:spAutoFit/>
+          </a:bodyPr>
+          <a:p>
+            <a:pPr defTabSz="914400">
+              <a:lnSpc>
+                <a:spcPct val="100000"/>
+              </a:lnSpc>
+            </a:pPr>
+            <a:r>
+              <a:rPr lang="hi-IN" sz="900" b="0" i="1" u="none" strike="noStrike">
+                <a:solidFill>
+                  <a:schemeClr val="dk1"/>
+                </a:solidFill>
+                <a:effectLst/>
+                <a:uFillTx/>
+                <a:latin typeface="TH Sarabun New"/>
+              </a:rPr>
+              <a:t>แหล่งข้อมูล</a:t>
+            </a:r>
+            <a:r>
+              <a:rPr lang="en-US" sz="900" b="0" i="1" u="none" strike="noStrike">
+                <a:solidFill>
+                  <a:schemeClr val="dk1"/>
+                </a:solidFill>
+                <a:effectLst/>
+                <a:uFillTx/>
+                <a:latin typeface="TH Sarabun New"/>
+              </a:rPr>
+              <a:t>: results/Stack_Group04_Experiment.csv (</a:t>
+            </a:r>
+            <a:r>
+              <a:rPr lang="hi-IN" sz="900" b="0" i="1" u="none" strike="noStrike">
+                <a:solidFill>
+                  <a:schemeClr val="dk1"/>
+                </a:solidFill>
+                <a:effectLst/>
+                <a:uFillTx/>
+                <a:latin typeface="TH Sarabun New"/>
+              </a:rPr>
+              <a:t>ค่าจริงจากการทดลอง</a:t>
+            </a:r>
+            <a:r>
+              <a:rPr lang="en-US" sz="900" b="0" i="1" u="none" strike="noStrike">
+                <a:solidFill>
+                  <a:schemeClr val="dk1"/>
+                </a:solidFill>
+                <a:effectLst/>
+                <a:uFillTx/>
+                <a:latin typeface="TH Sarabun New"/>
+              </a:rPr>
+              <a:t>)</a:t>
+            </a:r>
+            <a:endParaRPr lang="en-US" sz="900" b="0" u="none" strike="noStrike">
+              <a:solidFill>
+                <a:srgbClr val="000000"/>
+              </a:solidFill>
+              <a:effectLst/>
+              <a:uFillTx/>
+              <a:latin typeface="Arial"/>
+            </a:endParaRPr>
+          </a:p>
+        </p:txBody>
+      </p:sp>
       <p:pic>
         <p:nvPicPr>
-          <p:cNvPr id="411" name="Picture 27" descr="performance_graph_final.png"/>
+          <p:cNvPr id="412" name="Picture 412" descr="Stack_Group04_Performance_Graph.png"/>
           <p:cNvPicPr/>
           <p:nvPr/>
         </p:nvPicPr>
@@ -14542,8 +14782,8 @@
         </p:blipFill>
         <p:spPr>
           <a:xfrm>
-            <a:off x="4434840" y="3703320"/>
-            <a:ext cx="7131960" cy="3002760"/>
+            <a:off x="4434840" y="3886200"/>
+            <a:ext cx="7131600" cy="2697120"/>
           </a:xfrm>
           <a:prstGeom prst="rect">
             <a:avLst/>
@@ -14554,96 +14794,6 @@
           </a:ln>
         </p:spPr>
       </p:pic>
-      <p:sp>
-        <p:nvSpPr>
-          <p:cNvPr id="412" name="TextBox 28"/>
-          <p:cNvSpPr/>
-          <p:nvPr/>
-        </p:nvSpPr>
-        <p:spPr>
-          <a:xfrm>
-            <a:off x="594360" y="6144840"/>
-            <a:ext cx="10881000" cy="347040"/>
-          </a:xfrm>
-          <a:prstGeom prst="rect">
-            <a:avLst/>
-          </a:prstGeom>
-          <a:noFill/>
-          <a:ln w="0">
-            <a:noFill/>
-          </a:ln>
-        </p:spPr>
-        <p:style>
-          <a:lnRef idx="0"/>
-          <a:fillRef idx="0"/>
-          <a:effectRef idx="0"/>
-          <a:fontRef idx="minor"/>
-        </p:style>
-        <p:txBody>
-          <a:bodyPr wrap="none" lIns="90000" tIns="45000" rIns="90000" bIns="45000" anchor="t">
-            <a:spAutoFit/>
-          </a:bodyPr>
-          <a:p>
-            <a:pPr defTabSz="914400">
-              <a:lnSpc>
-                <a:spcPct val="100000"/>
-              </a:lnSpc>
-            </a:pPr>
-            <a:r>
-              <a:rPr lang="hi-IN" sz="900" b="0" i="1" u="none" strike="noStrike">
-                <a:solidFill>
-                  <a:schemeClr val="dk1"/>
-                </a:solidFill>
-                <a:effectLst/>
-                <a:uFillTx/>
-                <a:latin typeface="TH Sarabun New"/>
-              </a:rPr>
-              <a:t>แหล่งข้อมูล</a:t>
-            </a:r>
-            <a:r>
-              <a:rPr lang="en-US" sz="900" b="0" i="1" u="none" strike="noStrike">
-                <a:solidFill>
-                  <a:schemeClr val="dk1"/>
-                </a:solidFill>
-                <a:effectLst/>
-                <a:uFillTx/>
-                <a:latin typeface="TH Sarabun New"/>
-              </a:rPr>
-              <a:t>: Stack_Group04_Performance_Results.csv (</a:t>
-            </a:r>
-            <a:r>
-              <a:rPr lang="hi-IN" sz="900" b="0" i="1" u="none" strike="noStrike">
-                <a:solidFill>
-                  <a:schemeClr val="dk1"/>
-                </a:solidFill>
-                <a:effectLst/>
-                <a:uFillTx/>
-                <a:latin typeface="TH Sarabun New"/>
-              </a:rPr>
-              <a:t>ค่าจริงจากการทดลอง</a:t>
-            </a:r>
-            <a:r>
-              <a:rPr lang="en-US" sz="900" b="0" i="1" u="none" strike="noStrike">
-                <a:solidFill>
-                  <a:schemeClr val="dk1"/>
-                </a:solidFill>
-                <a:effectLst/>
-                <a:uFillTx/>
-                <a:latin typeface="TH Sarabun New"/>
-              </a:rPr>
-              <a:t>)</a:t>
-            </a:r>
-            <a:endParaRPr lang="en-US" sz="900" b="0" u="none" strike="noStrike">
-              <a:solidFill>
-                <a:srgbClr val="000000"/>
-              </a:solidFill>
-              <a:effectLst/>
-              <a:uFillTx/>
-              <a:latin typeface="Arial"/>
-            </a:endParaRPr>
-          </a:p>
-        </p:txBody>
-      </p:sp>
     </p:spTree>
   </p:cSld>
   <mc:AlternateContent>
@@ -14683,7 +14833,7 @@
         <p:spPr>
           <a:xfrm>
             <a:off x="530280" y="329040"/>
-            <a:ext cx="10972440" cy="438480"/>
+            <a:ext cx="10972080" cy="438120"/>
           </a:xfrm>
           <a:prstGeom prst="rect">
             <a:avLst/>
@@ -14751,7 +14901,7 @@
         <p:spPr>
           <a:xfrm>
             <a:off x="548640" y="841320"/>
-            <a:ext cx="10972440" cy="310680"/>
+            <a:ext cx="10972080" cy="310320"/>
           </a:xfrm>
           <a:prstGeom prst="rect">
             <a:avLst/>
@@ -14819,7 +14969,7 @@
         <p:spPr>
           <a:xfrm>
             <a:off x="685800" y="1371600"/>
-            <a:ext cx="5257440" cy="3840120"/>
+            <a:ext cx="5257080" cy="3839760"/>
           </a:xfrm>
           <a:prstGeom prst="rect">
             <a:avLst/>
@@ -15175,7 +15325,7 @@
         <p:spPr>
           <a:xfrm>
             <a:off x="6355080" y="1371600"/>
-            <a:ext cx="5257440" cy="3840120"/>
+            <a:ext cx="5257080" cy="3839760"/>
           </a:xfrm>
           <a:prstGeom prst="rect">
             <a:avLst/>
@@ -15528,7 +15678,7 @@
         <p:spPr>
           <a:xfrm>
             <a:off x="530280" y="329040"/>
-            <a:ext cx="10972440" cy="438480"/>
+            <a:ext cx="10972080" cy="438120"/>
           </a:xfrm>
           <a:prstGeom prst="rect">
             <a:avLst/>
@@ -15585,7 +15735,7 @@
         <p:spPr>
           <a:xfrm>
             <a:off x="548640" y="841320"/>
-            <a:ext cx="10972440" cy="310680"/>
+            <a:ext cx="10972080" cy="310320"/>
           </a:xfrm>
           <a:prstGeom prst="rect">
             <a:avLst/>
@@ -15646,7 +15796,7 @@
         <p:spPr>
           <a:xfrm>
             <a:off x="594360" y="1325880"/>
-            <a:ext cx="5394600" cy="1919880"/>
+            <a:ext cx="5394240" cy="1919520"/>
           </a:xfrm>
           <a:prstGeom prst="roundRect">
             <a:avLst>
@@ -15694,7 +15844,7 @@
         <p:spPr>
           <a:xfrm>
             <a:off x="758880" y="1417320"/>
-            <a:ext cx="5065560" cy="273960"/>
+            <a:ext cx="5065200" cy="273600"/>
           </a:xfrm>
           <a:prstGeom prst="rect">
             <a:avLst/>
@@ -15712,7 +15862,7 @@
         </p:style>
         <p:txBody>
           <a:bodyPr lIns="0" tIns="0" rIns="0" bIns="0" anchor="ctr">
-            <a:normAutofit/>
+            <a:normAutofit lnSpcReduction="9999"/>
           </a:bodyPr>
           <a:p>
             <a:pPr defTabSz="914400">
@@ -15755,7 +15905,7 @@
         <p:spPr>
           <a:xfrm>
             <a:off x="758880" y="1746360"/>
-            <a:ext cx="5065560" cy="1407960"/>
+            <a:ext cx="5065200" cy="1407600"/>
           </a:xfrm>
           <a:prstGeom prst="rect">
             <a:avLst/>
@@ -15924,7 +16074,7 @@
         <p:spPr>
           <a:xfrm>
             <a:off x="6217920" y="1325880"/>
-            <a:ext cx="5394600" cy="1919880"/>
+            <a:ext cx="5394240" cy="1919520"/>
           </a:xfrm>
           <a:prstGeom prst="roundRect">
             <a:avLst>
@@ -15972,7 +16122,7 @@
         <p:spPr>
           <a:xfrm>
             <a:off x="6382440" y="1417320"/>
-            <a:ext cx="5065560" cy="273960"/>
+            <a:ext cx="5065200" cy="273600"/>
           </a:xfrm>
           <a:prstGeom prst="rect">
             <a:avLst/>
@@ -15990,7 +16140,7 @@
         </p:style>
         <p:txBody>
           <a:bodyPr lIns="0" tIns="0" rIns="0" bIns="0" anchor="ctr">
-            <a:normAutofit/>
+            <a:normAutofit lnSpcReduction="9999"/>
           </a:bodyPr>
           <a:p>
             <a:pPr defTabSz="914400">
@@ -16033,7 +16183,7 @@
         <p:spPr>
           <a:xfrm>
             <a:off x="6382440" y="1746360"/>
-            <a:ext cx="5065560" cy="1407960"/>
+            <a:ext cx="5065200" cy="1407600"/>
           </a:xfrm>
           <a:prstGeom prst="rect">
             <a:avLst/>
@@ -16262,7 +16412,7 @@
         <p:spPr>
           <a:xfrm>
             <a:off x="621720" y="3657600"/>
-            <a:ext cx="1416960" cy="310680"/>
+            <a:ext cx="1416600" cy="310320"/>
           </a:xfrm>
           <a:prstGeom prst="roundRect">
             <a:avLst>
@@ -16310,7 +16460,7 @@
         <p:spPr>
           <a:xfrm>
             <a:off x="621720" y="3666600"/>
-            <a:ext cx="1416960" cy="237240"/>
+            <a:ext cx="1416600" cy="236880"/>
           </a:xfrm>
           <a:prstGeom prst="rect">
             <a:avLst/>
@@ -16371,7 +16521,7 @@
         <p:spPr>
           <a:xfrm>
             <a:off x="2176200" y="3657600"/>
-            <a:ext cx="1508400" cy="310680"/>
+            <a:ext cx="1508040" cy="310320"/>
           </a:xfrm>
           <a:prstGeom prst="roundRect">
             <a:avLst>
@@ -16419,7 +16569,7 @@
         <p:spPr>
           <a:xfrm>
             <a:off x="2176200" y="3666600"/>
-            <a:ext cx="1508400" cy="237240"/>
+            <a:ext cx="1508040" cy="236880"/>
           </a:xfrm>
           <a:prstGeom prst="rect">
             <a:avLst/>
@@ -16480,7 +16630,7 @@
         <p:spPr>
           <a:xfrm>
             <a:off x="3822120" y="3657600"/>
-            <a:ext cx="1416960" cy="310680"/>
+            <a:ext cx="1416600" cy="310320"/>
           </a:xfrm>
           <a:prstGeom prst="roundRect">
             <a:avLst>
@@ -16528,7 +16678,7 @@
         <p:spPr>
           <a:xfrm>
             <a:off x="3822120" y="3666600"/>
-            <a:ext cx="1416960" cy="237240"/>
+            <a:ext cx="1416600" cy="236880"/>
           </a:xfrm>
           <a:prstGeom prst="rect">
             <a:avLst/>
@@ -16589,7 +16739,7 @@
         <p:spPr>
           <a:xfrm>
             <a:off x="5394960" y="3657600"/>
-            <a:ext cx="1508400" cy="310680"/>
+            <a:ext cx="1508040" cy="310320"/>
           </a:xfrm>
           <a:prstGeom prst="roundRect">
             <a:avLst>
@@ -16637,7 +16787,7 @@
         <p:spPr>
           <a:xfrm>
             <a:off x="5394960" y="3666600"/>
-            <a:ext cx="1508400" cy="237240"/>
+            <a:ext cx="1508040" cy="236880"/>
           </a:xfrm>
           <a:prstGeom prst="rect">
             <a:avLst/>
@@ -16698,7 +16848,7 @@
         <p:spPr>
           <a:xfrm>
             <a:off x="7059240" y="3657600"/>
-            <a:ext cx="1416960" cy="310680"/>
+            <a:ext cx="1416600" cy="310320"/>
           </a:xfrm>
           <a:prstGeom prst="roundRect">
             <a:avLst>
@@ -16746,7 +16896,7 @@
         <p:spPr>
           <a:xfrm>
             <a:off x="7059240" y="3666600"/>
-            <a:ext cx="1416960" cy="237240"/>
+            <a:ext cx="1416600" cy="236880"/>
           </a:xfrm>
           <a:prstGeom prst="rect">
             <a:avLst/>
@@ -16827,7 +16977,7 @@
           <a:fontRef idx="minor"/>
         </p:style>
         <p:txBody>
-          <a:bodyPr lIns="90000" tIns="-44640" rIns="90000" bIns="-44640" anchor="t">
+          <a:bodyPr lIns="63720" tIns="-44640" rIns="63720" bIns="-44640" anchor="t">
             <a:noAutofit/>
           </a:bodyPr>
           <a:p>
@@ -16871,7 +17021,7 @@
           <a:fontRef idx="minor"/>
         </p:style>
         <p:txBody>
-          <a:bodyPr lIns="90000" tIns="-44640" rIns="90000" bIns="-44640" anchor="t">
+          <a:bodyPr lIns="59400" tIns="-44640" rIns="59400" bIns="-44640" anchor="t">
             <a:noAutofit/>
           </a:bodyPr>
           <a:p>
@@ -16915,7 +17065,7 @@
           <a:fontRef idx="minor"/>
         </p:style>
         <p:txBody>
-          <a:bodyPr lIns="90000" tIns="-44640" rIns="90000" bIns="-44640" anchor="t">
+          <a:bodyPr lIns="68400" tIns="-44640" rIns="68400" bIns="-44640" anchor="t">
             <a:noAutofit/>
           </a:bodyPr>
           <a:p>
@@ -16959,7 +17109,7 @@
           <a:fontRef idx="minor"/>
         </p:style>
         <p:txBody>
-          <a:bodyPr lIns="90000" tIns="-44640" rIns="90000" bIns="-44640" anchor="t">
+          <a:bodyPr lIns="68400" tIns="-44640" rIns="68400" bIns="-44640" anchor="t">
             <a:noAutofit/>
           </a:bodyPr>
           <a:p>
@@ -16983,7 +17133,7 @@
         <p:spPr>
           <a:xfrm>
             <a:off x="594360" y="4343400"/>
-            <a:ext cx="11018160" cy="1298160"/>
+            <a:ext cx="11017800" cy="1297800"/>
           </a:xfrm>
           <a:prstGeom prst="roundRect">
             <a:avLst>
@@ -17031,7 +17181,7 @@
         <p:spPr>
           <a:xfrm>
             <a:off x="758880" y="4434840"/>
-            <a:ext cx="10689120" cy="273960"/>
+            <a:ext cx="10688760" cy="273600"/>
           </a:xfrm>
           <a:prstGeom prst="rect">
             <a:avLst/>
@@ -17049,7 +17199,7 @@
         </p:style>
         <p:txBody>
           <a:bodyPr lIns="0" tIns="0" rIns="0" bIns="0" anchor="ctr">
-            <a:normAutofit/>
+            <a:normAutofit lnSpcReduction="9999"/>
           </a:bodyPr>
           <a:p>
             <a:pPr defTabSz="914400">
@@ -17092,7 +17242,7 @@
         <p:spPr>
           <a:xfrm>
             <a:off x="758880" y="4763880"/>
-            <a:ext cx="10689120" cy="785880"/>
+            <a:ext cx="10688760" cy="785520"/>
           </a:xfrm>
           <a:prstGeom prst="rect">
             <a:avLst/>
@@ -17253,7 +17403,7 @@
         <p:spPr>
           <a:xfrm>
             <a:off x="11475720" y="6510600"/>
-            <a:ext cx="799560" cy="299520"/>
+            <a:ext cx="799200" cy="299160"/>
           </a:xfrm>
           <a:prstGeom prst="rect">
             <a:avLst/>
@@ -17273,6 +17423,9 @@
                 <a:spcPct val="100000"/>
               </a:lnSpc>
               <a:buNone/>
+              <a:tabLst>
+                <a:tab pos="0" algn="l"/>
+              </a:tabLst>
               <a:defRPr lang="en-US" sz="1200" b="0" u="none" strike="noStrike">
                 <a:solidFill>
                   <a:srgbClr val="667085"/>
@@ -17290,8 +17443,11 @@
                 <a:spcPct val="100000"/>
               </a:lnSpc>
               <a:buNone/>
+              <a:tabLst>
+                <a:tab pos="0" algn="l"/>
+              </a:tabLst>
             </a:pPr>
-            <a:fld id="{301570F3-8503-4705-991B-3A504E23C399}" type="slidenum">
+            <a:fld id="{1B455245-DF1A-4002-9A3D-6F818271DAA6}" type="slidenum">
               <a:rPr lang="en-US" sz="1200" b="0" u="none" strike="noStrike">
                 <a:solidFill>
                   <a:srgbClr val="667085"/>
@@ -17353,7 +17509,7 @@
         <p:spPr>
           <a:xfrm>
             <a:off x="530280" y="329040"/>
-            <a:ext cx="10972440" cy="438480"/>
+            <a:ext cx="10972080" cy="438120"/>
           </a:xfrm>
           <a:prstGeom prst="rect">
             <a:avLst/>
@@ -17432,7 +17588,7 @@
         <p:spPr>
           <a:xfrm>
             <a:off x="548640" y="841320"/>
-            <a:ext cx="10972440" cy="310680"/>
+            <a:ext cx="10972080" cy="310320"/>
           </a:xfrm>
           <a:prstGeom prst="rect">
             <a:avLst/>
@@ -17505,7 +17661,7 @@
         <p:spPr>
           <a:xfrm>
             <a:off x="567000" y="1261800"/>
-            <a:ext cx="3657240" cy="1828440"/>
+            <a:ext cx="3656880" cy="1828080"/>
           </a:xfrm>
           <a:prstGeom prst="roundRect">
             <a:avLst>
@@ -17553,7 +17709,7 @@
         <p:spPr>
           <a:xfrm>
             <a:off x="731520" y="1353240"/>
-            <a:ext cx="3328200" cy="273960"/>
+            <a:ext cx="3327840" cy="273600"/>
           </a:xfrm>
           <a:prstGeom prst="rect">
             <a:avLst/>
@@ -17571,7 +17727,7 @@
         </p:style>
         <p:txBody>
           <a:bodyPr lIns="0" tIns="0" rIns="0" bIns="0" anchor="ctr">
-            <a:normAutofit/>
+            <a:normAutofit lnSpcReduction="9999"/>
           </a:bodyPr>
           <a:p>
             <a:pPr defTabSz="914400">
@@ -17614,7 +17770,7 @@
         <p:spPr>
           <a:xfrm>
             <a:off x="731520" y="1682640"/>
-            <a:ext cx="3328200" cy="1316520"/>
+            <a:ext cx="3327840" cy="1316160"/>
           </a:xfrm>
           <a:prstGeom prst="rect">
             <a:avLst/>
@@ -17801,7 +17957,7 @@
         <p:spPr>
           <a:xfrm>
             <a:off x="4416480" y="1261800"/>
-            <a:ext cx="3428640" cy="1828440"/>
+            <a:ext cx="3428280" cy="1828080"/>
           </a:xfrm>
           <a:prstGeom prst="roundRect">
             <a:avLst>
@@ -17849,7 +18005,7 @@
         <p:spPr>
           <a:xfrm>
             <a:off x="4581000" y="1353240"/>
-            <a:ext cx="3099600" cy="273960"/>
+            <a:ext cx="3099240" cy="273600"/>
           </a:xfrm>
           <a:prstGeom prst="rect">
             <a:avLst/>
@@ -17867,7 +18023,7 @@
         </p:style>
         <p:txBody>
           <a:bodyPr lIns="0" tIns="0" rIns="0" bIns="0" anchor="ctr">
-            <a:normAutofit/>
+            <a:normAutofit lnSpcReduction="9999"/>
           </a:bodyPr>
           <a:p>
             <a:pPr defTabSz="914400">
@@ -17910,7 +18066,7 @@
         <p:spPr>
           <a:xfrm>
             <a:off x="4581000" y="1682640"/>
-            <a:ext cx="3099600" cy="1316520"/>
+            <a:ext cx="3099240" cy="1316160"/>
           </a:xfrm>
           <a:prstGeom prst="rect">
             <a:avLst/>
@@ -18091,7 +18247,7 @@
         <p:spPr>
           <a:xfrm>
             <a:off x="8028360" y="1261800"/>
-            <a:ext cx="3584160" cy="1828440"/>
+            <a:ext cx="3583800" cy="1828080"/>
           </a:xfrm>
           <a:prstGeom prst="roundRect">
             <a:avLst>
@@ -18139,7 +18295,7 @@
         <p:spPr>
           <a:xfrm>
             <a:off x="8192880" y="1353240"/>
-            <a:ext cx="3254760" cy="273960"/>
+            <a:ext cx="3254400" cy="273600"/>
           </a:xfrm>
           <a:prstGeom prst="rect">
             <a:avLst/>
@@ -18157,7 +18313,7 @@
         </p:style>
         <p:txBody>
           <a:bodyPr lIns="0" tIns="0" rIns="0" bIns="0" anchor="ctr">
-            <a:normAutofit/>
+            <a:normAutofit lnSpcReduction="9999"/>
           </a:bodyPr>
           <a:p>
             <a:pPr defTabSz="914400">
@@ -18200,7 +18356,7 @@
         <p:spPr>
           <a:xfrm>
             <a:off x="8192880" y="1682640"/>
-            <a:ext cx="3254760" cy="1316520"/>
+            <a:ext cx="3254400" cy="1316160"/>
           </a:xfrm>
           <a:prstGeom prst="rect">
             <a:avLst/>
@@ -18291,7 +18447,7 @@
         <p:spPr>
           <a:xfrm>
             <a:off x="658440" y="3429000"/>
-            <a:ext cx="2194200" cy="319680"/>
+            <a:ext cx="2193840" cy="319320"/>
           </a:xfrm>
           <a:prstGeom prst="rect">
             <a:avLst/>
@@ -18352,7 +18508,7 @@
         <p:spPr>
           <a:xfrm>
             <a:off x="658440" y="3840480"/>
-            <a:ext cx="1828440" cy="310680"/>
+            <a:ext cx="1828080" cy="310320"/>
           </a:xfrm>
           <a:prstGeom prst="roundRect">
             <a:avLst>
@@ -18400,7 +18556,7 @@
         <p:spPr>
           <a:xfrm>
             <a:off x="658440" y="3849480"/>
-            <a:ext cx="1828440" cy="237240"/>
+            <a:ext cx="1828080" cy="236880"/>
           </a:xfrm>
           <a:prstGeom prst="rect">
             <a:avLst/>
@@ -18461,7 +18617,7 @@
         <p:spPr>
           <a:xfrm>
             <a:off x="2715840" y="3840480"/>
-            <a:ext cx="1828440" cy="310680"/>
+            <a:ext cx="1828080" cy="310320"/>
           </a:xfrm>
           <a:prstGeom prst="roundRect">
             <a:avLst>
@@ -18509,7 +18665,7 @@
         <p:spPr>
           <a:xfrm>
             <a:off x="2715840" y="3849480"/>
-            <a:ext cx="1828440" cy="237240"/>
+            <a:ext cx="1828080" cy="236880"/>
           </a:xfrm>
           <a:prstGeom prst="rect">
             <a:avLst/>
@@ -18570,7 +18726,7 @@
         <p:spPr>
           <a:xfrm>
             <a:off x="4773240" y="3840480"/>
-            <a:ext cx="1828440" cy="310680"/>
+            <a:ext cx="1828080" cy="310320"/>
           </a:xfrm>
           <a:prstGeom prst="roundRect">
             <a:avLst>
@@ -18618,7 +18774,7 @@
         <p:spPr>
           <a:xfrm>
             <a:off x="4773240" y="3849480"/>
-            <a:ext cx="1828440" cy="237240"/>
+            <a:ext cx="1828080" cy="236880"/>
           </a:xfrm>
           <a:prstGeom prst="rect">
             <a:avLst/>
@@ -18679,7 +18835,7 @@
         <p:spPr>
           <a:xfrm>
             <a:off x="658440" y="4343400"/>
-            <a:ext cx="1828440" cy="310680"/>
+            <a:ext cx="1828080" cy="310320"/>
           </a:xfrm>
           <a:prstGeom prst="roundRect">
             <a:avLst>
@@ -18727,7 +18883,7 @@
         <p:spPr>
           <a:xfrm>
             <a:off x="658440" y="4352400"/>
-            <a:ext cx="1828440" cy="237240"/>
+            <a:ext cx="1828080" cy="236880"/>
           </a:xfrm>
           <a:prstGeom prst="rect">
             <a:avLst/>
@@ -18800,7 +18956,7 @@
         <p:spPr>
           <a:xfrm>
             <a:off x="2715840" y="4343400"/>
-            <a:ext cx="1828440" cy="310680"/>
+            <a:ext cx="1828080" cy="310320"/>
           </a:xfrm>
           <a:prstGeom prst="roundRect">
             <a:avLst>
@@ -18848,7 +19004,7 @@
         <p:spPr>
           <a:xfrm>
             <a:off x="2715840" y="4352400"/>
-            <a:ext cx="1828440" cy="237240"/>
+            <a:ext cx="1828080" cy="236880"/>
           </a:xfrm>
           <a:prstGeom prst="rect">
             <a:avLst/>
@@ -18933,7 +19089,7 @@
         <p:spPr>
           <a:xfrm>
             <a:off x="6537960" y="3611880"/>
-            <a:ext cx="5074560" cy="1416960"/>
+            <a:ext cx="5074200" cy="1416600"/>
           </a:xfrm>
           <a:prstGeom prst="roundRect">
             <a:avLst>
@@ -18981,7 +19137,7 @@
         <p:spPr>
           <a:xfrm>
             <a:off x="6702480" y="3703320"/>
-            <a:ext cx="4745520" cy="273960"/>
+            <a:ext cx="4745160" cy="273600"/>
           </a:xfrm>
           <a:prstGeom prst="rect">
             <a:avLst/>
@@ -18999,7 +19155,7 @@
         </p:style>
         <p:txBody>
           <a:bodyPr lIns="0" tIns="0" rIns="0" bIns="0" anchor="ctr">
-            <a:normAutofit/>
+            <a:normAutofit lnSpcReduction="9999"/>
           </a:bodyPr>
           <a:p>
             <a:pPr defTabSz="914400">
@@ -19054,7 +19210,7 @@
         <p:spPr>
           <a:xfrm>
             <a:off x="6702480" y="4032360"/>
-            <a:ext cx="4745520" cy="905040"/>
+            <a:ext cx="4745160" cy="904680"/>
           </a:xfrm>
           <a:prstGeom prst="rect">
             <a:avLst/>
@@ -19197,7 +19353,7 @@
         <p:spPr>
           <a:xfrm>
             <a:off x="11475720" y="6510600"/>
-            <a:ext cx="799560" cy="299520"/>
+            <a:ext cx="799200" cy="299160"/>
           </a:xfrm>
           <a:prstGeom prst="rect">
             <a:avLst/>
@@ -19217,6 +19373,9 @@
                 <a:spcPct val="100000"/>
               </a:lnSpc>
               <a:buNone/>
+              <a:tabLst>
+                <a:tab pos="0" algn="l"/>
+              </a:tabLst>
               <a:defRPr lang="en-US" sz="1200" b="0" u="none" strike="noStrike">
                 <a:solidFill>
                   <a:srgbClr val="667085"/>
@@ -19234,8 +19393,11 @@
                 <a:spcPct val="100000"/>
               </a:lnSpc>
               <a:buNone/>
+              <a:tabLst>
+                <a:tab pos="0" algn="l"/>
+              </a:tabLst>
             </a:pPr>
-            <a:fld id="{9D891B7C-4956-43A7-9CC6-3136B3FCC83D}" type="slidenum">
+            <a:fld id="{45717656-62DA-44E9-8586-4199275249EF}" type="slidenum">
               <a:rPr lang="en-US" sz="1200" b="0" u="none" strike="noStrike">
                 <a:solidFill>
                   <a:srgbClr val="667085"/>
@@ -19297,7 +19459,7 @@
         <p:spPr>
           <a:xfrm>
             <a:off x="530280" y="329040"/>
-            <a:ext cx="10972440" cy="438480"/>
+            <a:ext cx="10972080" cy="438120"/>
           </a:xfrm>
           <a:prstGeom prst="rect">
             <a:avLst/>
@@ -19354,7 +19516,7 @@
         <p:spPr>
           <a:xfrm>
             <a:off x="548640" y="841320"/>
-            <a:ext cx="10972440" cy="310680"/>
+            <a:ext cx="10972080" cy="310320"/>
           </a:xfrm>
           <a:prstGeom prst="rect">
             <a:avLst/>
@@ -19439,7 +19601,7 @@
         <p:spPr>
           <a:xfrm>
             <a:off x="594360" y="1243440"/>
-            <a:ext cx="1572480" cy="310680"/>
+            <a:ext cx="1572120" cy="310320"/>
           </a:xfrm>
           <a:prstGeom prst="roundRect">
             <a:avLst>
@@ -19487,7 +19649,7 @@
         <p:spPr>
           <a:xfrm>
             <a:off x="594360" y="1252800"/>
-            <a:ext cx="1572480" cy="237240"/>
+            <a:ext cx="1572120" cy="236880"/>
           </a:xfrm>
           <a:prstGeom prst="rect">
             <a:avLst/>
@@ -19548,7 +19710,7 @@
         <p:spPr>
           <a:xfrm>
             <a:off x="2267640" y="1243440"/>
-            <a:ext cx="9326520" cy="347040"/>
+            <a:ext cx="9326160" cy="346680"/>
           </a:xfrm>
           <a:prstGeom prst="rect">
             <a:avLst/>
@@ -19717,7 +19879,7 @@
         <p:spPr>
           <a:xfrm>
             <a:off x="594360" y="1828800"/>
-            <a:ext cx="3382920" cy="1828440"/>
+            <a:ext cx="3382560" cy="1828080"/>
           </a:xfrm>
           <a:prstGeom prst="roundRect">
             <a:avLst>
@@ -19765,7 +19927,7 @@
         <p:spPr>
           <a:xfrm>
             <a:off x="758880" y="1920240"/>
-            <a:ext cx="3053880" cy="273960"/>
+            <a:ext cx="3053520" cy="273600"/>
           </a:xfrm>
           <a:prstGeom prst="rect">
             <a:avLst/>
@@ -19783,7 +19945,7 @@
         </p:style>
         <p:txBody>
           <a:bodyPr lIns="0" tIns="0" rIns="0" bIns="0" anchor="ctr">
-            <a:normAutofit/>
+            <a:normAutofit lnSpcReduction="9999"/>
           </a:bodyPr>
           <a:p>
             <a:pPr defTabSz="914400">
@@ -19826,7 +19988,7 @@
         <p:spPr>
           <a:xfrm>
             <a:off x="758880" y="2249280"/>
-            <a:ext cx="3053880" cy="1316520"/>
+            <a:ext cx="3053520" cy="1316160"/>
           </a:xfrm>
           <a:prstGeom prst="rect">
             <a:avLst/>
@@ -19973,7 +20135,7 @@
         <p:spPr>
           <a:xfrm>
             <a:off x="4407480" y="1828800"/>
-            <a:ext cx="3382920" cy="1828440"/>
+            <a:ext cx="3382560" cy="1828080"/>
           </a:xfrm>
           <a:prstGeom prst="roundRect">
             <a:avLst>
@@ -20021,7 +20183,7 @@
         <p:spPr>
           <a:xfrm>
             <a:off x="4572000" y="1920240"/>
-            <a:ext cx="3053880" cy="273960"/>
+            <a:ext cx="3053520" cy="273600"/>
           </a:xfrm>
           <a:prstGeom prst="rect">
             <a:avLst/>
@@ -20039,7 +20201,7 @@
         </p:style>
         <p:txBody>
           <a:bodyPr lIns="0" tIns="0" rIns="0" bIns="0" anchor="ctr">
-            <a:normAutofit/>
+            <a:normAutofit lnSpcReduction="9999"/>
           </a:bodyPr>
           <a:p>
             <a:pPr defTabSz="914400">
@@ -20082,7 +20244,7 @@
         <p:spPr>
           <a:xfrm>
             <a:off x="4572000" y="2249280"/>
-            <a:ext cx="3053880" cy="1316520"/>
+            <a:ext cx="3053520" cy="1316160"/>
           </a:xfrm>
           <a:prstGeom prst="rect">
             <a:avLst/>
@@ -20217,7 +20379,7 @@
         <p:spPr>
           <a:xfrm>
             <a:off x="8211240" y="1828800"/>
-            <a:ext cx="3382920" cy="1828440"/>
+            <a:ext cx="3382560" cy="1828080"/>
           </a:xfrm>
           <a:prstGeom prst="roundRect">
             <a:avLst>
@@ -20265,7 +20427,7 @@
         <p:spPr>
           <a:xfrm>
             <a:off x="8375760" y="1920240"/>
-            <a:ext cx="3053880" cy="273960"/>
+            <a:ext cx="3053520" cy="273600"/>
           </a:xfrm>
           <a:prstGeom prst="rect">
             <a:avLst/>
@@ -20283,7 +20445,7 @@
         </p:style>
         <p:txBody>
           <a:bodyPr lIns="0" tIns="0" rIns="0" bIns="0" anchor="ctr">
-            <a:normAutofit/>
+            <a:normAutofit lnSpcReduction="9999"/>
           </a:bodyPr>
           <a:p>
             <a:pPr defTabSz="914400">
@@ -20326,7 +20488,7 @@
         <p:spPr>
           <a:xfrm>
             <a:off x="8375760" y="2249280"/>
-            <a:ext cx="3053880" cy="1316520"/>
+            <a:ext cx="3053520" cy="1316160"/>
           </a:xfrm>
           <a:prstGeom prst="rect">
             <a:avLst/>
@@ -20417,7 +20579,7 @@
         <p:spPr>
           <a:xfrm>
             <a:off x="594360" y="4069080"/>
-            <a:ext cx="5348880" cy="1325520"/>
+            <a:ext cx="5348520" cy="1325160"/>
           </a:xfrm>
           <a:prstGeom prst="roundRect">
             <a:avLst>
@@ -20465,7 +20627,7 @@
         <p:spPr>
           <a:xfrm>
             <a:off x="758880" y="4160520"/>
-            <a:ext cx="5019840" cy="273960"/>
+            <a:ext cx="5019480" cy="273600"/>
           </a:xfrm>
           <a:prstGeom prst="rect">
             <a:avLst/>
@@ -20483,7 +20645,7 @@
         </p:style>
         <p:txBody>
           <a:bodyPr lIns="0" tIns="0" rIns="0" bIns="0" anchor="ctr">
-            <a:normAutofit/>
+            <a:normAutofit lnSpcReduction="9999"/>
           </a:bodyPr>
           <a:p>
             <a:pPr defTabSz="914400">
@@ -20526,7 +20688,7 @@
         <p:spPr>
           <a:xfrm>
             <a:off x="758880" y="4489560"/>
-            <a:ext cx="5019840" cy="813600"/>
+            <a:ext cx="5019480" cy="813240"/>
           </a:xfrm>
           <a:prstGeom prst="rect">
             <a:avLst/>
@@ -20635,7 +20797,7 @@
         <p:spPr>
           <a:xfrm>
             <a:off x="6172200" y="4069080"/>
-            <a:ext cx="5421960" cy="1325520"/>
+            <a:ext cx="5421600" cy="1325160"/>
           </a:xfrm>
           <a:prstGeom prst="roundRect">
             <a:avLst>
@@ -20683,7 +20845,7 @@
         <p:spPr>
           <a:xfrm>
             <a:off x="6336720" y="4160520"/>
-            <a:ext cx="5092920" cy="273960"/>
+            <a:ext cx="5092560" cy="273600"/>
           </a:xfrm>
           <a:prstGeom prst="rect">
             <a:avLst/>
@@ -20701,7 +20863,7 @@
         </p:style>
         <p:txBody>
           <a:bodyPr lIns="0" tIns="0" rIns="0" bIns="0" anchor="ctr">
-            <a:normAutofit/>
+            <a:normAutofit lnSpcReduction="9999"/>
           </a:bodyPr>
           <a:p>
             <a:pPr defTabSz="914400">
@@ -20744,7 +20906,7 @@
         <p:spPr>
           <a:xfrm>
             <a:off x="6336720" y="4489560"/>
-            <a:ext cx="5092920" cy="813600"/>
+            <a:ext cx="5092560" cy="813240"/>
           </a:xfrm>
           <a:prstGeom prst="rect">
             <a:avLst/>
@@ -20881,7 +21043,7 @@
         <p:spPr>
           <a:xfrm>
             <a:off x="11475720" y="6510600"/>
-            <a:ext cx="799560" cy="299520"/>
+            <a:ext cx="799200" cy="299160"/>
           </a:xfrm>
           <a:prstGeom prst="rect">
             <a:avLst/>
@@ -20901,6 +21063,9 @@
                 <a:spcPct val="100000"/>
               </a:lnSpc>
               <a:buNone/>
+              <a:tabLst>
+                <a:tab pos="0" algn="l"/>
+              </a:tabLst>
               <a:defRPr lang="en-US" sz="1200" b="0" u="none" strike="noStrike">
                 <a:solidFill>
                   <a:srgbClr val="667085"/>
@@ -20918,8 +21083,11 @@
                 <a:spcPct val="100000"/>
               </a:lnSpc>
               <a:buNone/>
+              <a:tabLst>
+                <a:tab pos="0" algn="l"/>
+              </a:tabLst>
             </a:pPr>
-            <a:fld id="{29069C14-17C0-4428-8EA4-1311F124DB51}" type="slidenum">
+            <a:fld id="{5FEDA806-5160-4B30-961E-432A72AABC95}" type="slidenum">
               <a:rPr lang="en-US" sz="1200" b="0" u="none" strike="noStrike">
                 <a:solidFill>
                   <a:srgbClr val="667085"/>
@@ -20981,7 +21149,7 @@
         <p:spPr>
           <a:xfrm>
             <a:off x="530280" y="329040"/>
-            <a:ext cx="10972440" cy="438480"/>
+            <a:ext cx="10972080" cy="438120"/>
           </a:xfrm>
           <a:prstGeom prst="rect">
             <a:avLst/>
@@ -21038,7 +21206,7 @@
         <p:spPr>
           <a:xfrm>
             <a:off x="548640" y="841320"/>
-            <a:ext cx="10972440" cy="310680"/>
+            <a:ext cx="10972080" cy="310320"/>
           </a:xfrm>
           <a:prstGeom prst="rect">
             <a:avLst/>
@@ -21171,7 +21339,7 @@
         <p:spPr>
           <a:xfrm>
             <a:off x="594360" y="1371600"/>
-            <a:ext cx="3382920" cy="2971440"/>
+            <a:ext cx="3382560" cy="2971080"/>
           </a:xfrm>
           <a:prstGeom prst="roundRect">
             <a:avLst>
@@ -21219,7 +21387,7 @@
         <p:spPr>
           <a:xfrm>
             <a:off x="758880" y="1463040"/>
-            <a:ext cx="3053880" cy="273960"/>
+            <a:ext cx="3053520" cy="273600"/>
           </a:xfrm>
           <a:prstGeom prst="rect">
             <a:avLst/>
@@ -21237,7 +21405,7 @@
         </p:style>
         <p:txBody>
           <a:bodyPr lIns="0" tIns="0" rIns="0" bIns="0" anchor="ctr">
-            <a:normAutofit/>
+            <a:normAutofit lnSpcReduction="9999"/>
           </a:bodyPr>
           <a:p>
             <a:pPr defTabSz="914400">
@@ -21280,7 +21448,7 @@
         <p:spPr>
           <a:xfrm>
             <a:off x="758880" y="1792080"/>
-            <a:ext cx="3053880" cy="2459520"/>
+            <a:ext cx="3053520" cy="2459160"/>
           </a:xfrm>
           <a:prstGeom prst="rect">
             <a:avLst/>
@@ -21497,7 +21665,7 @@
         <p:spPr>
           <a:xfrm>
             <a:off x="4407480" y="1371600"/>
-            <a:ext cx="3382920" cy="2971440"/>
+            <a:ext cx="3382560" cy="2971080"/>
           </a:xfrm>
           <a:prstGeom prst="roundRect">
             <a:avLst>
@@ -21545,7 +21713,7 @@
         <p:spPr>
           <a:xfrm>
             <a:off x="4572000" y="1463040"/>
-            <a:ext cx="3053880" cy="273960"/>
+            <a:ext cx="3053520" cy="273600"/>
           </a:xfrm>
           <a:prstGeom prst="rect">
             <a:avLst/>
@@ -21563,7 +21731,7 @@
         </p:style>
         <p:txBody>
           <a:bodyPr lIns="0" tIns="0" rIns="0" bIns="0" anchor="ctr">
-            <a:normAutofit/>
+            <a:normAutofit lnSpcReduction="9999"/>
           </a:bodyPr>
           <a:p>
             <a:pPr defTabSz="914400">
@@ -21606,7 +21774,7 @@
         <p:spPr>
           <a:xfrm>
             <a:off x="4572000" y="1792080"/>
-            <a:ext cx="3053880" cy="2459520"/>
+            <a:ext cx="3053520" cy="2459160"/>
           </a:xfrm>
           <a:prstGeom prst="rect">
             <a:avLst/>
@@ -21627,6 +21795,11 @@
             <a:normAutofit/>
           </a:bodyPr>
           <a:p>
+            <a:pPr>
+              <a:lnSpc>
+                <a:spcPct val="100000"/>
+              </a:lnSpc>
+            </a:pPr>
             <a:r>
               <a:rPr lang="en-US" sz="1700" b="0" u="none" strike="noStrike">
                 <a:solidFill>
@@ -21649,6 +21822,11 @@
             </a:endParaRPr>
           </a:p>
           <a:p>
+            <a:pPr>
+              <a:lnSpc>
+                <a:spcPct val="100000"/>
+              </a:lnSpc>
+            </a:pPr>
             <a:r>
               <a:rPr lang="en-US" sz="1700" b="0" u="none" strike="noStrike">
                 <a:solidFill>
@@ -21695,6 +21873,11 @@
             </a:endParaRPr>
           </a:p>
           <a:p>
+            <a:pPr>
+              <a:lnSpc>
+                <a:spcPct val="100000"/>
+              </a:lnSpc>
+            </a:pPr>
             <a:r>
               <a:rPr lang="hi-IN" sz="1700" b="0" u="none" strike="noStrike">
                 <a:solidFill>
@@ -21741,6 +21924,11 @@
             </a:endParaRPr>
           </a:p>
           <a:p>
+            <a:pPr>
+              <a:lnSpc>
+                <a:spcPct val="100000"/>
+              </a:lnSpc>
+            </a:pPr>
             <a:r>
               <a:rPr lang="en-US" sz="1700" b="0" u="none" strike="noStrike">
                 <a:solidFill>
@@ -21791,7 +21979,7 @@
         <p:spPr>
           <a:xfrm>
             <a:off x="8220600" y="1371600"/>
-            <a:ext cx="3382920" cy="2971440"/>
+            <a:ext cx="3382560" cy="2971080"/>
           </a:xfrm>
           <a:prstGeom prst="roundRect">
             <a:avLst>
@@ -21839,7 +22027,7 @@
         <p:spPr>
           <a:xfrm>
             <a:off x="8385120" y="1463040"/>
-            <a:ext cx="3053880" cy="273960"/>
+            <a:ext cx="3053520" cy="273600"/>
           </a:xfrm>
           <a:prstGeom prst="rect">
             <a:avLst/>
@@ -21857,7 +22045,7 @@
         </p:style>
         <p:txBody>
           <a:bodyPr lIns="0" tIns="0" rIns="0" bIns="0" anchor="ctr">
-            <a:normAutofit/>
+            <a:normAutofit lnSpcReduction="9999"/>
           </a:bodyPr>
           <a:p>
             <a:pPr defTabSz="914400">
@@ -21900,7 +22088,7 @@
         <p:spPr>
           <a:xfrm>
             <a:off x="8385120" y="1792080"/>
-            <a:ext cx="3053880" cy="2459520"/>
+            <a:ext cx="3053520" cy="2459160"/>
           </a:xfrm>
           <a:prstGeom prst="rect">
             <a:avLst/>
@@ -22147,7 +22335,7 @@
         <p:spPr>
           <a:xfrm>
             <a:off x="594360" y="4663440"/>
-            <a:ext cx="5394600" cy="1051200"/>
+            <a:ext cx="5394240" cy="1050840"/>
           </a:xfrm>
           <a:prstGeom prst="roundRect">
             <a:avLst>
@@ -22195,7 +22383,7 @@
         <p:spPr>
           <a:xfrm>
             <a:off x="758880" y="4754880"/>
-            <a:ext cx="5065560" cy="273960"/>
+            <a:ext cx="5065200" cy="273600"/>
           </a:xfrm>
           <a:prstGeom prst="rect">
             <a:avLst/>
@@ -22213,7 +22401,7 @@
         </p:style>
         <p:txBody>
           <a:bodyPr lIns="0" tIns="0" rIns="0" bIns="0" anchor="ctr">
-            <a:normAutofit/>
+            <a:normAutofit lnSpcReduction="9999"/>
           </a:bodyPr>
           <a:p>
             <a:pPr defTabSz="914400">
@@ -22256,7 +22444,7 @@
         <p:spPr>
           <a:xfrm>
             <a:off x="758880" y="5083920"/>
-            <a:ext cx="5065560" cy="539280"/>
+            <a:ext cx="5065200" cy="538920"/>
           </a:xfrm>
           <a:prstGeom prst="rect">
             <a:avLst/>
@@ -22329,7 +22517,7 @@
         <p:spPr>
           <a:xfrm>
             <a:off x="6172200" y="4663440"/>
-            <a:ext cx="5421960" cy="1051200"/>
+            <a:ext cx="5421600" cy="1050840"/>
           </a:xfrm>
           <a:prstGeom prst="roundRect">
             <a:avLst>
@@ -22377,7 +22565,7 @@
         <p:spPr>
           <a:xfrm>
             <a:off x="6336720" y="4754880"/>
-            <a:ext cx="5092920" cy="273960"/>
+            <a:ext cx="5092560" cy="273600"/>
           </a:xfrm>
           <a:prstGeom prst="rect">
             <a:avLst/>
@@ -22395,7 +22583,7 @@
         </p:style>
         <p:txBody>
           <a:bodyPr lIns="0" tIns="0" rIns="0" bIns="0" anchor="ctr">
-            <a:normAutofit/>
+            <a:normAutofit lnSpcReduction="9999"/>
           </a:bodyPr>
           <a:p>
             <a:pPr defTabSz="914400">
@@ -22438,7 +22626,7 @@
         <p:spPr>
           <a:xfrm>
             <a:off x="6336720" y="5083920"/>
-            <a:ext cx="5092920" cy="539280"/>
+            <a:ext cx="5092560" cy="538920"/>
           </a:xfrm>
           <a:prstGeom prst="rect">
             <a:avLst/>
@@ -22563,7 +22751,7 @@
         <p:spPr>
           <a:xfrm>
             <a:off x="11475720" y="6510600"/>
-            <a:ext cx="799560" cy="299520"/>
+            <a:ext cx="799200" cy="299160"/>
           </a:xfrm>
           <a:prstGeom prst="rect">
             <a:avLst/>
@@ -22583,6 +22771,9 @@
                 <a:spcPct val="100000"/>
               </a:lnSpc>
               <a:buNone/>
+              <a:tabLst>
+                <a:tab pos="0" algn="l"/>
+              </a:tabLst>
               <a:defRPr lang="en-US" sz="1200" b="0" u="none" strike="noStrike">
                 <a:solidFill>
                   <a:srgbClr val="667085"/>
@@ -22600,8 +22791,11 @@
                 <a:spcPct val="100000"/>
               </a:lnSpc>
               <a:buNone/>
+              <a:tabLst>
+                <a:tab pos="0" algn="l"/>
+              </a:tabLst>
             </a:pPr>
-            <a:fld id="{C89EC6A0-942F-49CC-AF0D-3817DDDB5BD5}" type="slidenum">
+            <a:fld id="{E5F5A3B4-2EC3-4532-A706-727667DFEA6C}" type="slidenum">
               <a:rPr lang="en-US" sz="1200" b="0" u="none" strike="noStrike">
                 <a:solidFill>
                   <a:srgbClr val="667085"/>
@@ -22663,7 +22857,7 @@
         <p:spPr>
           <a:xfrm>
             <a:off x="530280" y="329040"/>
-            <a:ext cx="10972440" cy="438480"/>
+            <a:ext cx="10972080" cy="438120"/>
           </a:xfrm>
           <a:prstGeom prst="rect">
             <a:avLst/>
@@ -22742,7 +22936,7 @@
         <p:spPr>
           <a:xfrm>
             <a:off x="548640" y="841320"/>
-            <a:ext cx="10972440" cy="310680"/>
+            <a:ext cx="10972080" cy="310320"/>
           </a:xfrm>
           <a:prstGeom prst="rect">
             <a:avLst/>
@@ -22865,7 +23059,7 @@
         <p:spPr>
           <a:xfrm>
             <a:off x="548640" y="1243440"/>
-            <a:ext cx="685440" cy="438480"/>
+            <a:ext cx="685080" cy="438120"/>
           </a:xfrm>
           <a:prstGeom prst="rect">
             <a:avLst/>
@@ -22911,7 +23105,7 @@
         <p:spPr>
           <a:xfrm>
             <a:off x="621720" y="1261800"/>
-            <a:ext cx="539280" cy="402120"/>
+            <a:ext cx="538920" cy="401760"/>
           </a:xfrm>
           <a:prstGeom prst="rect">
             <a:avLst/>
@@ -22972,7 +23166,7 @@
         <p:spPr>
           <a:xfrm>
             <a:off x="1234440" y="1243440"/>
-            <a:ext cx="1508400" cy="438480"/>
+            <a:ext cx="1508040" cy="438120"/>
           </a:xfrm>
           <a:prstGeom prst="rect">
             <a:avLst/>
@@ -23018,7 +23212,7 @@
         <p:spPr>
           <a:xfrm>
             <a:off x="1307520" y="1261800"/>
-            <a:ext cx="1362240" cy="402120"/>
+            <a:ext cx="1361880" cy="401760"/>
           </a:xfrm>
           <a:prstGeom prst="rect">
             <a:avLst/>
@@ -23079,7 +23273,7 @@
         <p:spPr>
           <a:xfrm>
             <a:off x="2743200" y="1243440"/>
-            <a:ext cx="4754520" cy="438480"/>
+            <a:ext cx="4754160" cy="438120"/>
           </a:xfrm>
           <a:prstGeom prst="rect">
             <a:avLst/>
@@ -23125,7 +23319,7 @@
         <p:spPr>
           <a:xfrm>
             <a:off x="2816280" y="1261800"/>
-            <a:ext cx="4608360" cy="402120"/>
+            <a:ext cx="4608000" cy="401760"/>
           </a:xfrm>
           <a:prstGeom prst="rect">
             <a:avLst/>
@@ -23186,7 +23380,7 @@
         <p:spPr>
           <a:xfrm>
             <a:off x="7498080" y="1243440"/>
-            <a:ext cx="1828440" cy="438480"/>
+            <a:ext cx="1828080" cy="438120"/>
           </a:xfrm>
           <a:prstGeom prst="rect">
             <a:avLst/>
@@ -23232,7 +23426,7 @@
         <p:spPr>
           <a:xfrm>
             <a:off x="7571160" y="1261800"/>
-            <a:ext cx="1682280" cy="402120"/>
+            <a:ext cx="1681920" cy="401760"/>
           </a:xfrm>
           <a:prstGeom prst="rect">
             <a:avLst/>
@@ -23293,7 +23487,7 @@
         <p:spPr>
           <a:xfrm>
             <a:off x="9326880" y="1243440"/>
-            <a:ext cx="3154320" cy="438480"/>
+            <a:ext cx="3153960" cy="438120"/>
           </a:xfrm>
           <a:prstGeom prst="rect">
             <a:avLst/>
@@ -23339,7 +23533,7 @@
         <p:spPr>
           <a:xfrm>
             <a:off x="9399960" y="1261800"/>
-            <a:ext cx="3008160" cy="402120"/>
+            <a:ext cx="3007800" cy="401760"/>
           </a:xfrm>
           <a:prstGeom prst="rect">
             <a:avLst/>
@@ -23400,7 +23594,7 @@
         <p:spPr>
           <a:xfrm>
             <a:off x="548640" y="1682640"/>
-            <a:ext cx="685440" cy="484200"/>
+            <a:ext cx="685080" cy="483840"/>
           </a:xfrm>
           <a:prstGeom prst="rect">
             <a:avLst/>
@@ -23446,7 +23640,7 @@
         <p:spPr>
           <a:xfrm>
             <a:off x="612720" y="1700640"/>
-            <a:ext cx="557280" cy="447840"/>
+            <a:ext cx="556920" cy="447480"/>
           </a:xfrm>
           <a:prstGeom prst="rect">
             <a:avLst/>
@@ -23507,7 +23701,7 @@
         <p:spPr>
           <a:xfrm>
             <a:off x="1234440" y="1682640"/>
-            <a:ext cx="1508400" cy="484200"/>
+            <a:ext cx="1508040" cy="483840"/>
           </a:xfrm>
           <a:prstGeom prst="rect">
             <a:avLst/>
@@ -23553,7 +23747,7 @@
         <p:spPr>
           <a:xfrm>
             <a:off x="1298520" y="1700640"/>
-            <a:ext cx="1380240" cy="447840"/>
+            <a:ext cx="1379880" cy="447480"/>
           </a:xfrm>
           <a:prstGeom prst="rect">
             <a:avLst/>
@@ -23614,7 +23808,7 @@
         <p:spPr>
           <a:xfrm>
             <a:off x="2743200" y="1682640"/>
-            <a:ext cx="4754520" cy="484200"/>
+            <a:ext cx="4754160" cy="483840"/>
           </a:xfrm>
           <a:prstGeom prst="rect">
             <a:avLst/>
@@ -23660,7 +23854,7 @@
         <p:spPr>
           <a:xfrm>
             <a:off x="2807280" y="1700640"/>
-            <a:ext cx="4626360" cy="447840"/>
+            <a:ext cx="4626000" cy="447480"/>
           </a:xfrm>
           <a:prstGeom prst="rect">
             <a:avLst/>
@@ -23721,7 +23915,7 @@
         <p:spPr>
           <a:xfrm>
             <a:off x="7498080" y="1682640"/>
-            <a:ext cx="1828440" cy="484200"/>
+            <a:ext cx="1828080" cy="483840"/>
           </a:xfrm>
           <a:prstGeom prst="rect">
             <a:avLst/>
@@ -23767,7 +23961,7 @@
         <p:spPr>
           <a:xfrm>
             <a:off x="7562160" y="1700640"/>
-            <a:ext cx="1700280" cy="447840"/>
+            <a:ext cx="1699920" cy="447480"/>
           </a:xfrm>
           <a:prstGeom prst="rect">
             <a:avLst/>
@@ -23840,7 +24034,7 @@
         <p:spPr>
           <a:xfrm>
             <a:off x="9326880" y="1682640"/>
-            <a:ext cx="3154320" cy="484200"/>
+            <a:ext cx="3153960" cy="483840"/>
           </a:xfrm>
           <a:prstGeom prst="rect">
             <a:avLst/>
@@ -23886,7 +24080,7 @@
         <p:spPr>
           <a:xfrm>
             <a:off x="9390960" y="1700640"/>
-            <a:ext cx="3026160" cy="447840"/>
+            <a:ext cx="3025800" cy="447480"/>
           </a:xfrm>
           <a:prstGeom prst="rect">
             <a:avLst/>
@@ -23947,7 +24141,7 @@
         <p:spPr>
           <a:xfrm>
             <a:off x="548640" y="2167200"/>
-            <a:ext cx="685440" cy="484200"/>
+            <a:ext cx="685080" cy="483840"/>
           </a:xfrm>
           <a:prstGeom prst="rect">
             <a:avLst/>
@@ -23993,7 +24187,7 @@
         <p:spPr>
           <a:xfrm>
             <a:off x="612720" y="2185560"/>
-            <a:ext cx="557280" cy="447840"/>
+            <a:ext cx="556920" cy="447480"/>
           </a:xfrm>
           <a:prstGeom prst="rect">
             <a:avLst/>
@@ -24054,7 +24248,7 @@
         <p:spPr>
           <a:xfrm>
             <a:off x="1234440" y="2167200"/>
-            <a:ext cx="1508400" cy="484200"/>
+            <a:ext cx="1508040" cy="483840"/>
           </a:xfrm>
           <a:prstGeom prst="rect">
             <a:avLst/>
@@ -24100,7 +24294,7 @@
         <p:spPr>
           <a:xfrm>
             <a:off x="1298520" y="2185560"/>
-            <a:ext cx="1380240" cy="447840"/>
+            <a:ext cx="1379880" cy="447480"/>
           </a:xfrm>
           <a:prstGeom prst="rect">
             <a:avLst/>
@@ -24161,7 +24355,7 @@
         <p:spPr>
           <a:xfrm>
             <a:off x="2743200" y="2167200"/>
-            <a:ext cx="4754520" cy="484200"/>
+            <a:ext cx="4754160" cy="483840"/>
           </a:xfrm>
           <a:prstGeom prst="rect">
             <a:avLst/>
@@ -24207,7 +24401,7 @@
         <p:spPr>
           <a:xfrm>
             <a:off x="2807280" y="2185560"/>
-            <a:ext cx="4626360" cy="447840"/>
+            <a:ext cx="4626000" cy="447480"/>
           </a:xfrm>
           <a:prstGeom prst="rect">
             <a:avLst/>
@@ -24268,7 +24462,7 @@
         <p:spPr>
           <a:xfrm>
             <a:off x="7498080" y="2167200"/>
-            <a:ext cx="1828440" cy="484200"/>
+            <a:ext cx="1828080" cy="483840"/>
           </a:xfrm>
           <a:prstGeom prst="rect">
             <a:avLst/>
@@ -24314,7 +24508,7 @@
         <p:spPr>
           <a:xfrm>
             <a:off x="7562160" y="2185560"/>
-            <a:ext cx="1700280" cy="447840"/>
+            <a:ext cx="1699920" cy="447480"/>
           </a:xfrm>
           <a:prstGeom prst="rect">
             <a:avLst/>
@@ -24375,7 +24569,7 @@
         <p:spPr>
           <a:xfrm>
             <a:off x="9326880" y="2167200"/>
-            <a:ext cx="3154320" cy="484200"/>
+            <a:ext cx="3153960" cy="483840"/>
           </a:xfrm>
           <a:prstGeom prst="rect">
             <a:avLst/>
@@ -24421,7 +24615,7 @@
         <p:spPr>
           <a:xfrm>
             <a:off x="9390960" y="2185560"/>
-            <a:ext cx="3026160" cy="447840"/>
+            <a:ext cx="3025800" cy="447480"/>
           </a:xfrm>
           <a:prstGeom prst="rect">
             <a:avLst/>
@@ -24482,7 +24676,7 @@
         <p:spPr>
           <a:xfrm>
             <a:off x="548640" y="2651760"/>
-            <a:ext cx="685440" cy="484200"/>
+            <a:ext cx="685080" cy="483840"/>
           </a:xfrm>
           <a:prstGeom prst="rect">
             <a:avLst/>
@@ -24528,7 +24722,7 @@
         <p:spPr>
           <a:xfrm>
             <a:off x="612720" y="2670120"/>
-            <a:ext cx="557280" cy="447840"/>
+            <a:ext cx="556920" cy="447480"/>
           </a:xfrm>
           <a:prstGeom prst="rect">
             <a:avLst/>
@@ -24589,7 +24783,7 @@
         <p:spPr>
           <a:xfrm>
             <a:off x="1234440" y="2651760"/>
-            <a:ext cx="1508400" cy="484200"/>
+            <a:ext cx="1508040" cy="483840"/>
           </a:xfrm>
           <a:prstGeom prst="rect">
             <a:avLst/>
@@ -24635,7 +24829,7 @@
         <p:spPr>
           <a:xfrm>
             <a:off x="1298520" y="2670120"/>
-            <a:ext cx="1380240" cy="447840"/>
+            <a:ext cx="1379880" cy="447480"/>
           </a:xfrm>
           <a:prstGeom prst="rect">
             <a:avLst/>
@@ -24696,7 +24890,7 @@
         <p:spPr>
           <a:xfrm>
             <a:off x="2743200" y="2651760"/>
-            <a:ext cx="4754520" cy="484200"/>
+            <a:ext cx="4754160" cy="483840"/>
           </a:xfrm>
           <a:prstGeom prst="rect">
             <a:avLst/>
@@ -24742,7 +24936,7 @@
         <p:spPr>
           <a:xfrm>
             <a:off x="2807280" y="2670120"/>
-            <a:ext cx="4626360" cy="447840"/>
+            <a:ext cx="4626000" cy="447480"/>
           </a:xfrm>
           <a:prstGeom prst="rect">
             <a:avLst/>
@@ -24803,7 +24997,7 @@
         <p:spPr>
           <a:xfrm>
             <a:off x="7498080" y="2651760"/>
-            <a:ext cx="1828440" cy="484200"/>
+            <a:ext cx="1828080" cy="483840"/>
           </a:xfrm>
           <a:prstGeom prst="rect">
             <a:avLst/>
@@ -24849,7 +25043,7 @@
         <p:spPr>
           <a:xfrm>
             <a:off x="7562160" y="2670120"/>
-            <a:ext cx="1700280" cy="447840"/>
+            <a:ext cx="1699920" cy="447480"/>
           </a:xfrm>
           <a:prstGeom prst="rect">
             <a:avLst/>
@@ -24922,7 +25116,7 @@
         <p:spPr>
           <a:xfrm>
             <a:off x="9326880" y="2651760"/>
-            <a:ext cx="3154320" cy="484200"/>
+            <a:ext cx="3153960" cy="483840"/>
           </a:xfrm>
           <a:prstGeom prst="rect">
             <a:avLst/>
@@ -24968,7 +25162,7 @@
         <p:spPr>
           <a:xfrm>
             <a:off x="9390960" y="2670120"/>
-            <a:ext cx="3026160" cy="447840"/>
+            <a:ext cx="3025800" cy="447480"/>
           </a:xfrm>
           <a:prstGeom prst="rect">
             <a:avLst/>
@@ -25029,7 +25223,7 @@
         <p:spPr>
           <a:xfrm>
             <a:off x="548640" y="3136320"/>
-            <a:ext cx="685440" cy="484200"/>
+            <a:ext cx="685080" cy="483840"/>
           </a:xfrm>
           <a:prstGeom prst="rect">
             <a:avLst/>
@@ -25075,7 +25269,7 @@
         <p:spPr>
           <a:xfrm>
             <a:off x="612720" y="3154680"/>
-            <a:ext cx="557280" cy="447840"/>
+            <a:ext cx="556920" cy="447480"/>
           </a:xfrm>
           <a:prstGeom prst="rect">
             <a:avLst/>
@@ -25136,7 +25330,7 @@
         <p:spPr>
           <a:xfrm>
             <a:off x="1234440" y="3136320"/>
-            <a:ext cx="1508400" cy="484200"/>
+            <a:ext cx="1508040" cy="483840"/>
           </a:xfrm>
           <a:prstGeom prst="rect">
             <a:avLst/>
@@ -25182,7 +25376,7 @@
         <p:spPr>
           <a:xfrm>
             <a:off x="1298520" y="3154680"/>
-            <a:ext cx="1380240" cy="447840"/>
+            <a:ext cx="1379880" cy="447480"/>
           </a:xfrm>
           <a:prstGeom prst="rect">
             <a:avLst/>
@@ -25243,7 +25437,7 @@
         <p:spPr>
           <a:xfrm>
             <a:off x="2743200" y="3136320"/>
-            <a:ext cx="4754520" cy="484200"/>
+            <a:ext cx="4754160" cy="483840"/>
           </a:xfrm>
           <a:prstGeom prst="rect">
             <a:avLst/>
@@ -25289,7 +25483,7 @@
         <p:spPr>
           <a:xfrm>
             <a:off x="2807280" y="3154680"/>
-            <a:ext cx="4626360" cy="447840"/>
+            <a:ext cx="4626000" cy="447480"/>
           </a:xfrm>
           <a:prstGeom prst="rect">
             <a:avLst/>
@@ -25350,7 +25544,7 @@
         <p:spPr>
           <a:xfrm>
             <a:off x="7498080" y="3136320"/>
-            <a:ext cx="1828440" cy="484200"/>
+            <a:ext cx="1828080" cy="483840"/>
           </a:xfrm>
           <a:prstGeom prst="rect">
             <a:avLst/>
@@ -25396,7 +25590,7 @@
         <p:spPr>
           <a:xfrm>
             <a:off x="7562160" y="3154680"/>
-            <a:ext cx="1700280" cy="447840"/>
+            <a:ext cx="1699920" cy="447480"/>
           </a:xfrm>
           <a:prstGeom prst="rect">
             <a:avLst/>
@@ -25481,7 +25675,7 @@
         <p:spPr>
           <a:xfrm>
             <a:off x="9326880" y="3136320"/>
-            <a:ext cx="3154320" cy="484200"/>
+            <a:ext cx="3153960" cy="483840"/>
           </a:xfrm>
           <a:prstGeom prst="rect">
             <a:avLst/>
@@ -25527,7 +25721,7 @@
         <p:spPr>
           <a:xfrm>
             <a:off x="9390960" y="3154680"/>
-            <a:ext cx="3026160" cy="447840"/>
+            <a:ext cx="3025800" cy="447480"/>
           </a:xfrm>
           <a:prstGeom prst="rect">
             <a:avLst/>
@@ -25588,7 +25782,7 @@
         <p:spPr>
           <a:xfrm>
             <a:off x="548640" y="3620880"/>
-            <a:ext cx="685440" cy="484200"/>
+            <a:ext cx="685080" cy="483840"/>
           </a:xfrm>
           <a:prstGeom prst="rect">
             <a:avLst/>
@@ -25634,7 +25828,7 @@
         <p:spPr>
           <a:xfrm>
             <a:off x="612720" y="3639240"/>
-            <a:ext cx="557280" cy="447840"/>
+            <a:ext cx="556920" cy="447480"/>
           </a:xfrm>
           <a:prstGeom prst="rect">
             <a:avLst/>
@@ -25695,7 +25889,7 @@
         <p:spPr>
           <a:xfrm>
             <a:off x="1234440" y="3620880"/>
-            <a:ext cx="1508400" cy="484200"/>
+            <a:ext cx="1508040" cy="483840"/>
           </a:xfrm>
           <a:prstGeom prst="rect">
             <a:avLst/>
@@ -25741,7 +25935,7 @@
         <p:spPr>
           <a:xfrm>
             <a:off x="1298520" y="3639240"/>
-            <a:ext cx="1380240" cy="447840"/>
+            <a:ext cx="1379880" cy="447480"/>
           </a:xfrm>
           <a:prstGeom prst="rect">
             <a:avLst/>
@@ -25802,7 +25996,7 @@
         <p:spPr>
           <a:xfrm>
             <a:off x="2743200" y="3620880"/>
-            <a:ext cx="4754520" cy="484200"/>
+            <a:ext cx="4754160" cy="483840"/>
           </a:xfrm>
           <a:prstGeom prst="rect">
             <a:avLst/>
@@ -25848,7 +26042,7 @@
         <p:spPr>
           <a:xfrm>
             <a:off x="2807280" y="3639240"/>
-            <a:ext cx="4626360" cy="447840"/>
+            <a:ext cx="4626000" cy="447480"/>
           </a:xfrm>
           <a:prstGeom prst="rect">
             <a:avLst/>
@@ -25909,7 +26103,7 @@
         <p:spPr>
           <a:xfrm>
             <a:off x="7498080" y="3620880"/>
-            <a:ext cx="1828440" cy="484200"/>
+            <a:ext cx="1828080" cy="483840"/>
           </a:xfrm>
           <a:prstGeom prst="rect">
             <a:avLst/>
@@ -25955,7 +26149,7 @@
         <p:spPr>
           <a:xfrm>
             <a:off x="7562160" y="3639240"/>
-            <a:ext cx="1700280" cy="447840"/>
+            <a:ext cx="1699920" cy="447480"/>
           </a:xfrm>
           <a:prstGeom prst="rect">
             <a:avLst/>
@@ -26028,7 +26222,7 @@
         <p:spPr>
           <a:xfrm>
             <a:off x="9326880" y="3620880"/>
-            <a:ext cx="3154320" cy="484200"/>
+            <a:ext cx="3153960" cy="483840"/>
           </a:xfrm>
           <a:prstGeom prst="rect">
             <a:avLst/>
@@ -26074,7 +26268,7 @@
         <p:spPr>
           <a:xfrm>
             <a:off x="9390960" y="3639240"/>
-            <a:ext cx="3026160" cy="447840"/>
+            <a:ext cx="3025800" cy="447480"/>
           </a:xfrm>
           <a:prstGeom prst="rect">
             <a:avLst/>
@@ -26135,7 +26329,7 @@
         <p:spPr>
           <a:xfrm>
             <a:off x="548640" y="4105800"/>
-            <a:ext cx="685440" cy="484200"/>
+            <a:ext cx="685080" cy="483840"/>
           </a:xfrm>
           <a:prstGeom prst="rect">
             <a:avLst/>
@@ -26181,7 +26375,7 @@
         <p:spPr>
           <a:xfrm>
             <a:off x="612720" y="4123800"/>
-            <a:ext cx="557280" cy="447840"/>
+            <a:ext cx="556920" cy="447480"/>
           </a:xfrm>
           <a:prstGeom prst="rect">
             <a:avLst/>
@@ -26242,7 +26436,7 @@
         <p:spPr>
           <a:xfrm>
             <a:off x="1234440" y="4105800"/>
-            <a:ext cx="1508400" cy="484200"/>
+            <a:ext cx="1508040" cy="483840"/>
           </a:xfrm>
           <a:prstGeom prst="rect">
             <a:avLst/>
@@ -26288,7 +26482,7 @@
         <p:spPr>
           <a:xfrm>
             <a:off x="1298520" y="4123800"/>
-            <a:ext cx="1380240" cy="447840"/>
+            <a:ext cx="1379880" cy="447480"/>
           </a:xfrm>
           <a:prstGeom prst="rect">
             <a:avLst/>
@@ -26349,7 +26543,7 @@
         <p:spPr>
           <a:xfrm>
             <a:off x="2743200" y="4105800"/>
-            <a:ext cx="4754520" cy="484200"/>
+            <a:ext cx="4754160" cy="483840"/>
           </a:xfrm>
           <a:prstGeom prst="rect">
             <a:avLst/>
@@ -26395,7 +26589,7 @@
         <p:spPr>
           <a:xfrm>
             <a:off x="2807280" y="4123800"/>
-            <a:ext cx="4626360" cy="447840"/>
+            <a:ext cx="4626000" cy="447480"/>
           </a:xfrm>
           <a:prstGeom prst="rect">
             <a:avLst/>
@@ -26456,7 +26650,7 @@
         <p:spPr>
           <a:xfrm>
             <a:off x="7498080" y="4105800"/>
-            <a:ext cx="1828440" cy="484200"/>
+            <a:ext cx="1828080" cy="483840"/>
           </a:xfrm>
           <a:prstGeom prst="rect">
             <a:avLst/>
@@ -26502,7 +26696,7 @@
         <p:spPr>
           <a:xfrm>
             <a:off x="7562160" y="4123800"/>
-            <a:ext cx="1700280" cy="447840"/>
+            <a:ext cx="1699920" cy="447480"/>
           </a:xfrm>
           <a:prstGeom prst="rect">
             <a:avLst/>
@@ -26575,7 +26769,7 @@
         <p:spPr>
           <a:xfrm>
             <a:off x="9326880" y="4105800"/>
-            <a:ext cx="3154320" cy="484200"/>
+            <a:ext cx="3153960" cy="483840"/>
           </a:xfrm>
           <a:prstGeom prst="rect">
             <a:avLst/>
@@ -26621,7 +26815,7 @@
         <p:spPr>
           <a:xfrm>
             <a:off x="9390960" y="4123800"/>
-            <a:ext cx="3026160" cy="447840"/>
+            <a:ext cx="3025800" cy="447480"/>
           </a:xfrm>
           <a:prstGeom prst="rect">
             <a:avLst/>
@@ -26682,7 +26876,7 @@
         <p:spPr>
           <a:xfrm>
             <a:off x="567000" y="5074920"/>
-            <a:ext cx="3657240" cy="804240"/>
+            <a:ext cx="3656880" cy="803880"/>
           </a:xfrm>
           <a:prstGeom prst="roundRect">
             <a:avLst>
@@ -26730,7 +26924,7 @@
         <p:spPr>
           <a:xfrm>
             <a:off x="731520" y="5166360"/>
-            <a:ext cx="3328200" cy="273960"/>
+            <a:ext cx="3327840" cy="273600"/>
           </a:xfrm>
           <a:prstGeom prst="rect">
             <a:avLst/>
@@ -26748,7 +26942,7 @@
         </p:style>
         <p:txBody>
           <a:bodyPr lIns="0" tIns="0" rIns="0" bIns="0" anchor="ctr">
-            <a:normAutofit/>
+            <a:normAutofit lnSpcReduction="9999"/>
           </a:bodyPr>
           <a:p>
             <a:pPr defTabSz="914400">
@@ -26791,7 +26985,7 @@
         <p:spPr>
           <a:xfrm>
             <a:off x="731520" y="5495400"/>
-            <a:ext cx="3328200" cy="292320"/>
+            <a:ext cx="3327840" cy="291960"/>
           </a:xfrm>
           <a:prstGeom prst="rect">
             <a:avLst/>
@@ -26852,7 +27046,7 @@
         <p:spPr>
           <a:xfrm>
             <a:off x="4407480" y="5074920"/>
-            <a:ext cx="2925720" cy="804240"/>
+            <a:ext cx="2925360" cy="803880"/>
           </a:xfrm>
           <a:prstGeom prst="roundRect">
             <a:avLst>
@@ -26900,7 +27094,7 @@
         <p:spPr>
           <a:xfrm>
             <a:off x="4572000" y="5166360"/>
-            <a:ext cx="2596680" cy="273960"/>
+            <a:ext cx="2596320" cy="273600"/>
           </a:xfrm>
           <a:prstGeom prst="rect">
             <a:avLst/>
@@ -26918,7 +27112,7 @@
         </p:style>
         <p:txBody>
           <a:bodyPr lIns="0" tIns="0" rIns="0" bIns="0" anchor="ctr">
-            <a:normAutofit/>
+            <a:normAutofit lnSpcReduction="9999"/>
           </a:bodyPr>
           <a:p>
             <a:pPr defTabSz="914400">
@@ -26961,7 +27155,7 @@
         <p:spPr>
           <a:xfrm>
             <a:off x="4572000" y="5495400"/>
-            <a:ext cx="2596680" cy="292320"/>
+            <a:ext cx="2596320" cy="291960"/>
           </a:xfrm>
           <a:prstGeom prst="rect">
             <a:avLst/>
@@ -27022,7 +27216,7 @@
         <p:spPr>
           <a:xfrm>
             <a:off x="7498080" y="5074920"/>
-            <a:ext cx="4068720" cy="804240"/>
+            <a:ext cx="4068360" cy="803880"/>
           </a:xfrm>
           <a:prstGeom prst="roundRect">
             <a:avLst>
@@ -27070,7 +27264,7 @@
         <p:spPr>
           <a:xfrm>
             <a:off x="7662600" y="5166360"/>
-            <a:ext cx="3739680" cy="273960"/>
+            <a:ext cx="3739320" cy="273600"/>
           </a:xfrm>
           <a:prstGeom prst="rect">
             <a:avLst/>
@@ -27088,7 +27282,7 @@
         </p:style>
         <p:txBody>
           <a:bodyPr lIns="0" tIns="0" rIns="0" bIns="0" anchor="ctr">
-            <a:normAutofit/>
+            <a:normAutofit lnSpcReduction="9999"/>
           </a:bodyPr>
           <a:p>
             <a:pPr defTabSz="914400">
@@ -27131,7 +27325,7 @@
         <p:spPr>
           <a:xfrm>
             <a:off x="7662600" y="5495400"/>
-            <a:ext cx="3739680" cy="292320"/>
+            <a:ext cx="3739320" cy="291960"/>
           </a:xfrm>
           <a:prstGeom prst="rect">
             <a:avLst/>
@@ -27220,7 +27414,7 @@
         <p:spPr>
           <a:xfrm>
             <a:off x="11475720" y="6510600"/>
-            <a:ext cx="799560" cy="299520"/>
+            <a:ext cx="799200" cy="299160"/>
           </a:xfrm>
           <a:prstGeom prst="rect">
             <a:avLst/>
@@ -27240,6 +27434,9 @@
                 <a:spcPct val="100000"/>
               </a:lnSpc>
               <a:buNone/>
+              <a:tabLst>
+                <a:tab pos="0" algn="l"/>
+              </a:tabLst>
               <a:defRPr lang="en-US" sz="1200" b="0" u="none" strike="noStrike">
                 <a:solidFill>
                   <a:srgbClr val="667085"/>
@@ -27257,8 +27454,11 @@
                 <a:spcPct val="100000"/>
               </a:lnSpc>
               <a:buNone/>
+              <a:tabLst>
+                <a:tab pos="0" algn="l"/>
+              </a:tabLst>
             </a:pPr>
-            <a:fld id="{5539BBD6-4435-4473-B67B-BF314946F1E1}" type="slidenum">
+            <a:fld id="{5E6692EB-BB5D-458B-B73D-72F99AE8C8FF}" type="slidenum">
               <a:rPr lang="en-US" sz="1200" b="0" u="none" strike="noStrike">
                 <a:solidFill>
                   <a:srgbClr val="667085"/>
@@ -27320,7 +27520,7 @@
         <p:spPr>
           <a:xfrm>
             <a:off x="530280" y="329040"/>
-            <a:ext cx="10972440" cy="438480"/>
+            <a:ext cx="10972080" cy="438120"/>
           </a:xfrm>
           <a:prstGeom prst="rect">
             <a:avLst/>
@@ -27377,7 +27577,7 @@
         <p:spPr>
           <a:xfrm>
             <a:off x="548640" y="841320"/>
-            <a:ext cx="10972440" cy="310680"/>
+            <a:ext cx="10972080" cy="310320"/>
           </a:xfrm>
           <a:prstGeom prst="rect">
             <a:avLst/>
@@ -27438,7 +27638,7 @@
         <p:spPr>
           <a:xfrm>
             <a:off x="567000" y="1234440"/>
-            <a:ext cx="5394600" cy="1142640"/>
+            <a:ext cx="5394240" cy="1142280"/>
           </a:xfrm>
           <a:prstGeom prst="roundRect">
             <a:avLst>
@@ -27486,7 +27686,7 @@
         <p:spPr>
           <a:xfrm>
             <a:off x="731520" y="1325880"/>
-            <a:ext cx="5065560" cy="273960"/>
+            <a:ext cx="5065200" cy="273600"/>
           </a:xfrm>
           <a:prstGeom prst="rect">
             <a:avLst/>
@@ -27504,7 +27704,7 @@
         </p:style>
         <p:txBody>
           <a:bodyPr lIns="0" tIns="0" rIns="0" bIns="0" anchor="ctr">
-            <a:normAutofit/>
+            <a:normAutofit lnSpcReduction="9999"/>
           </a:bodyPr>
           <a:p>
             <a:pPr defTabSz="914400">
@@ -27547,7 +27747,7 @@
         <p:spPr>
           <a:xfrm>
             <a:off x="731520" y="1654920"/>
-            <a:ext cx="5065560" cy="630720"/>
+            <a:ext cx="5065200" cy="630360"/>
           </a:xfrm>
           <a:prstGeom prst="rect">
             <a:avLst/>
@@ -27668,7 +27868,7 @@
         <p:spPr>
           <a:xfrm>
             <a:off x="6199560" y="1234440"/>
-            <a:ext cx="5394600" cy="1142640"/>
+            <a:ext cx="5394240" cy="1142280"/>
           </a:xfrm>
           <a:prstGeom prst="roundRect">
             <a:avLst>
@@ -27716,7 +27916,7 @@
         <p:spPr>
           <a:xfrm>
             <a:off x="6364080" y="1325880"/>
-            <a:ext cx="5065560" cy="273960"/>
+            <a:ext cx="5065200" cy="273600"/>
           </a:xfrm>
           <a:prstGeom prst="rect">
             <a:avLst/>
@@ -27734,6 +27934,183 @@
         </p:style>
         <p:txBody>
           <a:bodyPr lIns="0" tIns="0" rIns="0" bIns="0" anchor="ctr">
+            <a:normAutofit fontScale="70000" lnSpcReduction="19999"/>
+          </a:bodyPr>
+          <a:p>
+            <a:pPr>
+              <a:lnSpc>
+                <a:spcPct val="100000"/>
+              </a:lnSpc>
+              <a:spcAft>
+                <a:spcPts val="201"/>
+              </a:spcAft>
+            </a:pPr>
+            <a:r>
+              <a:rPr lang="en-US" sz="1100" b="0" u="none" strike="noStrike">
+                <a:solidFill>
+                  <a:srgbClr val="000000"/>
+                </a:solidFill>
+                <a:effectLst/>
+                <a:uFillTx/>
+                <a:latin typeface="TH Sarabun New"/>
+              </a:rPr>
+              <a:t>Invariant</a:t>
+            </a:r>
+            <a:endParaRPr lang="en-US" sz="1100" b="0" u="none" strike="noStrike">
+              <a:solidFill>
+                <a:srgbClr val="000000"/>
+              </a:solidFill>
+              <a:effectLst/>
+              <a:uFillTx/>
+              <a:latin typeface="Arial"/>
+            </a:endParaRPr>
+          </a:p>
+          <a:p>
+            <a:pPr>
+              <a:lnSpc>
+                <a:spcPct val="100000"/>
+              </a:lnSpc>
+              <a:spcAft>
+                <a:spcPts val="201"/>
+              </a:spcAft>
+            </a:pPr>
+            <a:r>
+              <a:rPr lang="hi-IN" sz="1100" b="0" u="none" strike="noStrike">
+                <a:solidFill>
+                  <a:srgbClr val="000000"/>
+                </a:solidFill>
+                <a:effectLst/>
+                <a:uFillTx/>
+                <a:latin typeface="TH Sarabun New"/>
+              </a:rPr>
+              <a:t>ระหว่างสแกน </a:t>
+            </a:r>
+            <a:r>
+              <a:rPr lang="en-US" sz="1100" b="0" u="none" strike="noStrike">
+                <a:solidFill>
+                  <a:srgbClr val="000000"/>
+                </a:solidFill>
+                <a:effectLst/>
+                <a:uFillTx/>
+                <a:latin typeface="TH Sarabun New"/>
+              </a:rPr>
+              <a:t>Operator Stack </a:t>
+            </a:r>
+            <a:r>
+              <a:rPr lang="hi-IN" sz="1100" b="0" u="none" strike="noStrike">
+                <a:solidFill>
+                  <a:srgbClr val="000000"/>
+                </a:solidFill>
+                <a:effectLst/>
+                <a:uFillTx/>
+                <a:latin typeface="TH Sarabun New"/>
+              </a:rPr>
+              <a:t>รักษาลำดับ </a:t>
+            </a:r>
+            <a:r>
+              <a:rPr lang="en-US" sz="1100" b="0" u="none" strike="noStrike">
+                <a:solidFill>
+                  <a:srgbClr val="000000"/>
+                </a:solidFill>
+                <a:effectLst/>
+                <a:uFillTx/>
+                <a:latin typeface="TH Sarabun New"/>
+              </a:rPr>
+              <a:t>Priority </a:t>
+            </a:r>
+            <a:r>
+              <a:rPr lang="hi-IN" sz="1100" b="0" u="none" strike="noStrike">
+                <a:solidFill>
+                  <a:srgbClr val="000000"/>
+                </a:solidFill>
+                <a:effectLst/>
+                <a:uFillTx/>
+                <a:latin typeface="TH Sarabun New"/>
+              </a:rPr>
+              <a:t>ภายในระดับวงเล็บ และ </a:t>
+            </a:r>
+            <a:r>
+              <a:rPr lang="en-US" sz="1100" b="0" u="none" strike="noStrike">
+                <a:solidFill>
+                  <a:srgbClr val="000000"/>
+                </a:solidFill>
+                <a:effectLst/>
+                <a:uFillTx/>
+                <a:latin typeface="TH Sarabun New"/>
+              </a:rPr>
+              <a:t>Postfix </a:t>
+            </a:r>
+            <a:r>
+              <a:rPr lang="hi-IN" sz="1100" b="0" u="none" strike="noStrike">
+                <a:solidFill>
+                  <a:srgbClr val="000000"/>
+                </a:solidFill>
+                <a:effectLst/>
+                <a:uFillTx/>
+                <a:latin typeface="TH Sarabun New"/>
+              </a:rPr>
+              <a:t>ที่สะสมแล้วถูกต้องสำหรับ </a:t>
+            </a:r>
+            <a:r>
+              <a:rPr lang="en-US" sz="1100" b="0" u="none" strike="noStrike">
+                <a:solidFill>
+                  <a:srgbClr val="000000"/>
+                </a:solidFill>
+                <a:effectLst/>
+                <a:uFillTx/>
+                <a:latin typeface="TH Sarabun New"/>
+              </a:rPr>
+              <a:t>Token </a:t>
+            </a:r>
+            <a:r>
+              <a:rPr lang="hi-IN" sz="1100" b="0" u="none" strike="noStrike">
+                <a:solidFill>
+                  <a:srgbClr val="000000"/>
+                </a:solidFill>
+                <a:effectLst/>
+                <a:uFillTx/>
+                <a:latin typeface="TH Sarabun New"/>
+              </a:rPr>
+              <a:t>ที่อ่านมาแล้ว</a:t>
+            </a:r>
+            <a:endParaRPr lang="en-US" sz="1100" b="0" u="none" strike="noStrike">
+              <a:solidFill>
+                <a:srgbClr val="000000"/>
+              </a:solidFill>
+              <a:effectLst/>
+              <a:uFillTx/>
+              <a:latin typeface="Arial"/>
+            </a:endParaRPr>
+          </a:p>
+        </p:txBody>
+      </p:sp>
+      <p:sp>
+        <p:nvSpPr>
+          <p:cNvPr id="212" name="Text 7"/>
+          <p:cNvSpPr/>
+          <p:nvPr/>
+        </p:nvSpPr>
+        <p:spPr>
+          <a:xfrm>
+            <a:off x="6364080" y="1654920"/>
+            <a:ext cx="5065200" cy="630360"/>
+          </a:xfrm>
+          <a:prstGeom prst="rect">
+            <a:avLst/>
+          </a:prstGeom>
+          <a:noFill/>
+          <a:ln w="0">
+            <a:noFill/>
+          </a:ln>
+        </p:spPr>
+        <p:style>
+          <a:lnRef idx="0"/>
+          <a:fillRef idx="0"/>
+          <a:effectRef idx="0"/>
+          <a:fontRef idx="minor"/>
+        </p:style>
+        <p:txBody>
+          <a:bodyPr lIns="0" tIns="0" rIns="0" bIns="0" anchor="t">
             <a:normAutofit/>
           </a:bodyPr>
           <a:p>
@@ -27746,18 +28123,54 @@
               </a:tabLst>
             </a:pPr>
             <a:r>
-              <a:rPr lang="en-US" sz="1800" b="1" u="none" strike="noStrike">
-                <a:solidFill>
-                  <a:srgbClr val="2C4670"/>
+              <a:rPr lang="en-US" sz="1700" b="0" u="none" strike="noStrike">
+                <a:solidFill>
+                  <a:srgbClr val="22304A"/>
                 </a:solidFill>
                 <a:effectLst/>
                 <a:uFillTx/>
                 <a:latin typeface="TH Sarabun New"/>
                 <a:ea typeface="TH Sarabun New"/>
               </a:rPr>
-              <a:t>Invariant</a:t>
-            </a:r>
-            <a:endParaRPr lang="en-US" sz="1800" b="0" u="none" strike="noStrike">
+              <a:t>Token </a:t>
+            </a:r>
+            <a:r>
+              <a:rPr lang="hi-IN" sz="1700" b="0" u="none" strike="noStrike">
+                <a:solidFill>
+                  <a:srgbClr val="22304A"/>
+                </a:solidFill>
+                <a:effectLst/>
+                <a:uFillTx/>
+                <a:latin typeface="TH Sarabun New"/>
+                <a:cs typeface="TH Sarabun New"/>
+              </a:rPr>
+              <a:t>ที่อ่านแล้วถูกเก็บใน </a:t>
+            </a:r>
+            <a:r>
+              <a:rPr lang="en-US" sz="1700" b="0" u="none" strike="noStrike">
+                <a:solidFill>
+                  <a:srgbClr val="22304A"/>
+                </a:solidFill>
+                <a:effectLst/>
+                <a:uFillTx/>
+                <a:latin typeface="TH Sarabun New"/>
+                <a:ea typeface="TH Sarabun New"/>
+              </a:rPr>
+              <a:t>Output/Stack </a:t>
+            </a:r>
+            <a:r>
+              <a:rPr lang="hi-IN" sz="1700" b="0" u="none" strike="noStrike">
+                <a:solidFill>
+                  <a:srgbClr val="22304A"/>
+                </a:solidFill>
+                <a:effectLst/>
+                <a:uFillTx/>
+                <a:latin typeface="TH Sarabun New"/>
+                <a:cs typeface="TH Sarabun New"/>
+              </a:rPr>
+              <a:t>โดยไม่ทำให้ลำดับความหมายของนิพจน์เสีย</a:t>
+            </a:r>
+            <a:endParaRPr lang="en-US" sz="1700" b="0" u="none" strike="noStrike">
               <a:solidFill>
                 <a:srgbClr val="000000"/>
               </a:solidFill>
@@ -27770,103 +28183,6 @@
       </p:sp>
       <p:sp>
         <p:nvSpPr>
-          <p:cNvPr id="212" name="Text 7"/>
-          <p:cNvSpPr/>
-          <p:nvPr/>
-        </p:nvSpPr>
-        <p:spPr>
-          <a:xfrm>
-            <a:off x="6364080" y="1654920"/>
-            <a:ext cx="5065560" cy="630720"/>
-          </a:xfrm>
-          <a:prstGeom prst="rect">
-            <a:avLst/>
-          </a:prstGeom>
-          <a:noFill/>
-          <a:ln w="0">
-            <a:noFill/>
-          </a:ln>
-        </p:spPr>
-        <p:style>
-          <a:lnRef idx="0"/>
-          <a:fillRef idx="0"/>
-          <a:effectRef idx="0"/>
-          <a:fontRef idx="minor"/>
-        </p:style>
-        <p:txBody>
-          <a:bodyPr lIns="0" tIns="0" rIns="0" bIns="0" anchor="t">
-            <a:normAutofit/>
-          </a:bodyPr>
-          <a:p>
-            <a:pPr defTabSz="914400">
-              <a:lnSpc>
-                <a:spcPct val="100000"/>
-              </a:lnSpc>
-              <a:tabLst>
-                <a:tab pos="0" algn="l"/>
-              </a:tabLst>
-            </a:pPr>
-            <a:r>
-              <a:rPr lang="en-US" sz="1700" b="0" u="none" strike="noStrike">
-                <a:solidFill>
-                  <a:srgbClr val="22304A"/>
-                </a:solidFill>
-                <a:effectLst/>
-                <a:uFillTx/>
-                <a:latin typeface="TH Sarabun New"/>
-                <a:ea typeface="TH Sarabun New"/>
-              </a:rPr>
-              <a:t>Token </a:t>
-            </a:r>
-            <a:r>
-              <a:rPr lang="hi-IN" sz="1700" b="0" u="none" strike="noStrike">
-                <a:solidFill>
-                  <a:srgbClr val="22304A"/>
-                </a:solidFill>
-                <a:effectLst/>
-                <a:uFillTx/>
-                <a:latin typeface="TH Sarabun New"/>
-                <a:cs typeface="TH Sarabun New"/>
-              </a:rPr>
-              <a:t>ที่อ่านแล้วถูกเก็บใน </a:t>
-            </a:r>
-            <a:r>
-              <a:rPr lang="en-US" sz="1700" b="0" u="none" strike="noStrike">
-                <a:solidFill>
-                  <a:srgbClr val="22304A"/>
-                </a:solidFill>
-                <a:effectLst/>
-                <a:uFillTx/>
-                <a:latin typeface="TH Sarabun New"/>
-                <a:ea typeface="TH Sarabun New"/>
-              </a:rPr>
-              <a:t>Output/Stack </a:t>
-            </a:r>
-            <a:r>
-              <a:rPr lang="hi-IN" sz="1700" b="0" u="none" strike="noStrike">
-                <a:solidFill>
-                  <a:srgbClr val="22304A"/>
-                </a:solidFill>
-                <a:effectLst/>
-                <a:uFillTx/>
-                <a:latin typeface="TH Sarabun New"/>
-                <a:cs typeface="TH Sarabun New"/>
-              </a:rPr>
-              <a:t>โดยไม่ทำให้ลำดับความหมายของนิพจน์เสีย</a:t>
-            </a:r>
-            <a:endParaRPr lang="en-US" sz="1700" b="0" u="none" strike="noStrike">
-              <a:solidFill>
-                <a:srgbClr val="000000"/>
-              </a:solidFill>
-              <a:effectLst/>
-              <a:uFillTx/>
-              <a:latin typeface="Arial"/>
-            </a:endParaRPr>
-          </a:p>
-        </p:txBody>
-      </p:sp>
-      <p:sp>
-        <p:nvSpPr>
           <p:cNvPr id="213" name="Shape 8"/>
           <p:cNvSpPr/>
           <p:nvPr/>
@@ -27874,7 +28190,7 @@
         <p:spPr>
           <a:xfrm>
             <a:off x="567000" y="2697480"/>
-            <a:ext cx="5394600" cy="1142640"/>
+            <a:ext cx="5394240" cy="1142280"/>
           </a:xfrm>
           <a:prstGeom prst="roundRect">
             <a:avLst>
@@ -27922,7 +28238,7 @@
         <p:spPr>
           <a:xfrm>
             <a:off x="731520" y="2788920"/>
-            <a:ext cx="5065560" cy="273960"/>
+            <a:ext cx="5065200" cy="273600"/>
           </a:xfrm>
           <a:prstGeom prst="rect">
             <a:avLst/>
@@ -27940,7 +28256,7 @@
         </p:style>
         <p:txBody>
           <a:bodyPr lIns="0" tIns="0" rIns="0" bIns="0" anchor="ctr">
-            <a:normAutofit/>
+            <a:normAutofit lnSpcReduction="9999"/>
           </a:bodyPr>
           <a:p>
             <a:pPr defTabSz="914400">
@@ -27983,7 +28299,7 @@
         <p:spPr>
           <a:xfrm>
             <a:off x="731520" y="3117960"/>
-            <a:ext cx="5065560" cy="630720"/>
+            <a:ext cx="5065200" cy="630360"/>
           </a:xfrm>
           <a:prstGeom prst="rect">
             <a:avLst/>
@@ -28104,7 +28420,7 @@
         <p:spPr>
           <a:xfrm>
             <a:off x="6199560" y="2697480"/>
-            <a:ext cx="5394600" cy="1142640"/>
+            <a:ext cx="5394240" cy="1142280"/>
           </a:xfrm>
           <a:prstGeom prst="roundRect">
             <a:avLst>
@@ -28152,7 +28468,7 @@
         <p:spPr>
           <a:xfrm>
             <a:off x="6364080" y="2788920"/>
-            <a:ext cx="5065560" cy="273960"/>
+            <a:ext cx="5065200" cy="273600"/>
           </a:xfrm>
           <a:prstGeom prst="rect">
             <a:avLst/>
@@ -28170,7 +28486,7 @@
         </p:style>
         <p:txBody>
           <a:bodyPr lIns="0" tIns="0" rIns="0" bIns="0" anchor="ctr">
-            <a:normAutofit/>
+            <a:normAutofit lnSpcReduction="9999"/>
           </a:bodyPr>
           <a:p>
             <a:pPr defTabSz="914400">
@@ -28213,7 +28529,7 @@
         <p:spPr>
           <a:xfrm>
             <a:off x="6364080" y="3117960"/>
-            <a:ext cx="5065560" cy="630720"/>
+            <a:ext cx="5065200" cy="630360"/>
           </a:xfrm>
           <a:prstGeom prst="rect">
             <a:avLst/>
@@ -28322,7 +28638,7 @@
         <p:spPr>
           <a:xfrm>
             <a:off x="594360" y="4160520"/>
-            <a:ext cx="2011320" cy="319680"/>
+            <a:ext cx="2010960" cy="319320"/>
           </a:xfrm>
           <a:prstGeom prst="rect">
             <a:avLst/>
@@ -28395,7 +28711,7 @@
         <p:spPr>
           <a:xfrm>
             <a:off x="567000" y="4572000"/>
-            <a:ext cx="2605680" cy="1078560"/>
+            <a:ext cx="2605320" cy="1078200"/>
           </a:xfrm>
           <a:prstGeom prst="roundRect">
             <a:avLst>
@@ -28443,7 +28759,7 @@
         <p:spPr>
           <a:xfrm>
             <a:off x="731520" y="4663440"/>
-            <a:ext cx="2276640" cy="273960"/>
+            <a:ext cx="2276280" cy="273600"/>
           </a:xfrm>
           <a:prstGeom prst="rect">
             <a:avLst/>
@@ -28461,7 +28777,7 @@
         </p:style>
         <p:txBody>
           <a:bodyPr lIns="0" tIns="0" rIns="0" bIns="0" anchor="ctr">
-            <a:normAutofit/>
+            <a:normAutofit lnSpcReduction="9999"/>
           </a:bodyPr>
           <a:p>
             <a:pPr defTabSz="914400">
@@ -28504,7 +28820,7 @@
         <p:spPr>
           <a:xfrm>
             <a:off x="731520" y="4992480"/>
-            <a:ext cx="2276640" cy="566640"/>
+            <a:ext cx="2276280" cy="566280"/>
           </a:xfrm>
           <a:prstGeom prst="rect">
             <a:avLst/>
@@ -28589,7 +28905,7 @@
         <p:spPr>
           <a:xfrm>
             <a:off x="3337560" y="4572000"/>
-            <a:ext cx="2605680" cy="1078560"/>
+            <a:ext cx="2605320" cy="1078200"/>
           </a:xfrm>
           <a:prstGeom prst="roundRect">
             <a:avLst>
@@ -28637,7 +28953,7 @@
         <p:spPr>
           <a:xfrm>
             <a:off x="3502080" y="4663440"/>
-            <a:ext cx="2276640" cy="273960"/>
+            <a:ext cx="2276280" cy="273600"/>
           </a:xfrm>
           <a:prstGeom prst="rect">
             <a:avLst/>
@@ -28655,7 +28971,7 @@
         </p:style>
         <p:txBody>
           <a:bodyPr lIns="0" tIns="0" rIns="0" bIns="0" anchor="ctr">
-            <a:normAutofit/>
+            <a:normAutofit lnSpcReduction="9999"/>
           </a:bodyPr>
           <a:p>
             <a:pPr defTabSz="914400">
@@ -28698,7 +29014,7 @@
         <p:spPr>
           <a:xfrm>
             <a:off x="3502080" y="4992480"/>
-            <a:ext cx="2276640" cy="566640"/>
+            <a:ext cx="2276280" cy="566280"/>
           </a:xfrm>
           <a:prstGeom prst="rect">
             <a:avLst/>
@@ -28759,7 +29075,7 @@
         <p:spPr>
           <a:xfrm>
             <a:off x="6099120" y="4572000"/>
-            <a:ext cx="2605680" cy="1078560"/>
+            <a:ext cx="2605320" cy="1078200"/>
           </a:xfrm>
           <a:prstGeom prst="roundRect">
             <a:avLst>
@@ -28807,7 +29123,7 @@
         <p:spPr>
           <a:xfrm>
             <a:off x="6263640" y="4663440"/>
-            <a:ext cx="2276640" cy="273960"/>
+            <a:ext cx="2276280" cy="273600"/>
           </a:xfrm>
           <a:prstGeom prst="rect">
             <a:avLst/>
@@ -28825,7 +29141,7 @@
         </p:style>
         <p:txBody>
           <a:bodyPr lIns="0" tIns="0" rIns="0" bIns="0" anchor="ctr">
-            <a:normAutofit/>
+            <a:normAutofit lnSpcReduction="9999"/>
           </a:bodyPr>
           <a:p>
             <a:pPr defTabSz="914400">
@@ -28868,7 +29184,7 @@
         <p:spPr>
           <a:xfrm>
             <a:off x="6263640" y="4992480"/>
-            <a:ext cx="2276640" cy="566640"/>
+            <a:ext cx="2276280" cy="566280"/>
           </a:xfrm>
           <a:prstGeom prst="rect">
             <a:avLst/>
@@ -28929,7 +29245,7 @@
         <p:spPr>
           <a:xfrm>
             <a:off x="8851320" y="4572000"/>
-            <a:ext cx="2605680" cy="1078560"/>
+            <a:ext cx="2605320" cy="1078200"/>
           </a:xfrm>
           <a:prstGeom prst="roundRect">
             <a:avLst>
@@ -28977,7 +29293,7 @@
         <p:spPr>
           <a:xfrm>
             <a:off x="9015840" y="4663440"/>
-            <a:ext cx="2276640" cy="273960"/>
+            <a:ext cx="2276280" cy="273600"/>
           </a:xfrm>
           <a:prstGeom prst="rect">
             <a:avLst/>
@@ -28995,7 +29311,7 @@
         </p:style>
         <p:txBody>
           <a:bodyPr lIns="0" tIns="0" rIns="0" bIns="0" anchor="ctr">
-            <a:normAutofit/>
+            <a:normAutofit lnSpcReduction="9999"/>
           </a:bodyPr>
           <a:p>
             <a:pPr defTabSz="914400">
@@ -29038,7 +29354,7 @@
         <p:spPr>
           <a:xfrm>
             <a:off x="9015840" y="4992480"/>
-            <a:ext cx="2276640" cy="566640"/>
+            <a:ext cx="2276280" cy="566280"/>
           </a:xfrm>
           <a:prstGeom prst="rect">
             <a:avLst/>
@@ -29103,7 +29419,7 @@
         <p:spPr>
           <a:xfrm>
             <a:off x="11475720" y="6510600"/>
-            <a:ext cx="799560" cy="299520"/>
+            <a:ext cx="799200" cy="299160"/>
           </a:xfrm>
           <a:prstGeom prst="rect">
             <a:avLst/>
@@ -29123,6 +29439,9 @@
                 <a:spcPct val="100000"/>
               </a:lnSpc>
               <a:buNone/>
+              <a:tabLst>
+                <a:tab pos="0" algn="l"/>
+              </a:tabLst>
               <a:defRPr lang="en-US" sz="1200" b="0" u="none" strike="noStrike">
                 <a:solidFill>
                   <a:srgbClr val="667085"/>
@@ -29140,8 +29459,11 @@
                 <a:spcPct val="100000"/>
               </a:lnSpc>
               <a:buNone/>
+              <a:tabLst>
+                <a:tab pos="0" algn="l"/>
+              </a:tabLst>
             </a:pPr>
-            <a:fld id="{FB6B354E-300C-4DE6-8191-5C74DE1D348A}" type="slidenum">
+            <a:fld id="{C339E4BD-44A3-4A72-8682-FE65265F00F2}" type="slidenum">
               <a:rPr lang="en-US" sz="1200" b="0" u="none" strike="noStrike">
                 <a:solidFill>
                   <a:srgbClr val="667085"/>
@@ -29203,7 +29525,7 @@
         <p:spPr>
           <a:xfrm>
             <a:off x="530280" y="329040"/>
-            <a:ext cx="10972440" cy="438480"/>
+            <a:ext cx="10972080" cy="438120"/>
           </a:xfrm>
           <a:prstGeom prst="rect">
             <a:avLst/>
@@ -29260,7 +29582,7 @@
         <p:spPr>
           <a:xfrm>
             <a:off x="548640" y="841320"/>
-            <a:ext cx="10972440" cy="310680"/>
+            <a:ext cx="10972080" cy="310320"/>
           </a:xfrm>
           <a:prstGeom prst="rect">
             <a:avLst/>
@@ -29333,7 +29655,7 @@
         <p:spPr>
           <a:xfrm>
             <a:off x="567000" y="1234440"/>
-            <a:ext cx="5394600" cy="1481040"/>
+            <a:ext cx="5394240" cy="1480680"/>
           </a:xfrm>
           <a:prstGeom prst="roundRect">
             <a:avLst>
@@ -29381,7 +29703,7 @@
         <p:spPr>
           <a:xfrm>
             <a:off x="731520" y="1325880"/>
-            <a:ext cx="5065560" cy="273960"/>
+            <a:ext cx="5065200" cy="273600"/>
           </a:xfrm>
           <a:prstGeom prst="rect">
             <a:avLst/>
@@ -29399,7 +29721,7 @@
         </p:style>
         <p:txBody>
           <a:bodyPr lIns="0" tIns="0" rIns="0" bIns="0" anchor="ctr">
-            <a:normAutofit/>
+            <a:normAutofit lnSpcReduction="9999"/>
           </a:bodyPr>
           <a:p>
             <a:pPr defTabSz="914400">
@@ -29442,7 +29764,7 @@
         <p:spPr>
           <a:xfrm>
             <a:off x="731520" y="1654920"/>
-            <a:ext cx="5065560" cy="968760"/>
+            <a:ext cx="5065200" cy="968400"/>
           </a:xfrm>
           <a:prstGeom prst="rect">
             <a:avLst/>
@@ -29629,7 +29951,7 @@
         <p:spPr>
           <a:xfrm>
             <a:off x="6199560" y="1234440"/>
-            <a:ext cx="5394600" cy="1481040"/>
+            <a:ext cx="5394240" cy="1480680"/>
           </a:xfrm>
           <a:prstGeom prst="roundRect">
             <a:avLst>
@@ -29677,7 +29999,7 @@
         <p:spPr>
           <a:xfrm>
             <a:off x="6364080" y="1325880"/>
-            <a:ext cx="5065560" cy="273960"/>
+            <a:ext cx="5065200" cy="273600"/>
           </a:xfrm>
           <a:prstGeom prst="rect">
             <a:avLst/>
@@ -29695,7 +30017,7 @@
         </p:style>
         <p:txBody>
           <a:bodyPr lIns="0" tIns="0" rIns="0" bIns="0" anchor="ctr">
-            <a:normAutofit/>
+            <a:normAutofit lnSpcReduction="9999"/>
           </a:bodyPr>
           <a:p>
             <a:pPr defTabSz="914400">
@@ -29738,7 +30060,7 @@
         <p:spPr>
           <a:xfrm>
             <a:off x="6364080" y="1654920"/>
-            <a:ext cx="5065560" cy="968760"/>
+            <a:ext cx="5065200" cy="968400"/>
           </a:xfrm>
           <a:prstGeom prst="rect">
             <a:avLst/>
@@ -29913,7 +30235,7 @@
         <p:spPr>
           <a:xfrm>
             <a:off x="567000" y="2999160"/>
-            <a:ext cx="5394600" cy="1481040"/>
+            <a:ext cx="5394240" cy="1480680"/>
           </a:xfrm>
           <a:prstGeom prst="roundRect">
             <a:avLst>
@@ -29961,7 +30283,7 @@
         <p:spPr>
           <a:xfrm>
             <a:off x="731520" y="3090600"/>
-            <a:ext cx="5065560" cy="273960"/>
+            <a:ext cx="5065200" cy="273600"/>
           </a:xfrm>
           <a:prstGeom prst="rect">
             <a:avLst/>
@@ -29979,7 +30301,7 @@
         </p:style>
         <p:txBody>
           <a:bodyPr lIns="0" tIns="0" rIns="0" bIns="0" anchor="ctr">
-            <a:normAutofit/>
+            <a:normAutofit lnSpcReduction="9999"/>
           </a:bodyPr>
           <a:p>
             <a:pPr defTabSz="914400">
@@ -30058,7 +30380,7 @@
         <p:spPr>
           <a:xfrm>
             <a:off x="731520" y="3420000"/>
-            <a:ext cx="5065560" cy="968760"/>
+            <a:ext cx="5065200" cy="968400"/>
           </a:xfrm>
           <a:prstGeom prst="rect">
             <a:avLst/>
@@ -30269,7 +30591,7 @@
         <p:spPr>
           <a:xfrm>
             <a:off x="6199560" y="2999160"/>
-            <a:ext cx="5394600" cy="1481040"/>
+            <a:ext cx="5394240" cy="1480680"/>
           </a:xfrm>
           <a:prstGeom prst="roundRect">
             <a:avLst>
@@ -30317,7 +30639,7 @@
         <p:spPr>
           <a:xfrm>
             <a:off x="6364080" y="3090600"/>
-            <a:ext cx="5065560" cy="273960"/>
+            <a:ext cx="5065200" cy="273600"/>
           </a:xfrm>
           <a:prstGeom prst="rect">
             <a:avLst/>
@@ -30335,7 +30657,7 @@
         </p:style>
         <p:txBody>
           <a:bodyPr lIns="0" tIns="0" rIns="0" bIns="0" anchor="ctr">
-            <a:normAutofit/>
+            <a:normAutofit lnSpcReduction="9999"/>
           </a:bodyPr>
           <a:p>
             <a:pPr defTabSz="914400">
@@ -30378,7 +30700,7 @@
         <p:spPr>
           <a:xfrm>
             <a:off x="6364080" y="3420000"/>
-            <a:ext cx="5065560" cy="968760"/>
+            <a:ext cx="5065200" cy="968400"/>
           </a:xfrm>
           <a:prstGeom prst="rect">
             <a:avLst/>
@@ -30505,7 +30827,7 @@
         <p:spPr>
           <a:xfrm>
             <a:off x="567000" y="4507920"/>
-            <a:ext cx="2559960" cy="438480"/>
+            <a:ext cx="2559600" cy="438120"/>
           </a:xfrm>
           <a:prstGeom prst="rect">
             <a:avLst/>
@@ -30551,7 +30873,7 @@
         <p:spPr>
           <a:xfrm>
             <a:off x="640080" y="4526280"/>
-            <a:ext cx="2413800" cy="402120"/>
+            <a:ext cx="2413440" cy="401760"/>
           </a:xfrm>
           <a:prstGeom prst="rect">
             <a:avLst/>
@@ -30612,7 +30934,7 @@
         <p:spPr>
           <a:xfrm>
             <a:off x="3127320" y="4507920"/>
-            <a:ext cx="2559960" cy="438480"/>
+            <a:ext cx="2559600" cy="438120"/>
           </a:xfrm>
           <a:prstGeom prst="rect">
             <a:avLst/>
@@ -30658,7 +30980,7 @@
         <p:spPr>
           <a:xfrm>
             <a:off x="3200400" y="4526280"/>
-            <a:ext cx="2413800" cy="402120"/>
+            <a:ext cx="2413440" cy="401760"/>
           </a:xfrm>
           <a:prstGeom prst="rect">
             <a:avLst/>
@@ -30719,7 +31041,7 @@
         <p:spPr>
           <a:xfrm>
             <a:off x="5687640" y="4507920"/>
-            <a:ext cx="2559960" cy="438480"/>
+            <a:ext cx="2559600" cy="438120"/>
           </a:xfrm>
           <a:prstGeom prst="rect">
             <a:avLst/>
@@ -30765,7 +31087,7 @@
         <p:spPr>
           <a:xfrm>
             <a:off x="5760720" y="4526280"/>
-            <a:ext cx="2413800" cy="402120"/>
+            <a:ext cx="2413440" cy="401760"/>
           </a:xfrm>
           <a:prstGeom prst="rect">
             <a:avLst/>
@@ -30826,7 +31148,7 @@
         <p:spPr>
           <a:xfrm>
             <a:off x="8247960" y="4507920"/>
-            <a:ext cx="2925720" cy="438480"/>
+            <a:ext cx="2925360" cy="438120"/>
           </a:xfrm>
           <a:prstGeom prst="rect">
             <a:avLst/>
@@ -30872,7 +31194,7 @@
         <p:spPr>
           <a:xfrm>
             <a:off x="8321040" y="4526280"/>
-            <a:ext cx="2779560" cy="402120"/>
+            <a:ext cx="2779200" cy="401760"/>
           </a:xfrm>
           <a:prstGeom prst="rect">
             <a:avLst/>
@@ -30933,7 +31255,7 @@
         <p:spPr>
           <a:xfrm>
             <a:off x="567000" y="4946760"/>
-            <a:ext cx="2559960" cy="493560"/>
+            <a:ext cx="2559600" cy="493200"/>
           </a:xfrm>
           <a:prstGeom prst="rect">
             <a:avLst/>
@@ -30979,7 +31301,7 @@
         <p:spPr>
           <a:xfrm>
             <a:off x="631080" y="4965120"/>
-            <a:ext cx="2431800" cy="456840"/>
+            <a:ext cx="2431440" cy="456480"/>
           </a:xfrm>
           <a:prstGeom prst="rect">
             <a:avLst/>
@@ -31040,7 +31362,7 @@
         <p:spPr>
           <a:xfrm>
             <a:off x="3127320" y="4946760"/>
-            <a:ext cx="2559960" cy="493560"/>
+            <a:ext cx="2559600" cy="493200"/>
           </a:xfrm>
           <a:prstGeom prst="rect">
             <a:avLst/>
@@ -31086,7 +31408,7 @@
         <p:spPr>
           <a:xfrm>
             <a:off x="3191400" y="4965120"/>
-            <a:ext cx="2431800" cy="456840"/>
+            <a:ext cx="2431440" cy="456480"/>
           </a:xfrm>
           <a:prstGeom prst="rect">
             <a:avLst/>
@@ -31143,7 +31465,7 @@
         <p:spPr>
           <a:xfrm>
             <a:off x="5687640" y="4946760"/>
-            <a:ext cx="2559960" cy="493560"/>
+            <a:ext cx="2559600" cy="493200"/>
           </a:xfrm>
           <a:prstGeom prst="rect">
             <a:avLst/>
@@ -31189,7 +31511,7 @@
         <p:spPr>
           <a:xfrm>
             <a:off x="5751720" y="4965120"/>
-            <a:ext cx="2431800" cy="456840"/>
+            <a:ext cx="2431440" cy="456480"/>
           </a:xfrm>
           <a:prstGeom prst="rect">
             <a:avLst/>
@@ -31246,7 +31568,7 @@
         <p:spPr>
           <a:xfrm>
             <a:off x="8247960" y="4946760"/>
-            <a:ext cx="2925720" cy="493560"/>
+            <a:ext cx="2925360" cy="493200"/>
           </a:xfrm>
           <a:prstGeom prst="rect">
             <a:avLst/>
@@ -31292,7 +31614,7 @@
         <p:spPr>
           <a:xfrm>
             <a:off x="8312040" y="4965120"/>
-            <a:ext cx="2797560" cy="456840"/>
+            <a:ext cx="2797200" cy="456480"/>
           </a:xfrm>
           <a:prstGeom prst="rect">
             <a:avLst/>
@@ -31382,7 +31704,7 @@
         <p:spPr>
           <a:xfrm>
             <a:off x="567000" y="5440680"/>
-            <a:ext cx="2559960" cy="493560"/>
+            <a:ext cx="2559600" cy="493200"/>
           </a:xfrm>
           <a:prstGeom prst="rect">
             <a:avLst/>
@@ -31428,7 +31750,7 @@
         <p:spPr>
           <a:xfrm>
             <a:off x="631080" y="5459040"/>
-            <a:ext cx="2431800" cy="456840"/>
+            <a:ext cx="2431440" cy="456480"/>
           </a:xfrm>
           <a:prstGeom prst="rect">
             <a:avLst/>
@@ -31489,7 +31811,7 @@
         <p:spPr>
           <a:xfrm>
             <a:off x="3127320" y="5440680"/>
-            <a:ext cx="2559960" cy="493560"/>
+            <a:ext cx="2559600" cy="493200"/>
           </a:xfrm>
           <a:prstGeom prst="rect">
             <a:avLst/>
@@ -31535,7 +31857,7 @@
         <p:spPr>
           <a:xfrm>
             <a:off x="3191400" y="5459040"/>
-            <a:ext cx="2431800" cy="456840"/>
+            <a:ext cx="2431440" cy="456480"/>
           </a:xfrm>
           <a:prstGeom prst="rect">
             <a:avLst/>
@@ -31596,7 +31918,7 @@
         <p:spPr>
           <a:xfrm>
             <a:off x="5687640" y="5440680"/>
-            <a:ext cx="2559960" cy="493560"/>
+            <a:ext cx="2559600" cy="493200"/>
           </a:xfrm>
           <a:prstGeom prst="rect">
             <a:avLst/>
@@ -31642,7 +31964,7 @@
         <p:spPr>
           <a:xfrm>
             <a:off x="5751720" y="5459040"/>
-            <a:ext cx="2431800" cy="456840"/>
+            <a:ext cx="2431440" cy="456480"/>
           </a:xfrm>
           <a:prstGeom prst="rect">
             <a:avLst/>
@@ -31703,7 +32025,7 @@
         <p:spPr>
           <a:xfrm>
             <a:off x="8247960" y="5440680"/>
-            <a:ext cx="2925720" cy="493560"/>
+            <a:ext cx="2925360" cy="493200"/>
           </a:xfrm>
           <a:prstGeom prst="rect">
             <a:avLst/>
@@ -31749,7 +32071,7 @@
         <p:spPr>
           <a:xfrm>
             <a:off x="8312040" y="5459040"/>
-            <a:ext cx="2797560" cy="456840"/>
+            <a:ext cx="2797200" cy="456480"/>
           </a:xfrm>
           <a:prstGeom prst="rect">
             <a:avLst/>
@@ -31846,7 +32168,7 @@
         <p:spPr>
           <a:xfrm>
             <a:off x="567000" y="5934600"/>
-            <a:ext cx="2559960" cy="493560"/>
+            <a:ext cx="2559600" cy="493200"/>
           </a:xfrm>
           <a:prstGeom prst="rect">
             <a:avLst/>
@@ -31892,7 +32214,7 @@
         <p:spPr>
           <a:xfrm>
             <a:off x="631080" y="5952600"/>
-            <a:ext cx="2431800" cy="456840"/>
+            <a:ext cx="2431440" cy="456480"/>
           </a:xfrm>
           <a:prstGeom prst="rect">
             <a:avLst/>
@@ -31952,7 +32274,7 @@
         <p:spPr>
           <a:xfrm>
             <a:off x="3127320" y="5934600"/>
-            <a:ext cx="2559960" cy="493560"/>
+            <a:ext cx="2559600" cy="493200"/>
           </a:xfrm>
           <a:prstGeom prst="rect">
             <a:avLst/>
@@ -31998,7 +32320,7 @@
         <p:spPr>
           <a:xfrm>
             <a:off x="3191400" y="5952600"/>
-            <a:ext cx="2431800" cy="456840"/>
+            <a:ext cx="2431440" cy="456480"/>
           </a:xfrm>
           <a:prstGeom prst="rect">
             <a:avLst/>
@@ -32058,7 +32380,7 @@
         <p:spPr>
           <a:xfrm>
             <a:off x="5687640" y="5934600"/>
-            <a:ext cx="2559960" cy="493560"/>
+            <a:ext cx="2559600" cy="493200"/>
           </a:xfrm>
           <a:prstGeom prst="rect">
             <a:avLst/>
@@ -32104,7 +32426,7 @@
         <p:spPr>
           <a:xfrm>
             <a:off x="5751720" y="5952600"/>
-            <a:ext cx="2431800" cy="456840"/>
+            <a:ext cx="2431440" cy="456480"/>
           </a:xfrm>
           <a:prstGeom prst="rect">
             <a:avLst/>
@@ -32164,7 +32486,7 @@
         <p:spPr>
           <a:xfrm>
             <a:off x="8247960" y="5934600"/>
-            <a:ext cx="2925720" cy="493560"/>
+            <a:ext cx="2925360" cy="493200"/>
           </a:xfrm>
           <a:prstGeom prst="rect">
             <a:avLst/>
@@ -32210,7 +32532,7 @@
         <p:spPr>
           <a:xfrm>
             <a:off x="8312040" y="5952600"/>
-            <a:ext cx="2797560" cy="456840"/>
+            <a:ext cx="2797200" cy="456480"/>
           </a:xfrm>
           <a:prstGeom prst="rect">
             <a:avLst/>
@@ -32307,7 +32629,7 @@
         <p:spPr>
           <a:xfrm>
             <a:off x="11475720" y="6510600"/>
-            <a:ext cx="799560" cy="299520"/>
+            <a:ext cx="799200" cy="299160"/>
           </a:xfrm>
           <a:prstGeom prst="rect">
             <a:avLst/>
@@ -32327,6 +32649,9 @@
                 <a:spcPct val="100000"/>
               </a:lnSpc>
               <a:buNone/>
+              <a:tabLst>
+                <a:tab pos="0" algn="l"/>
+              </a:tabLst>
               <a:defRPr lang="en-US" sz="1200" b="0" u="none" strike="noStrike">
                 <a:solidFill>
                   <a:srgbClr val="667085"/>
@@ -32344,8 +32669,11 @@
                 <a:spcPct val="100000"/>
               </a:lnSpc>
               <a:buNone/>
+              <a:tabLst>
+                <a:tab pos="0" algn="l"/>
+              </a:tabLst>
             </a:pPr>
-            <a:fld id="{9476CD39-DCD2-426A-864E-AC8B8729489E}" type="slidenum">
+            <a:fld id="{BB0F92DD-C338-4F00-B922-3A66ED839364}" type="slidenum">
               <a:rPr lang="en-US" sz="1200" b="0" u="none" strike="noStrike">
                 <a:solidFill>
                   <a:srgbClr val="667085"/>
@@ -32407,7 +32735,7 @@
         <p:spPr>
           <a:xfrm>
             <a:off x="530280" y="329040"/>
-            <a:ext cx="10972440" cy="438480"/>
+            <a:ext cx="10972080" cy="438120"/>
           </a:xfrm>
           <a:prstGeom prst="rect">
             <a:avLst/>
@@ -32486,7 +32814,7 @@
         <p:spPr>
           <a:xfrm>
             <a:off x="548640" y="841320"/>
-            <a:ext cx="10972440" cy="310680"/>
+            <a:ext cx="10972080" cy="310320"/>
           </a:xfrm>
           <a:prstGeom prst="rect">
             <a:avLst/>
@@ -32547,7 +32875,7 @@
         <p:spPr>
           <a:xfrm>
             <a:off x="594360" y="1417320"/>
-            <a:ext cx="2057040" cy="1874160"/>
+            <a:ext cx="2056680" cy="1873800"/>
           </a:xfrm>
           <a:prstGeom prst="roundRect">
             <a:avLst>
@@ -32595,7 +32923,7 @@
         <p:spPr>
           <a:xfrm>
             <a:off x="758880" y="1508760"/>
-            <a:ext cx="1728000" cy="273960"/>
+            <a:ext cx="1727640" cy="273600"/>
           </a:xfrm>
           <a:prstGeom prst="rect">
             <a:avLst/>
@@ -32613,7 +32941,7 @@
         </p:style>
         <p:txBody>
           <a:bodyPr lIns="0" tIns="0" rIns="0" bIns="0" anchor="ctr">
-            <a:normAutofit/>
+            <a:normAutofit lnSpcReduction="9999"/>
           </a:bodyPr>
           <a:p>
             <a:pPr defTabSz="914400">
@@ -32656,7 +32984,7 @@
         <p:spPr>
           <a:xfrm>
             <a:off x="758880" y="1837800"/>
-            <a:ext cx="1728000" cy="1362240"/>
+            <a:ext cx="1727640" cy="1361880"/>
           </a:xfrm>
           <a:prstGeom prst="rect">
             <a:avLst/>
@@ -32789,7 +33117,7 @@
         <p:spPr>
           <a:xfrm>
             <a:off x="2880360" y="1417320"/>
-            <a:ext cx="2057040" cy="1874160"/>
+            <a:ext cx="2056680" cy="1873800"/>
           </a:xfrm>
           <a:prstGeom prst="roundRect">
             <a:avLst>
@@ -32837,7 +33165,7 @@
         <p:spPr>
           <a:xfrm>
             <a:off x="3044880" y="1508760"/>
-            <a:ext cx="1728000" cy="273960"/>
+            <a:ext cx="1727640" cy="273600"/>
           </a:xfrm>
           <a:prstGeom prst="rect">
             <a:avLst/>
@@ -32894,7 +33222,7 @@
         <p:spPr>
           <a:xfrm>
             <a:off x="3044880" y="1837800"/>
-            <a:ext cx="1728000" cy="1362240"/>
+            <a:ext cx="1727640" cy="1361880"/>
           </a:xfrm>
           <a:prstGeom prst="rect">
             <a:avLst/>
@@ -32977,7 +33305,7 @@
         <p:spPr>
           <a:xfrm>
             <a:off x="5166360" y="1417320"/>
-            <a:ext cx="2057040" cy="1874160"/>
+            <a:ext cx="2056680" cy="1873800"/>
           </a:xfrm>
           <a:prstGeom prst="roundRect">
             <a:avLst>
@@ -33025,7 +33353,7 @@
         <p:spPr>
           <a:xfrm>
             <a:off x="5330880" y="1508760"/>
-            <a:ext cx="1728000" cy="273960"/>
+            <a:ext cx="1727640" cy="273600"/>
           </a:xfrm>
           <a:prstGeom prst="rect">
             <a:avLst/>
@@ -33082,7 +33410,7 @@
         <p:spPr>
           <a:xfrm>
             <a:off x="5330880" y="1837800"/>
-            <a:ext cx="1728000" cy="1362240"/>
+            <a:ext cx="1727640" cy="1361880"/>
           </a:xfrm>
           <a:prstGeom prst="rect">
             <a:avLst/>
@@ -33187,7 +33515,7 @@
         <p:spPr>
           <a:xfrm>
             <a:off x="7452360" y="1417320"/>
-            <a:ext cx="2057040" cy="1874160"/>
+            <a:ext cx="2056680" cy="1873800"/>
           </a:xfrm>
           <a:prstGeom prst="roundRect">
             <a:avLst>
@@ -33235,7 +33563,7 @@
         <p:spPr>
           <a:xfrm>
             <a:off x="7616880" y="1508760"/>
-            <a:ext cx="1728000" cy="273960"/>
+            <a:ext cx="1727640" cy="273600"/>
           </a:xfrm>
           <a:prstGeom prst="rect">
             <a:avLst/>
@@ -33253,7 +33581,7 @@
         </p:style>
         <p:txBody>
           <a:bodyPr lIns="0" tIns="0" rIns="0" bIns="0" anchor="ctr">
-            <a:normAutofit/>
+            <a:normAutofit lnSpcReduction="9999"/>
           </a:bodyPr>
           <a:p>
             <a:pPr defTabSz="914400">
@@ -33296,7 +33624,7 @@
         <p:spPr>
           <a:xfrm>
             <a:off x="7616880" y="1837800"/>
-            <a:ext cx="1728000" cy="1362240"/>
+            <a:ext cx="1727640" cy="1361880"/>
           </a:xfrm>
           <a:prstGeom prst="rect">
             <a:avLst/>
@@ -33387,7 +33715,7 @@
         <p:spPr>
           <a:xfrm>
             <a:off x="9738360" y="1417320"/>
-            <a:ext cx="2057040" cy="1874160"/>
+            <a:ext cx="2056680" cy="1873800"/>
           </a:xfrm>
           <a:prstGeom prst="roundRect">
             <a:avLst>
@@ -33435,7 +33763,7 @@
         <p:spPr>
           <a:xfrm>
             <a:off x="9902880" y="1508760"/>
-            <a:ext cx="1728000" cy="273960"/>
+            <a:ext cx="1727640" cy="273600"/>
           </a:xfrm>
           <a:prstGeom prst="rect">
             <a:avLst/>
@@ -33492,7 +33820,7 @@
         <p:spPr>
           <a:xfrm>
             <a:off x="9902880" y="1837800"/>
-            <a:ext cx="1728000" cy="1362240"/>
+            <a:ext cx="1727640" cy="1361880"/>
           </a:xfrm>
           <a:prstGeom prst="rect">
             <a:avLst/>
@@ -33777,7 +34105,7 @@
         <p:spPr>
           <a:xfrm>
             <a:off x="594360" y="3886200"/>
-            <a:ext cx="5321520" cy="1352880"/>
+            <a:ext cx="5321160" cy="1352520"/>
           </a:xfrm>
           <a:prstGeom prst="roundRect">
             <a:avLst>
@@ -33825,7 +34153,7 @@
         <p:spPr>
           <a:xfrm>
             <a:off x="758880" y="3977640"/>
-            <a:ext cx="4992120" cy="273960"/>
+            <a:ext cx="4991760" cy="273600"/>
           </a:xfrm>
           <a:prstGeom prst="rect">
             <a:avLst/>
@@ -33843,7 +34171,7 @@
         </p:style>
         <p:txBody>
           <a:bodyPr lIns="0" tIns="0" rIns="0" bIns="0" anchor="ctr">
-            <a:normAutofit/>
+            <a:normAutofit lnSpcReduction="9999"/>
           </a:bodyPr>
           <a:p>
             <a:pPr defTabSz="914400">
@@ -33886,7 +34214,7 @@
         <p:spPr>
           <a:xfrm>
             <a:off x="758880" y="4306680"/>
-            <a:ext cx="4992120" cy="840960"/>
+            <a:ext cx="4991760" cy="840600"/>
           </a:xfrm>
           <a:prstGeom prst="rect">
             <a:avLst/>
@@ -33969,7 +34297,7 @@
         <p:spPr>
           <a:xfrm>
             <a:off x="6144840" y="3886200"/>
-            <a:ext cx="5440320" cy="1352880"/>
+            <a:ext cx="5439960" cy="1352520"/>
           </a:xfrm>
           <a:prstGeom prst="roundRect">
             <a:avLst>
@@ -34017,7 +34345,7 @@
         <p:spPr>
           <a:xfrm>
             <a:off x="6309360" y="3977640"/>
-            <a:ext cx="5111280" cy="273960"/>
+            <a:ext cx="5110920" cy="273600"/>
           </a:xfrm>
           <a:prstGeom prst="rect">
             <a:avLst/>
@@ -34035,7 +34363,7 @@
         </p:style>
         <p:txBody>
           <a:bodyPr lIns="0" tIns="0" rIns="0" bIns="0" anchor="ctr">
-            <a:normAutofit/>
+            <a:normAutofit lnSpcReduction="9999"/>
           </a:bodyPr>
           <a:p>
             <a:pPr defTabSz="914400">
@@ -34090,7 +34418,7 @@
         <p:spPr>
           <a:xfrm>
             <a:off x="6309360" y="4306680"/>
-            <a:ext cx="5111280" cy="840960"/>
+            <a:ext cx="5110920" cy="840600"/>
           </a:xfrm>
           <a:prstGeom prst="rect">
             <a:avLst/>
@@ -34293,7 +34621,7 @@
         <p:spPr>
           <a:xfrm>
             <a:off x="11475720" y="6510600"/>
-            <a:ext cx="799560" cy="299520"/>
+            <a:ext cx="799200" cy="299160"/>
           </a:xfrm>
           <a:prstGeom prst="rect">
             <a:avLst/>
@@ -34313,6 +34641,9 @@
                 <a:spcPct val="100000"/>
               </a:lnSpc>
               <a:buNone/>
+              <a:tabLst>
+                <a:tab pos="0" algn="l"/>
+              </a:tabLst>
               <a:defRPr lang="en-US" sz="1200" b="0" u="none" strike="noStrike">
                 <a:solidFill>
                   <a:srgbClr val="667085"/>
@@ -34330,8 +34661,11 @@
                 <a:spcPct val="100000"/>
               </a:lnSpc>
               <a:buNone/>
+              <a:tabLst>
+                <a:tab pos="0" algn="l"/>
+              </a:tabLst>
             </a:pPr>
-            <a:fld id="{F1F6F582-216F-4408-8EBF-46D91EC882AB}" type="slidenum">
+            <a:fld id="{2555E800-E44A-4D8E-BD1F-3C9C6D68D168}" type="slidenum">
               <a:rPr lang="en-US" sz="1200" b="0" u="none" strike="noStrike">
                 <a:solidFill>
                   <a:srgbClr val="667085"/>
